--- a/output/wordlabs-think-3day.pptx
+++ b/output/wordlabs-think-3day.pptx
@@ -5622,7 +5622,7 @@
                 <a:ea typeface="Trebuchet MS" pitchFamily="34" charset="-122"/>
                 <a:cs typeface="Trebuchet MS" pitchFamily="34" charset="-120"/>
               </a:rPr>
-              <a:t>0</a:t>
+              <a:t>1</a:t>
             </a:r>
             <a:pPr algn="ctr" indent="0" marL="0">
               <a:buNone/>
@@ -6040,7 +6040,7 @@
                 <a:ea typeface="Calibri" pitchFamily="34" charset="-122"/>
                 <a:cs typeface="Calibri" pitchFamily="34" charset="-120"/>
               </a:rPr>
-              <a:t>A good </a:t>
+              <a:t>She began </a:t>
             </a:r>
             <a:pPr algn="l" indent="0" marL="0">
               <a:buNone/>
@@ -6057,7 +6057,7 @@
                 <a:ea typeface="Calibri" pitchFamily="34" charset="-122"/>
                 <a:cs typeface="Calibri" pitchFamily="34" charset="-120"/>
               </a:rPr>
-              <a:t>thinker</a:t>
+              <a:t>rethinking</a:t>
             </a:r>
             <a:pPr algn="l" indent="0" marL="0">
               <a:buNone/>
@@ -6071,7 +6071,7 @@
                 <a:ea typeface="Calibri" pitchFamily="34" charset="-122"/>
                 <a:cs typeface="Calibri" pitchFamily="34" charset="-120"/>
               </a:rPr>
-              <a:t> will always </a:t>
+              <a:t> her plan, and her </a:t>
             </a:r>
             <a:pPr algn="l" indent="0" marL="0">
               <a:buNone/>
@@ -6088,7 +6088,7 @@
                 <a:ea typeface="Calibri" pitchFamily="34" charset="-122"/>
                 <a:cs typeface="Calibri" pitchFamily="34" charset="-120"/>
               </a:rPr>
-              <a:t>rethink</a:t>
+              <a:t>thinking</a:t>
             </a:r>
             <a:pPr algn="l" indent="0" marL="0">
               <a:buNone/>
@@ -6102,7 +6102,7 @@
                 <a:ea typeface="Calibri" pitchFamily="34" charset="-122"/>
                 <a:cs typeface="Calibri" pitchFamily="34" charset="-120"/>
               </a:rPr>
-              <a:t> a plan if something goes wrong.</a:t>
+              <a:t> became much clearer after a good night's sleep.</a:t>
             </a:r>
             <a:endParaRPr lang="en-US" sz="1800" dirty="0"/>
           </a:p>
@@ -6257,7 +6257,7 @@
                 <a:ea typeface="Trebuchet MS" pitchFamily="34" charset="-122"/>
                 <a:cs typeface="Trebuchet MS" pitchFamily="34" charset="-120"/>
               </a:rPr>
-              <a:t>thinker</a:t>
+              <a:t>rethinking</a:t>
             </a:r>
             <a:endParaRPr lang="en-US" sz="1400" dirty="0"/>
           </a:p>
@@ -6385,7 +6385,7 @@
                 <a:ea typeface="Trebuchet MS" pitchFamily="34" charset="-122"/>
                 <a:cs typeface="Trebuchet MS" pitchFamily="34" charset="-120"/>
               </a:rPr>
-              <a:t>rethink</a:t>
+              <a:t>thinking</a:t>
             </a:r>
             <a:endParaRPr lang="en-US" sz="1400" dirty="0"/>
           </a:p>
@@ -6855,7 +6855,7 @@
                 <a:ea typeface="Trebuchet MS" pitchFamily="34" charset="-122"/>
                 <a:cs typeface="Trebuchet MS" pitchFamily="34" charset="-120"/>
               </a:rPr>
-              <a:t>thinker</a:t>
+              <a:t>rethinking</a:t>
             </a:r>
             <a:endParaRPr lang="en-US" sz="2800" dirty="0"/>
           </a:p>
@@ -7682,7 +7682,7 @@
                 <a:ea typeface="Trebuchet MS" pitchFamily="34" charset="-122"/>
                 <a:cs typeface="Trebuchet MS" pitchFamily="34" charset="-120"/>
               </a:rPr>
-              <a:t>thinker</a:t>
+              <a:t>rethinking</a:t>
             </a:r>
             <a:endParaRPr lang="en-US" sz="2800" dirty="0"/>
           </a:p>
@@ -7762,7 +7762,7 @@
         </p:nvSpPr>
         <p:spPr>
           <a:xfrm>
-            <a:off x="2938272" y="2258568"/>
+            <a:off x="2221992" y="2258568"/>
             <a:ext cx="1828800" cy="292608"/>
           </a:xfrm>
           <a:prstGeom prst="rect">
@@ -7771,11 +7771,11 @@
             </a:avLst>
           </a:prstGeom>
           <a:solidFill>
-            <a:srgbClr val="CCFBF1"/>
+            <a:srgbClr val="DDD6FE"/>
           </a:solidFill>
           <a:ln w="19050">
             <a:solidFill>
-              <a:srgbClr val="0D9488"/>
+              <a:srgbClr val="7C3AED"/>
             </a:solidFill>
             <a:prstDash val="solid"/>
           </a:ln>
@@ -7796,7 +7796,7 @@
         </p:nvSpPr>
         <p:spPr>
           <a:xfrm>
-            <a:off x="2938272" y="2258568"/>
+            <a:off x="2221992" y="2258568"/>
             <a:ext cx="1828800" cy="292608"/>
           </a:xfrm>
           <a:prstGeom prst="rect">
@@ -7815,13 +7815,13 @@
             <a:r>
               <a:rPr lang="en-US" sz="1300" b="1" dirty="0">
                 <a:solidFill>
-                  <a:srgbClr val="0F766E"/>
+                  <a:srgbClr val="4C1D95"/>
                 </a:solidFill>
                 <a:latin typeface="Trebuchet MS" pitchFamily="34" charset="0"/>
                 <a:ea typeface="Trebuchet MS" pitchFamily="34" charset="-122"/>
                 <a:cs typeface="Trebuchet MS" pitchFamily="34" charset="-120"/>
               </a:rPr>
-              <a:t>think</a:t>
+              <a:t>re</a:t>
             </a:r>
             <a:endParaRPr lang="en-US" sz="1300" dirty="0"/>
           </a:p>
@@ -7835,7 +7835,7 @@
         </p:nvSpPr>
         <p:spPr>
           <a:xfrm>
-            <a:off x="2938272" y="2569464"/>
+            <a:off x="2221992" y="2569464"/>
             <a:ext cx="1828800" cy="201168"/>
           </a:xfrm>
           <a:prstGeom prst="rect">
@@ -7860,7 +7860,7 @@
                 <a:ea typeface="Calibri" pitchFamily="34" charset="-122"/>
                 <a:cs typeface="Calibri" pitchFamily="34" charset="-120"/>
               </a:rPr>
-              <a:t>to use the mind</a:t>
+              <a:t>again</a:t>
             </a:r>
             <a:endParaRPr lang="en-US" sz="850" dirty="0"/>
           </a:p>
@@ -7874,7 +7874,7 @@
         </p:nvSpPr>
         <p:spPr>
           <a:xfrm>
-            <a:off x="5803392" y="2258568"/>
+            <a:off x="4370832" y="2258568"/>
             <a:ext cx="1828800" cy="292608"/>
           </a:xfrm>
           <a:prstGeom prst="rect">
@@ -7883,11 +7883,11 @@
             </a:avLst>
           </a:prstGeom>
           <a:solidFill>
-            <a:srgbClr val="FCE7F3"/>
+            <a:srgbClr val="CCFBF1"/>
           </a:solidFill>
           <a:ln w="19050">
             <a:solidFill>
-              <a:srgbClr val="DB2777"/>
+              <a:srgbClr val="0D9488"/>
             </a:solidFill>
             <a:prstDash val="solid"/>
           </a:ln>
@@ -7908,7 +7908,7 @@
         </p:nvSpPr>
         <p:spPr>
           <a:xfrm>
-            <a:off x="5803392" y="2258568"/>
+            <a:off x="4370832" y="2258568"/>
             <a:ext cx="1828800" cy="292608"/>
           </a:xfrm>
           <a:prstGeom prst="rect">
@@ -7927,13 +7927,13 @@
             <a:r>
               <a:rPr lang="en-US" sz="1300" b="1" dirty="0">
                 <a:solidFill>
-                  <a:srgbClr val="9D174D"/>
+                  <a:srgbClr val="0F766E"/>
                 </a:solidFill>
                 <a:latin typeface="Trebuchet MS" pitchFamily="34" charset="0"/>
                 <a:ea typeface="Trebuchet MS" pitchFamily="34" charset="-122"/>
                 <a:cs typeface="Trebuchet MS" pitchFamily="34" charset="-120"/>
               </a:rPr>
-              <a:t>er</a:t>
+              <a:t>think</a:t>
             </a:r>
             <a:endParaRPr lang="en-US" sz="1300" dirty="0"/>
           </a:p>
@@ -7947,7 +7947,7 @@
         </p:nvSpPr>
         <p:spPr>
           <a:xfrm>
-            <a:off x="5803392" y="2569464"/>
+            <a:off x="4370832" y="2569464"/>
             <a:ext cx="1828800" cy="201168"/>
           </a:xfrm>
           <a:prstGeom prst="rect">
@@ -7972,7 +7972,7 @@
                 <a:ea typeface="Calibri" pitchFamily="34" charset="-122"/>
                 <a:cs typeface="Calibri" pitchFamily="34" charset="-120"/>
               </a:rPr>
-              <a:t>a person who does something</a:t>
+              <a:t>to use the mind</a:t>
             </a:r>
             <a:endParaRPr lang="en-US" sz="850" dirty="0"/>
           </a:p>
@@ -7981,6 +7981,118 @@
       <p:sp>
         <p:nvSpPr>
           <p:cNvPr id="22" name="Shape 20"/>
+          <p:cNvSpPr/>
+          <p:nvPr/>
+        </p:nvSpPr>
+        <p:spPr>
+          <a:xfrm>
+            <a:off x="6519672" y="2258568"/>
+            <a:ext cx="1828800" cy="292608"/>
+          </a:xfrm>
+          <a:prstGeom prst="rect">
+            <a:avLst>
+              <a:gd name="adj" fmla="val 25000"/>
+            </a:avLst>
+          </a:prstGeom>
+          <a:solidFill>
+            <a:srgbClr val="FCE7F3"/>
+          </a:solidFill>
+          <a:ln w="19050">
+            <a:solidFill>
+              <a:srgbClr val="DB2777"/>
+            </a:solidFill>
+            <a:prstDash val="solid"/>
+          </a:ln>
+          <a:effectLst>
+            <a:outerShdw sx="100000" sy="100000" kx="0" ky="0" algn="bl" rotWithShape="0" blurRad="101600" dist="38100" dir="8100000">
+              <a:srgbClr val="000000">
+                <a:alpha val="12000"/>
+              </a:srgbClr>
+            </a:outerShdw>
+          </a:effectLst>
+        </p:spPr>
+      </p:sp>
+      <p:sp>
+        <p:nvSpPr>
+          <p:cNvPr id="23" name="Text 21"/>
+          <p:cNvSpPr/>
+          <p:nvPr/>
+        </p:nvSpPr>
+        <p:spPr>
+          <a:xfrm>
+            <a:off x="6519672" y="2258568"/>
+            <a:ext cx="1828800" cy="292608"/>
+          </a:xfrm>
+          <a:prstGeom prst="rect">
+            <a:avLst/>
+          </a:prstGeom>
+          <a:noFill/>
+          <a:ln/>
+        </p:spPr>
+        <p:txBody>
+          <a:bodyPr wrap="square" lIns="0" tIns="0" rIns="0" bIns="0" rtlCol="0" anchor="ctr"/>
+          <a:lstStyle/>
+          <a:p>
+            <a:pPr algn="ctr" indent="0" marL="0">
+              <a:buNone/>
+            </a:pPr>
+            <a:r>
+              <a:rPr lang="en-US" sz="1300" b="1" dirty="0">
+                <a:solidFill>
+                  <a:srgbClr val="9D174D"/>
+                </a:solidFill>
+                <a:latin typeface="Trebuchet MS" pitchFamily="34" charset="0"/>
+                <a:ea typeface="Trebuchet MS" pitchFamily="34" charset="-122"/>
+                <a:cs typeface="Trebuchet MS" pitchFamily="34" charset="-120"/>
+              </a:rPr>
+              <a:t>ing</a:t>
+            </a:r>
+            <a:endParaRPr lang="en-US" sz="1300" dirty="0"/>
+          </a:p>
+        </p:txBody>
+      </p:sp>
+      <p:sp>
+        <p:nvSpPr>
+          <p:cNvPr id="24" name="Text 22"/>
+          <p:cNvSpPr/>
+          <p:nvPr/>
+        </p:nvSpPr>
+        <p:spPr>
+          <a:xfrm>
+            <a:off x="6519672" y="2569464"/>
+            <a:ext cx="1828800" cy="201168"/>
+          </a:xfrm>
+          <a:prstGeom prst="rect">
+            <a:avLst/>
+          </a:prstGeom>
+          <a:noFill/>
+          <a:ln/>
+        </p:spPr>
+        <p:txBody>
+          <a:bodyPr wrap="square" lIns="0" tIns="0" rIns="0" bIns="0" rtlCol="0" anchor="t"/>
+          <a:lstStyle/>
+          <a:p>
+            <a:pPr algn="ctr" indent="0" marL="0">
+              <a:buNone/>
+            </a:pPr>
+            <a:r>
+              <a:rPr lang="en-US" sz="850" dirty="0">
+                <a:solidFill>
+                  <a:srgbClr val="475569"/>
+                </a:solidFill>
+                <a:latin typeface="Calibri" pitchFamily="34" charset="0"/>
+                <a:ea typeface="Calibri" pitchFamily="34" charset="-122"/>
+                <a:cs typeface="Calibri" pitchFamily="34" charset="-120"/>
+              </a:rPr>
+              <a:t>ongoing action</a:t>
+            </a:r>
+            <a:endParaRPr lang="en-US" sz="850" dirty="0"/>
+          </a:p>
+        </p:txBody>
+      </p:sp>
+      <p:sp>
+        <p:nvSpPr>
+          <p:cNvPr id="25" name="Shape 23"/>
           <p:cNvSpPr/>
           <p:nvPr/>
         </p:nvSpPr>
@@ -8007,7 +8119,7 @@
       </p:sp>
       <p:sp>
         <p:nvSpPr>
-          <p:cNvPr id="23" name="Text 21"/>
+          <p:cNvPr id="26" name="Text 24"/>
           <p:cNvSpPr/>
           <p:nvPr/>
         </p:nvSpPr>
@@ -8046,7 +8158,7 @@
       </p:sp>
       <p:sp>
         <p:nvSpPr>
-          <p:cNvPr id="24" name="Shape 22"/>
+          <p:cNvPr id="27" name="Shape 25"/>
           <p:cNvSpPr/>
           <p:nvPr/>
         </p:nvSpPr>
@@ -8073,7 +8185,7 @@
       </p:sp>
       <p:sp>
         <p:nvSpPr>
-          <p:cNvPr id="25" name="Text 23"/>
+          <p:cNvPr id="28" name="Text 26"/>
           <p:cNvSpPr/>
           <p:nvPr/>
         </p:nvSpPr>
@@ -8112,7 +8224,7 @@
       </p:sp>
       <p:sp>
         <p:nvSpPr>
-          <p:cNvPr id="26" name="Shape 24"/>
+          <p:cNvPr id="29" name="Shape 27"/>
           <p:cNvSpPr/>
           <p:nvPr/>
         </p:nvSpPr>
@@ -8139,7 +8251,7 @@
       </p:sp>
       <p:sp>
         <p:nvSpPr>
-          <p:cNvPr id="27" name="Text 25"/>
+          <p:cNvPr id="30" name="Text 28"/>
           <p:cNvSpPr/>
           <p:nvPr/>
         </p:nvSpPr>
@@ -8178,7 +8290,7 @@
       </p:sp>
       <p:sp>
         <p:nvSpPr>
-          <p:cNvPr id="28" name="Shape 26"/>
+          <p:cNvPr id="31" name="Shape 29"/>
           <p:cNvSpPr/>
           <p:nvPr/>
         </p:nvSpPr>
@@ -8205,7 +8317,7 @@
       </p:sp>
       <p:sp>
         <p:nvSpPr>
-          <p:cNvPr id="29" name="Text 27"/>
+          <p:cNvPr id="32" name="Text 30"/>
           <p:cNvSpPr/>
           <p:nvPr/>
         </p:nvSpPr>
@@ -8667,7 +8779,7 @@
                 <a:ea typeface="Trebuchet MS" pitchFamily="34" charset="-122"/>
                 <a:cs typeface="Trebuchet MS" pitchFamily="34" charset="-120"/>
               </a:rPr>
-              <a:t>thinker</a:t>
+              <a:t>rethinking</a:t>
             </a:r>
             <a:endParaRPr lang="en-US" sz="2800" dirty="0"/>
           </a:p>
@@ -8747,7 +8859,7 @@
         </p:nvSpPr>
         <p:spPr>
           <a:xfrm>
-            <a:off x="2938272" y="2258568"/>
+            <a:off x="2221992" y="2258568"/>
             <a:ext cx="1828800" cy="292608"/>
           </a:xfrm>
           <a:prstGeom prst="rect">
@@ -8756,11 +8868,11 @@
             </a:avLst>
           </a:prstGeom>
           <a:solidFill>
-            <a:srgbClr val="CCFBF1"/>
+            <a:srgbClr val="DDD6FE"/>
           </a:solidFill>
           <a:ln w="19050">
             <a:solidFill>
-              <a:srgbClr val="0D9488"/>
+              <a:srgbClr val="7C3AED"/>
             </a:solidFill>
             <a:prstDash val="solid"/>
           </a:ln>
@@ -8781,7 +8893,7 @@
         </p:nvSpPr>
         <p:spPr>
           <a:xfrm>
-            <a:off x="2938272" y="2258568"/>
+            <a:off x="2221992" y="2258568"/>
             <a:ext cx="1828800" cy="292608"/>
           </a:xfrm>
           <a:prstGeom prst="rect">
@@ -8800,13 +8912,13 @@
             <a:r>
               <a:rPr lang="en-US" sz="1300" b="1" dirty="0">
                 <a:solidFill>
-                  <a:srgbClr val="0F766E"/>
+                  <a:srgbClr val="4C1D95"/>
                 </a:solidFill>
                 <a:latin typeface="Trebuchet MS" pitchFamily="34" charset="0"/>
                 <a:ea typeface="Trebuchet MS" pitchFamily="34" charset="-122"/>
                 <a:cs typeface="Trebuchet MS" pitchFamily="34" charset="-120"/>
               </a:rPr>
-              <a:t>think</a:t>
+              <a:t>re</a:t>
             </a:r>
             <a:endParaRPr lang="en-US" sz="1300" dirty="0"/>
           </a:p>
@@ -8820,7 +8932,7 @@
         </p:nvSpPr>
         <p:spPr>
           <a:xfrm>
-            <a:off x="2938272" y="2569464"/>
+            <a:off x="2221992" y="2569464"/>
             <a:ext cx="1828800" cy="201168"/>
           </a:xfrm>
           <a:prstGeom prst="rect">
@@ -8845,7 +8957,7 @@
                 <a:ea typeface="Calibri" pitchFamily="34" charset="-122"/>
                 <a:cs typeface="Calibri" pitchFamily="34" charset="-120"/>
               </a:rPr>
-              <a:t>to use the mind</a:t>
+              <a:t>again</a:t>
             </a:r>
             <a:endParaRPr lang="en-US" sz="850" dirty="0"/>
           </a:p>
@@ -8859,7 +8971,7 @@
         </p:nvSpPr>
         <p:spPr>
           <a:xfrm>
-            <a:off x="5803392" y="2258568"/>
+            <a:off x="4370832" y="2258568"/>
             <a:ext cx="1828800" cy="292608"/>
           </a:xfrm>
           <a:prstGeom prst="rect">
@@ -8868,11 +8980,11 @@
             </a:avLst>
           </a:prstGeom>
           <a:solidFill>
-            <a:srgbClr val="FCE7F3"/>
+            <a:srgbClr val="CCFBF1"/>
           </a:solidFill>
           <a:ln w="19050">
             <a:solidFill>
-              <a:srgbClr val="DB2777"/>
+              <a:srgbClr val="0D9488"/>
             </a:solidFill>
             <a:prstDash val="solid"/>
           </a:ln>
@@ -8893,7 +9005,7 @@
         </p:nvSpPr>
         <p:spPr>
           <a:xfrm>
-            <a:off x="5803392" y="2258568"/>
+            <a:off x="4370832" y="2258568"/>
             <a:ext cx="1828800" cy="292608"/>
           </a:xfrm>
           <a:prstGeom prst="rect">
@@ -8912,13 +9024,13 @@
             <a:r>
               <a:rPr lang="en-US" sz="1300" b="1" dirty="0">
                 <a:solidFill>
-                  <a:srgbClr val="9D174D"/>
+                  <a:srgbClr val="0F766E"/>
                 </a:solidFill>
                 <a:latin typeface="Trebuchet MS" pitchFamily="34" charset="0"/>
                 <a:ea typeface="Trebuchet MS" pitchFamily="34" charset="-122"/>
                 <a:cs typeface="Trebuchet MS" pitchFamily="34" charset="-120"/>
               </a:rPr>
-              <a:t>er</a:t>
+              <a:t>think</a:t>
             </a:r>
             <a:endParaRPr lang="en-US" sz="1300" dirty="0"/>
           </a:p>
@@ -8932,7 +9044,7 @@
         </p:nvSpPr>
         <p:spPr>
           <a:xfrm>
-            <a:off x="5803392" y="2569464"/>
+            <a:off x="4370832" y="2569464"/>
             <a:ext cx="1828800" cy="201168"/>
           </a:xfrm>
           <a:prstGeom prst="rect">
@@ -8957,7 +9069,7 @@
                 <a:ea typeface="Calibri" pitchFamily="34" charset="-122"/>
                 <a:cs typeface="Calibri" pitchFamily="34" charset="-120"/>
               </a:rPr>
-              <a:t>a person who does something</a:t>
+              <a:t>to use the mind</a:t>
             </a:r>
             <a:endParaRPr lang="en-US" sz="850" dirty="0"/>
           </a:p>
@@ -8966,6 +9078,118 @@
       <p:sp>
         <p:nvSpPr>
           <p:cNvPr id="22" name="Shape 20"/>
+          <p:cNvSpPr/>
+          <p:nvPr/>
+        </p:nvSpPr>
+        <p:spPr>
+          <a:xfrm>
+            <a:off x="6519672" y="2258568"/>
+            <a:ext cx="1828800" cy="292608"/>
+          </a:xfrm>
+          <a:prstGeom prst="rect">
+            <a:avLst>
+              <a:gd name="adj" fmla="val 25000"/>
+            </a:avLst>
+          </a:prstGeom>
+          <a:solidFill>
+            <a:srgbClr val="FCE7F3"/>
+          </a:solidFill>
+          <a:ln w="19050">
+            <a:solidFill>
+              <a:srgbClr val="DB2777"/>
+            </a:solidFill>
+            <a:prstDash val="solid"/>
+          </a:ln>
+          <a:effectLst>
+            <a:outerShdw sx="100000" sy="100000" kx="0" ky="0" algn="bl" rotWithShape="0" blurRad="101600" dist="38100" dir="8100000">
+              <a:srgbClr val="000000">
+                <a:alpha val="12000"/>
+              </a:srgbClr>
+            </a:outerShdw>
+          </a:effectLst>
+        </p:spPr>
+      </p:sp>
+      <p:sp>
+        <p:nvSpPr>
+          <p:cNvPr id="23" name="Text 21"/>
+          <p:cNvSpPr/>
+          <p:nvPr/>
+        </p:nvSpPr>
+        <p:spPr>
+          <a:xfrm>
+            <a:off x="6519672" y="2258568"/>
+            <a:ext cx="1828800" cy="292608"/>
+          </a:xfrm>
+          <a:prstGeom prst="rect">
+            <a:avLst/>
+          </a:prstGeom>
+          <a:noFill/>
+          <a:ln/>
+        </p:spPr>
+        <p:txBody>
+          <a:bodyPr wrap="square" lIns="0" tIns="0" rIns="0" bIns="0" rtlCol="0" anchor="ctr"/>
+          <a:lstStyle/>
+          <a:p>
+            <a:pPr algn="ctr" indent="0" marL="0">
+              <a:buNone/>
+            </a:pPr>
+            <a:r>
+              <a:rPr lang="en-US" sz="1300" b="1" dirty="0">
+                <a:solidFill>
+                  <a:srgbClr val="9D174D"/>
+                </a:solidFill>
+                <a:latin typeface="Trebuchet MS" pitchFamily="34" charset="0"/>
+                <a:ea typeface="Trebuchet MS" pitchFamily="34" charset="-122"/>
+                <a:cs typeface="Trebuchet MS" pitchFamily="34" charset="-120"/>
+              </a:rPr>
+              <a:t>ing</a:t>
+            </a:r>
+            <a:endParaRPr lang="en-US" sz="1300" dirty="0"/>
+          </a:p>
+        </p:txBody>
+      </p:sp>
+      <p:sp>
+        <p:nvSpPr>
+          <p:cNvPr id="24" name="Text 22"/>
+          <p:cNvSpPr/>
+          <p:nvPr/>
+        </p:nvSpPr>
+        <p:spPr>
+          <a:xfrm>
+            <a:off x="6519672" y="2569464"/>
+            <a:ext cx="1828800" cy="201168"/>
+          </a:xfrm>
+          <a:prstGeom prst="rect">
+            <a:avLst/>
+          </a:prstGeom>
+          <a:noFill/>
+          <a:ln/>
+        </p:spPr>
+        <p:txBody>
+          <a:bodyPr wrap="square" lIns="0" tIns="0" rIns="0" bIns="0" rtlCol="0" anchor="t"/>
+          <a:lstStyle/>
+          <a:p>
+            <a:pPr algn="ctr" indent="0" marL="0">
+              <a:buNone/>
+            </a:pPr>
+            <a:r>
+              <a:rPr lang="en-US" sz="850" dirty="0">
+                <a:solidFill>
+                  <a:srgbClr val="475569"/>
+                </a:solidFill>
+                <a:latin typeface="Calibri" pitchFamily="34" charset="0"/>
+                <a:ea typeface="Calibri" pitchFamily="34" charset="-122"/>
+                <a:cs typeface="Calibri" pitchFamily="34" charset="-120"/>
+              </a:rPr>
+              <a:t>ongoing action</a:t>
+            </a:r>
+            <a:endParaRPr lang="en-US" sz="850" dirty="0"/>
+          </a:p>
+        </p:txBody>
+      </p:sp>
+      <p:sp>
+        <p:nvSpPr>
+          <p:cNvPr id="25" name="Shape 23"/>
           <p:cNvSpPr/>
           <p:nvPr/>
         </p:nvSpPr>
@@ -8992,7 +9216,7 @@
       </p:sp>
       <p:sp>
         <p:nvSpPr>
-          <p:cNvPr id="23" name="Text 21"/>
+          <p:cNvPr id="26" name="Text 24"/>
           <p:cNvSpPr/>
           <p:nvPr/>
         </p:nvSpPr>
@@ -9031,7 +9255,7 @@
       </p:sp>
       <p:sp>
         <p:nvSpPr>
-          <p:cNvPr id="24" name="Shape 22"/>
+          <p:cNvPr id="27" name="Shape 25"/>
           <p:cNvSpPr/>
           <p:nvPr/>
         </p:nvSpPr>
@@ -9058,13 +9282,13 @@
       </p:sp>
       <p:sp>
         <p:nvSpPr>
-          <p:cNvPr id="25" name="Shape 23"/>
-          <p:cNvSpPr/>
-          <p:nvPr/>
-        </p:nvSpPr>
-        <p:spPr>
-          <a:xfrm>
-            <a:off x="2999232" y="3364992"/>
+          <p:cNvPr id="28" name="Shape 26"/>
+          <p:cNvSpPr/>
+          <p:nvPr/>
+        </p:nvSpPr>
+        <p:spPr>
+          <a:xfrm>
+            <a:off x="2313432" y="3364992"/>
             <a:ext cx="1645920" cy="475488"/>
           </a:xfrm>
           <a:prstGeom prst="rect">
@@ -9085,13 +9309,13 @@
       </p:sp>
       <p:sp>
         <p:nvSpPr>
-          <p:cNvPr id="26" name="Text 24"/>
-          <p:cNvSpPr/>
-          <p:nvPr/>
-        </p:nvSpPr>
-        <p:spPr>
-          <a:xfrm>
-            <a:off x="2999232" y="3364992"/>
+          <p:cNvPr id="29" name="Text 27"/>
+          <p:cNvSpPr/>
+          <p:nvPr/>
+        </p:nvSpPr>
+        <p:spPr>
+          <a:xfrm>
+            <a:off x="2313432" y="3364992"/>
             <a:ext cx="1645920" cy="475488"/>
           </a:xfrm>
           <a:prstGeom prst="rect">
@@ -9116,7 +9340,7 @@
                 <a:ea typeface="Trebuchet MS" pitchFamily="34" charset="-122"/>
                 <a:cs typeface="Trebuchet MS" pitchFamily="34" charset="-120"/>
               </a:rPr>
-              <a:t>think</a:t>
+              <a:t>re</a:t>
             </a:r>
             <a:endParaRPr lang="en-US" sz="1400" dirty="0"/>
           </a:p>
@@ -9124,14 +9348,14 @@
       </p:sp>
       <p:sp>
         <p:nvSpPr>
-          <p:cNvPr id="27" name="Text 25"/>
-          <p:cNvSpPr/>
-          <p:nvPr/>
-        </p:nvSpPr>
-        <p:spPr>
-          <a:xfrm>
-            <a:off x="4645152" y="3364992"/>
-            <a:ext cx="1097280" cy="475488"/>
+          <p:cNvPr id="30" name="Text 28"/>
+          <p:cNvSpPr/>
+          <p:nvPr/>
+        </p:nvSpPr>
+        <p:spPr>
+          <a:xfrm>
+            <a:off x="3959352" y="3364992"/>
+            <a:ext cx="411480" cy="475488"/>
           </a:xfrm>
           <a:prstGeom prst="rect">
             <a:avLst/>
@@ -9163,13 +9387,13 @@
       </p:sp>
       <p:sp>
         <p:nvSpPr>
-          <p:cNvPr id="28" name="Shape 26"/>
-          <p:cNvSpPr/>
-          <p:nvPr/>
-        </p:nvSpPr>
-        <p:spPr>
-          <a:xfrm>
-            <a:off x="5742432" y="3364992"/>
+          <p:cNvPr id="31" name="Shape 29"/>
+          <p:cNvSpPr/>
+          <p:nvPr/>
+        </p:nvSpPr>
+        <p:spPr>
+          <a:xfrm>
+            <a:off x="4370832" y="3364992"/>
             <a:ext cx="1645920" cy="475488"/>
           </a:xfrm>
           <a:prstGeom prst="rect">
@@ -9190,13 +9414,13 @@
       </p:sp>
       <p:sp>
         <p:nvSpPr>
-          <p:cNvPr id="29" name="Text 27"/>
-          <p:cNvSpPr/>
-          <p:nvPr/>
-        </p:nvSpPr>
-        <p:spPr>
-          <a:xfrm>
-            <a:off x="5742432" y="3364992"/>
+          <p:cNvPr id="32" name="Text 30"/>
+          <p:cNvSpPr/>
+          <p:nvPr/>
+        </p:nvSpPr>
+        <p:spPr>
+          <a:xfrm>
+            <a:off x="4370832" y="3364992"/>
             <a:ext cx="1645920" cy="475488"/>
           </a:xfrm>
           <a:prstGeom prst="rect">
@@ -9221,7 +9445,7 @@
                 <a:ea typeface="Trebuchet MS" pitchFamily="34" charset="-122"/>
                 <a:cs typeface="Trebuchet MS" pitchFamily="34" charset="-120"/>
               </a:rPr>
-              <a:t>er</a:t>
+              <a:t>think</a:t>
             </a:r>
             <a:endParaRPr lang="en-US" sz="1400" dirty="0"/>
           </a:p>
@@ -9229,7 +9453,112 @@
       </p:sp>
       <p:sp>
         <p:nvSpPr>
-          <p:cNvPr id="30" name="Shape 28"/>
+          <p:cNvPr id="33" name="Text 31"/>
+          <p:cNvSpPr/>
+          <p:nvPr/>
+        </p:nvSpPr>
+        <p:spPr>
+          <a:xfrm>
+            <a:off x="6016752" y="3364992"/>
+            <a:ext cx="411480" cy="475488"/>
+          </a:xfrm>
+          <a:prstGeom prst="rect">
+            <a:avLst/>
+          </a:prstGeom>
+          <a:noFill/>
+          <a:ln/>
+        </p:spPr>
+        <p:txBody>
+          <a:bodyPr wrap="square" lIns="0" tIns="0" rIns="0" bIns="0" rtlCol="0" anchor="ctr"/>
+          <a:lstStyle/>
+          <a:p>
+            <a:pPr algn="ctr" indent="0" marL="0">
+              <a:buNone/>
+            </a:pPr>
+            <a:r>
+              <a:rPr lang="en-US" sz="1600" b="1" dirty="0">
+                <a:solidFill>
+                  <a:srgbClr val="0D9488"/>
+                </a:solidFill>
+                <a:latin typeface="Trebuchet MS" pitchFamily="34" charset="0"/>
+                <a:ea typeface="Trebuchet MS" pitchFamily="34" charset="-122"/>
+                <a:cs typeface="Trebuchet MS" pitchFamily="34" charset="-120"/>
+              </a:rPr>
+              <a:t>·</a:t>
+            </a:r>
+            <a:endParaRPr lang="en-US" sz="1600" dirty="0"/>
+          </a:p>
+        </p:txBody>
+      </p:sp>
+      <p:sp>
+        <p:nvSpPr>
+          <p:cNvPr id="34" name="Shape 32"/>
+          <p:cNvSpPr/>
+          <p:nvPr/>
+        </p:nvSpPr>
+        <p:spPr>
+          <a:xfrm>
+            <a:off x="6428232" y="3364992"/>
+            <a:ext cx="1645920" cy="475488"/>
+          </a:xfrm>
+          <a:prstGeom prst="rect">
+            <a:avLst>
+              <a:gd name="adj" fmla="val 9615"/>
+            </a:avLst>
+          </a:prstGeom>
+          <a:solidFill>
+            <a:srgbClr val="FFFFFF"/>
+          </a:solidFill>
+          <a:ln w="12700">
+            <a:solidFill>
+              <a:srgbClr val="0D9488"/>
+            </a:solidFill>
+            <a:prstDash val="solid"/>
+          </a:ln>
+        </p:spPr>
+      </p:sp>
+      <p:sp>
+        <p:nvSpPr>
+          <p:cNvPr id="35" name="Text 33"/>
+          <p:cNvSpPr/>
+          <p:nvPr/>
+        </p:nvSpPr>
+        <p:spPr>
+          <a:xfrm>
+            <a:off x="6428232" y="3364992"/>
+            <a:ext cx="1645920" cy="475488"/>
+          </a:xfrm>
+          <a:prstGeom prst="rect">
+            <a:avLst/>
+          </a:prstGeom>
+          <a:noFill/>
+          <a:ln/>
+        </p:spPr>
+        <p:txBody>
+          <a:bodyPr wrap="square" lIns="0" tIns="0" rIns="0" bIns="0" rtlCol="0" anchor="ctr"/>
+          <a:lstStyle/>
+          <a:p>
+            <a:pPr algn="ctr" indent="0" marL="0">
+              <a:buNone/>
+            </a:pPr>
+            <a:r>
+              <a:rPr lang="en-US" sz="1400" b="1" dirty="0">
+                <a:solidFill>
+                  <a:srgbClr val="0D9488"/>
+                </a:solidFill>
+                <a:latin typeface="Trebuchet MS" pitchFamily="34" charset="0"/>
+                <a:ea typeface="Trebuchet MS" pitchFamily="34" charset="-122"/>
+                <a:cs typeface="Trebuchet MS" pitchFamily="34" charset="-120"/>
+              </a:rPr>
+              <a:t>ing</a:t>
+            </a:r>
+            <a:endParaRPr lang="en-US" sz="1400" dirty="0"/>
+          </a:p>
+        </p:txBody>
+      </p:sp>
+      <p:sp>
+        <p:nvSpPr>
+          <p:cNvPr id="36" name="Shape 34"/>
           <p:cNvSpPr/>
           <p:nvPr/>
         </p:nvSpPr>
@@ -9256,7 +9585,7 @@
       </p:sp>
       <p:sp>
         <p:nvSpPr>
-          <p:cNvPr id="31" name="Text 29"/>
+          <p:cNvPr id="37" name="Text 35"/>
           <p:cNvSpPr/>
           <p:nvPr/>
         </p:nvSpPr>
@@ -9295,7 +9624,7 @@
       </p:sp>
       <p:sp>
         <p:nvSpPr>
-          <p:cNvPr id="32" name="Shape 30"/>
+          <p:cNvPr id="38" name="Shape 36"/>
           <p:cNvSpPr/>
           <p:nvPr/>
         </p:nvSpPr>
@@ -9322,7 +9651,7 @@
       </p:sp>
       <p:sp>
         <p:nvSpPr>
-          <p:cNvPr id="33" name="Text 31"/>
+          <p:cNvPr id="39" name="Text 37"/>
           <p:cNvSpPr/>
           <p:nvPr/>
         </p:nvSpPr>
@@ -9784,7 +10113,7 @@
                 <a:ea typeface="Trebuchet MS" pitchFamily="34" charset="-122"/>
                 <a:cs typeface="Trebuchet MS" pitchFamily="34" charset="-120"/>
               </a:rPr>
-              <a:t>thinker</a:t>
+              <a:t>rethinking</a:t>
             </a:r>
             <a:endParaRPr lang="en-US" sz="2800" dirty="0"/>
           </a:p>
@@ -9864,7 +10193,7 @@
         </p:nvSpPr>
         <p:spPr>
           <a:xfrm>
-            <a:off x="2938272" y="2258568"/>
+            <a:off x="2221992" y="2258568"/>
             <a:ext cx="1828800" cy="292608"/>
           </a:xfrm>
           <a:prstGeom prst="rect">
@@ -9873,11 +10202,11 @@
             </a:avLst>
           </a:prstGeom>
           <a:solidFill>
-            <a:srgbClr val="CCFBF1"/>
+            <a:srgbClr val="DDD6FE"/>
           </a:solidFill>
           <a:ln w="19050">
             <a:solidFill>
-              <a:srgbClr val="0D9488"/>
+              <a:srgbClr val="7C3AED"/>
             </a:solidFill>
             <a:prstDash val="solid"/>
           </a:ln>
@@ -9898,7 +10227,7 @@
         </p:nvSpPr>
         <p:spPr>
           <a:xfrm>
-            <a:off x="2938272" y="2258568"/>
+            <a:off x="2221992" y="2258568"/>
             <a:ext cx="1828800" cy="292608"/>
           </a:xfrm>
           <a:prstGeom prst="rect">
@@ -9917,13 +10246,13 @@
             <a:r>
               <a:rPr lang="en-US" sz="1300" b="1" dirty="0">
                 <a:solidFill>
-                  <a:srgbClr val="0F766E"/>
+                  <a:srgbClr val="4C1D95"/>
                 </a:solidFill>
                 <a:latin typeface="Trebuchet MS" pitchFamily="34" charset="0"/>
                 <a:ea typeface="Trebuchet MS" pitchFamily="34" charset="-122"/>
                 <a:cs typeface="Trebuchet MS" pitchFamily="34" charset="-120"/>
               </a:rPr>
-              <a:t>think</a:t>
+              <a:t>re</a:t>
             </a:r>
             <a:endParaRPr lang="en-US" sz="1300" dirty="0"/>
           </a:p>
@@ -9937,7 +10266,7 @@
         </p:nvSpPr>
         <p:spPr>
           <a:xfrm>
-            <a:off x="2938272" y="2569464"/>
+            <a:off x="2221992" y="2569464"/>
             <a:ext cx="1828800" cy="201168"/>
           </a:xfrm>
           <a:prstGeom prst="rect">
@@ -9962,7 +10291,7 @@
                 <a:ea typeface="Calibri" pitchFamily="34" charset="-122"/>
                 <a:cs typeface="Calibri" pitchFamily="34" charset="-120"/>
               </a:rPr>
-              <a:t>to use the mind</a:t>
+              <a:t>again</a:t>
             </a:r>
             <a:endParaRPr lang="en-US" sz="850" dirty="0"/>
           </a:p>
@@ -9976,7 +10305,7 @@
         </p:nvSpPr>
         <p:spPr>
           <a:xfrm>
-            <a:off x="5803392" y="2258568"/>
+            <a:off x="4370832" y="2258568"/>
             <a:ext cx="1828800" cy="292608"/>
           </a:xfrm>
           <a:prstGeom prst="rect">
@@ -9985,11 +10314,11 @@
             </a:avLst>
           </a:prstGeom>
           <a:solidFill>
-            <a:srgbClr val="FCE7F3"/>
+            <a:srgbClr val="CCFBF1"/>
           </a:solidFill>
           <a:ln w="19050">
             <a:solidFill>
-              <a:srgbClr val="DB2777"/>
+              <a:srgbClr val="0D9488"/>
             </a:solidFill>
             <a:prstDash val="solid"/>
           </a:ln>
@@ -10010,7 +10339,7 @@
         </p:nvSpPr>
         <p:spPr>
           <a:xfrm>
-            <a:off x="5803392" y="2258568"/>
+            <a:off x="4370832" y="2258568"/>
             <a:ext cx="1828800" cy="292608"/>
           </a:xfrm>
           <a:prstGeom prst="rect">
@@ -10029,13 +10358,13 @@
             <a:r>
               <a:rPr lang="en-US" sz="1300" b="1" dirty="0">
                 <a:solidFill>
-                  <a:srgbClr val="9D174D"/>
+                  <a:srgbClr val="0F766E"/>
                 </a:solidFill>
                 <a:latin typeface="Trebuchet MS" pitchFamily="34" charset="0"/>
                 <a:ea typeface="Trebuchet MS" pitchFamily="34" charset="-122"/>
                 <a:cs typeface="Trebuchet MS" pitchFamily="34" charset="-120"/>
               </a:rPr>
-              <a:t>er</a:t>
+              <a:t>think</a:t>
             </a:r>
             <a:endParaRPr lang="en-US" sz="1300" dirty="0"/>
           </a:p>
@@ -10049,7 +10378,7 @@
         </p:nvSpPr>
         <p:spPr>
           <a:xfrm>
-            <a:off x="5803392" y="2569464"/>
+            <a:off x="4370832" y="2569464"/>
             <a:ext cx="1828800" cy="201168"/>
           </a:xfrm>
           <a:prstGeom prst="rect">
@@ -10074,7 +10403,7 @@
                 <a:ea typeface="Calibri" pitchFamily="34" charset="-122"/>
                 <a:cs typeface="Calibri" pitchFamily="34" charset="-120"/>
               </a:rPr>
-              <a:t>a person who does something</a:t>
+              <a:t>to use the mind</a:t>
             </a:r>
             <a:endParaRPr lang="en-US" sz="850" dirty="0"/>
           </a:p>
@@ -10083,6 +10412,118 @@
       <p:sp>
         <p:nvSpPr>
           <p:cNvPr id="22" name="Shape 20"/>
+          <p:cNvSpPr/>
+          <p:nvPr/>
+        </p:nvSpPr>
+        <p:spPr>
+          <a:xfrm>
+            <a:off x="6519672" y="2258568"/>
+            <a:ext cx="1828800" cy="292608"/>
+          </a:xfrm>
+          <a:prstGeom prst="rect">
+            <a:avLst>
+              <a:gd name="adj" fmla="val 25000"/>
+            </a:avLst>
+          </a:prstGeom>
+          <a:solidFill>
+            <a:srgbClr val="FCE7F3"/>
+          </a:solidFill>
+          <a:ln w="19050">
+            <a:solidFill>
+              <a:srgbClr val="DB2777"/>
+            </a:solidFill>
+            <a:prstDash val="solid"/>
+          </a:ln>
+          <a:effectLst>
+            <a:outerShdw sx="100000" sy="100000" kx="0" ky="0" algn="bl" rotWithShape="0" blurRad="101600" dist="38100" dir="8100000">
+              <a:srgbClr val="000000">
+                <a:alpha val="12000"/>
+              </a:srgbClr>
+            </a:outerShdw>
+          </a:effectLst>
+        </p:spPr>
+      </p:sp>
+      <p:sp>
+        <p:nvSpPr>
+          <p:cNvPr id="23" name="Text 21"/>
+          <p:cNvSpPr/>
+          <p:nvPr/>
+        </p:nvSpPr>
+        <p:spPr>
+          <a:xfrm>
+            <a:off x="6519672" y="2258568"/>
+            <a:ext cx="1828800" cy="292608"/>
+          </a:xfrm>
+          <a:prstGeom prst="rect">
+            <a:avLst/>
+          </a:prstGeom>
+          <a:noFill/>
+          <a:ln/>
+        </p:spPr>
+        <p:txBody>
+          <a:bodyPr wrap="square" lIns="0" tIns="0" rIns="0" bIns="0" rtlCol="0" anchor="ctr"/>
+          <a:lstStyle/>
+          <a:p>
+            <a:pPr algn="ctr" indent="0" marL="0">
+              <a:buNone/>
+            </a:pPr>
+            <a:r>
+              <a:rPr lang="en-US" sz="1300" b="1" dirty="0">
+                <a:solidFill>
+                  <a:srgbClr val="9D174D"/>
+                </a:solidFill>
+                <a:latin typeface="Trebuchet MS" pitchFamily="34" charset="0"/>
+                <a:ea typeface="Trebuchet MS" pitchFamily="34" charset="-122"/>
+                <a:cs typeface="Trebuchet MS" pitchFamily="34" charset="-120"/>
+              </a:rPr>
+              <a:t>ing</a:t>
+            </a:r>
+            <a:endParaRPr lang="en-US" sz="1300" dirty="0"/>
+          </a:p>
+        </p:txBody>
+      </p:sp>
+      <p:sp>
+        <p:nvSpPr>
+          <p:cNvPr id="24" name="Text 22"/>
+          <p:cNvSpPr/>
+          <p:nvPr/>
+        </p:nvSpPr>
+        <p:spPr>
+          <a:xfrm>
+            <a:off x="6519672" y="2569464"/>
+            <a:ext cx="1828800" cy="201168"/>
+          </a:xfrm>
+          <a:prstGeom prst="rect">
+            <a:avLst/>
+          </a:prstGeom>
+          <a:noFill/>
+          <a:ln/>
+        </p:spPr>
+        <p:txBody>
+          <a:bodyPr wrap="square" lIns="0" tIns="0" rIns="0" bIns="0" rtlCol="0" anchor="t"/>
+          <a:lstStyle/>
+          <a:p>
+            <a:pPr algn="ctr" indent="0" marL="0">
+              <a:buNone/>
+            </a:pPr>
+            <a:r>
+              <a:rPr lang="en-US" sz="850" dirty="0">
+                <a:solidFill>
+                  <a:srgbClr val="475569"/>
+                </a:solidFill>
+                <a:latin typeface="Calibri" pitchFamily="34" charset="0"/>
+                <a:ea typeface="Calibri" pitchFamily="34" charset="-122"/>
+                <a:cs typeface="Calibri" pitchFamily="34" charset="-120"/>
+              </a:rPr>
+              <a:t>ongoing action</a:t>
+            </a:r>
+            <a:endParaRPr lang="en-US" sz="850" dirty="0"/>
+          </a:p>
+        </p:txBody>
+      </p:sp>
+      <p:sp>
+        <p:nvSpPr>
+          <p:cNvPr id="25" name="Shape 23"/>
           <p:cNvSpPr/>
           <p:nvPr/>
         </p:nvSpPr>
@@ -10109,7 +10550,7 @@
       </p:sp>
       <p:sp>
         <p:nvSpPr>
-          <p:cNvPr id="23" name="Text 21"/>
+          <p:cNvPr id="26" name="Text 24"/>
           <p:cNvSpPr/>
           <p:nvPr/>
         </p:nvSpPr>
@@ -10148,7 +10589,7 @@
       </p:sp>
       <p:sp>
         <p:nvSpPr>
-          <p:cNvPr id="24" name="Shape 22"/>
+          <p:cNvPr id="27" name="Shape 25"/>
           <p:cNvSpPr/>
           <p:nvPr/>
         </p:nvSpPr>
@@ -10175,13 +10616,13 @@
       </p:sp>
       <p:sp>
         <p:nvSpPr>
-          <p:cNvPr id="25" name="Shape 23"/>
-          <p:cNvSpPr/>
-          <p:nvPr/>
-        </p:nvSpPr>
-        <p:spPr>
-          <a:xfrm>
-            <a:off x="2999232" y="3364992"/>
+          <p:cNvPr id="28" name="Shape 26"/>
+          <p:cNvSpPr/>
+          <p:nvPr/>
+        </p:nvSpPr>
+        <p:spPr>
+          <a:xfrm>
+            <a:off x="2313432" y="3364992"/>
             <a:ext cx="1645920" cy="475488"/>
           </a:xfrm>
           <a:prstGeom prst="rect">
@@ -10202,13 +10643,13 @@
       </p:sp>
       <p:sp>
         <p:nvSpPr>
-          <p:cNvPr id="26" name="Text 24"/>
-          <p:cNvSpPr/>
-          <p:nvPr/>
-        </p:nvSpPr>
-        <p:spPr>
-          <a:xfrm>
-            <a:off x="2999232" y="3364992"/>
+          <p:cNvPr id="29" name="Text 27"/>
+          <p:cNvSpPr/>
+          <p:nvPr/>
+        </p:nvSpPr>
+        <p:spPr>
+          <a:xfrm>
+            <a:off x="2313432" y="3364992"/>
             <a:ext cx="1645920" cy="475488"/>
           </a:xfrm>
           <a:prstGeom prst="rect">
@@ -10233,7 +10674,7 @@
                 <a:ea typeface="Trebuchet MS" pitchFamily="34" charset="-122"/>
                 <a:cs typeface="Trebuchet MS" pitchFamily="34" charset="-120"/>
               </a:rPr>
-              <a:t>think</a:t>
+              <a:t>re</a:t>
             </a:r>
             <a:endParaRPr lang="en-US" sz="1400" dirty="0"/>
           </a:p>
@@ -10241,14 +10682,14 @@
       </p:sp>
       <p:sp>
         <p:nvSpPr>
-          <p:cNvPr id="27" name="Text 25"/>
-          <p:cNvSpPr/>
-          <p:nvPr/>
-        </p:nvSpPr>
-        <p:spPr>
-          <a:xfrm>
-            <a:off x="4645152" y="3364992"/>
-            <a:ext cx="1097280" cy="475488"/>
+          <p:cNvPr id="30" name="Text 28"/>
+          <p:cNvSpPr/>
+          <p:nvPr/>
+        </p:nvSpPr>
+        <p:spPr>
+          <a:xfrm>
+            <a:off x="3959352" y="3364992"/>
+            <a:ext cx="411480" cy="475488"/>
           </a:xfrm>
           <a:prstGeom prst="rect">
             <a:avLst/>
@@ -10280,13 +10721,13 @@
       </p:sp>
       <p:sp>
         <p:nvSpPr>
-          <p:cNvPr id="28" name="Shape 26"/>
-          <p:cNvSpPr/>
-          <p:nvPr/>
-        </p:nvSpPr>
-        <p:spPr>
-          <a:xfrm>
-            <a:off x="5742432" y="3364992"/>
+          <p:cNvPr id="31" name="Shape 29"/>
+          <p:cNvSpPr/>
+          <p:nvPr/>
+        </p:nvSpPr>
+        <p:spPr>
+          <a:xfrm>
+            <a:off x="4370832" y="3364992"/>
             <a:ext cx="1645920" cy="475488"/>
           </a:xfrm>
           <a:prstGeom prst="rect">
@@ -10307,13 +10748,13 @@
       </p:sp>
       <p:sp>
         <p:nvSpPr>
-          <p:cNvPr id="29" name="Text 27"/>
-          <p:cNvSpPr/>
-          <p:nvPr/>
-        </p:nvSpPr>
-        <p:spPr>
-          <a:xfrm>
-            <a:off x="5742432" y="3364992"/>
+          <p:cNvPr id="32" name="Text 30"/>
+          <p:cNvSpPr/>
+          <p:nvPr/>
+        </p:nvSpPr>
+        <p:spPr>
+          <a:xfrm>
+            <a:off x="4370832" y="3364992"/>
             <a:ext cx="1645920" cy="475488"/>
           </a:xfrm>
           <a:prstGeom prst="rect">
@@ -10338,7 +10779,7 @@
                 <a:ea typeface="Trebuchet MS" pitchFamily="34" charset="-122"/>
                 <a:cs typeface="Trebuchet MS" pitchFamily="34" charset="-120"/>
               </a:rPr>
-              <a:t>er</a:t>
+              <a:t>think</a:t>
             </a:r>
             <a:endParaRPr lang="en-US" sz="1400" dirty="0"/>
           </a:p>
@@ -10346,7 +10787,112 @@
       </p:sp>
       <p:sp>
         <p:nvSpPr>
-          <p:cNvPr id="30" name="Shape 28"/>
+          <p:cNvPr id="33" name="Text 31"/>
+          <p:cNvSpPr/>
+          <p:nvPr/>
+        </p:nvSpPr>
+        <p:spPr>
+          <a:xfrm>
+            <a:off x="6016752" y="3364992"/>
+            <a:ext cx="411480" cy="475488"/>
+          </a:xfrm>
+          <a:prstGeom prst="rect">
+            <a:avLst/>
+          </a:prstGeom>
+          <a:noFill/>
+          <a:ln/>
+        </p:spPr>
+        <p:txBody>
+          <a:bodyPr wrap="square" lIns="0" tIns="0" rIns="0" bIns="0" rtlCol="0" anchor="ctr"/>
+          <a:lstStyle/>
+          <a:p>
+            <a:pPr algn="ctr" indent="0" marL="0">
+              <a:buNone/>
+            </a:pPr>
+            <a:r>
+              <a:rPr lang="en-US" sz="1600" b="1" dirty="0">
+                <a:solidFill>
+                  <a:srgbClr val="0D9488"/>
+                </a:solidFill>
+                <a:latin typeface="Trebuchet MS" pitchFamily="34" charset="0"/>
+                <a:ea typeface="Trebuchet MS" pitchFamily="34" charset="-122"/>
+                <a:cs typeface="Trebuchet MS" pitchFamily="34" charset="-120"/>
+              </a:rPr>
+              <a:t>·</a:t>
+            </a:r>
+            <a:endParaRPr lang="en-US" sz="1600" dirty="0"/>
+          </a:p>
+        </p:txBody>
+      </p:sp>
+      <p:sp>
+        <p:nvSpPr>
+          <p:cNvPr id="34" name="Shape 32"/>
+          <p:cNvSpPr/>
+          <p:nvPr/>
+        </p:nvSpPr>
+        <p:spPr>
+          <a:xfrm>
+            <a:off x="6428232" y="3364992"/>
+            <a:ext cx="1645920" cy="475488"/>
+          </a:xfrm>
+          <a:prstGeom prst="rect">
+            <a:avLst>
+              <a:gd name="adj" fmla="val 9615"/>
+            </a:avLst>
+          </a:prstGeom>
+          <a:solidFill>
+            <a:srgbClr val="FFFFFF"/>
+          </a:solidFill>
+          <a:ln w="12700">
+            <a:solidFill>
+              <a:srgbClr val="0D9488"/>
+            </a:solidFill>
+            <a:prstDash val="solid"/>
+          </a:ln>
+        </p:spPr>
+      </p:sp>
+      <p:sp>
+        <p:nvSpPr>
+          <p:cNvPr id="35" name="Text 33"/>
+          <p:cNvSpPr/>
+          <p:nvPr/>
+        </p:nvSpPr>
+        <p:spPr>
+          <a:xfrm>
+            <a:off x="6428232" y="3364992"/>
+            <a:ext cx="1645920" cy="475488"/>
+          </a:xfrm>
+          <a:prstGeom prst="rect">
+            <a:avLst/>
+          </a:prstGeom>
+          <a:noFill/>
+          <a:ln/>
+        </p:spPr>
+        <p:txBody>
+          <a:bodyPr wrap="square" lIns="0" tIns="0" rIns="0" bIns="0" rtlCol="0" anchor="ctr"/>
+          <a:lstStyle/>
+          <a:p>
+            <a:pPr algn="ctr" indent="0" marL="0">
+              <a:buNone/>
+            </a:pPr>
+            <a:r>
+              <a:rPr lang="en-US" sz="1400" b="1" dirty="0">
+                <a:solidFill>
+                  <a:srgbClr val="0D9488"/>
+                </a:solidFill>
+                <a:latin typeface="Trebuchet MS" pitchFamily="34" charset="0"/>
+                <a:ea typeface="Trebuchet MS" pitchFamily="34" charset="-122"/>
+                <a:cs typeface="Trebuchet MS" pitchFamily="34" charset="-120"/>
+              </a:rPr>
+              <a:t>ing</a:t>
+            </a:r>
+            <a:endParaRPr lang="en-US" sz="1400" dirty="0"/>
+          </a:p>
+        </p:txBody>
+      </p:sp>
+      <p:sp>
+        <p:nvSpPr>
+          <p:cNvPr id="36" name="Shape 34"/>
           <p:cNvSpPr/>
           <p:nvPr/>
         </p:nvSpPr>
@@ -10373,7 +10919,7 @@
       </p:sp>
       <p:sp>
         <p:nvSpPr>
-          <p:cNvPr id="31" name="Text 29"/>
+          <p:cNvPr id="37" name="Text 35"/>
           <p:cNvSpPr/>
           <p:nvPr/>
         </p:nvSpPr>
@@ -10412,7 +10958,7 @@
       </p:sp>
       <p:sp>
         <p:nvSpPr>
-          <p:cNvPr id="32" name="Shape 30"/>
+          <p:cNvPr id="38" name="Shape 36"/>
           <p:cNvSpPr/>
           <p:nvPr/>
         </p:nvSpPr>
@@ -10439,13 +10985,13 @@
       </p:sp>
       <p:sp>
         <p:nvSpPr>
-          <p:cNvPr id="33" name="Shape 31"/>
-          <p:cNvSpPr/>
-          <p:nvPr/>
-        </p:nvSpPr>
-        <p:spPr>
-          <a:xfrm>
-            <a:off x="2427732" y="4169664"/>
+          <p:cNvPr id="39" name="Shape 37"/>
+          <p:cNvSpPr/>
+          <p:nvPr/>
+        </p:nvSpPr>
+        <p:spPr>
+          <a:xfrm>
+            <a:off x="2124837" y="4169664"/>
             <a:ext cx="685800" cy="475488"/>
           </a:xfrm>
           <a:prstGeom prst="rect">
@@ -10466,13 +11012,13 @@
       </p:sp>
       <p:sp>
         <p:nvSpPr>
-          <p:cNvPr id="34" name="Text 32"/>
-          <p:cNvSpPr/>
-          <p:nvPr/>
-        </p:nvSpPr>
-        <p:spPr>
-          <a:xfrm>
-            <a:off x="2427732" y="4169664"/>
+          <p:cNvPr id="40" name="Text 38"/>
+          <p:cNvSpPr/>
+          <p:nvPr/>
+        </p:nvSpPr>
+        <p:spPr>
+          <a:xfrm>
+            <a:off x="2124837" y="4169664"/>
             <a:ext cx="685800" cy="475488"/>
           </a:xfrm>
           <a:prstGeom prst="rect">
@@ -10497,7 +11043,7 @@
                 <a:ea typeface="Trebuchet MS" pitchFamily="34" charset="-122"/>
                 <a:cs typeface="Trebuchet MS" pitchFamily="34" charset="-120"/>
               </a:rPr>
-              <a:t>th</a:t>
+              <a:t>r</a:t>
             </a:r>
             <a:endParaRPr lang="en-US" sz="900" dirty="0"/>
           </a:p>
@@ -10505,13 +11051,13 @@
       </p:sp>
       <p:sp>
         <p:nvSpPr>
-          <p:cNvPr id="35" name="Shape 33"/>
-          <p:cNvSpPr/>
-          <p:nvPr/>
-        </p:nvSpPr>
-        <p:spPr>
-          <a:xfrm>
-            <a:off x="3639312" y="4169664"/>
+          <p:cNvPr id="41" name="Shape 39"/>
+          <p:cNvSpPr/>
+          <p:nvPr/>
+        </p:nvSpPr>
+        <p:spPr>
+          <a:xfrm>
+            <a:off x="3033522" y="4169664"/>
             <a:ext cx="685800" cy="475488"/>
           </a:xfrm>
           <a:prstGeom prst="rect">
@@ -10532,13 +11078,13 @@
       </p:sp>
       <p:sp>
         <p:nvSpPr>
-          <p:cNvPr id="36" name="Text 34"/>
-          <p:cNvSpPr/>
-          <p:nvPr/>
-        </p:nvSpPr>
-        <p:spPr>
-          <a:xfrm>
-            <a:off x="3639312" y="4169664"/>
+          <p:cNvPr id="42" name="Text 40"/>
+          <p:cNvSpPr/>
+          <p:nvPr/>
+        </p:nvSpPr>
+        <p:spPr>
+          <a:xfrm>
+            <a:off x="3033522" y="4169664"/>
             <a:ext cx="685800" cy="475488"/>
           </a:xfrm>
           <a:prstGeom prst="rect">
@@ -10563,7 +11109,7 @@
                 <a:ea typeface="Trebuchet MS" pitchFamily="34" charset="-122"/>
                 <a:cs typeface="Trebuchet MS" pitchFamily="34" charset="-120"/>
               </a:rPr>
-              <a:t>i</a:t>
+              <a:t>e</a:t>
             </a:r>
             <a:endParaRPr lang="en-US" sz="900" dirty="0"/>
           </a:p>
@@ -10571,13 +11117,13 @@
       </p:sp>
       <p:sp>
         <p:nvSpPr>
-          <p:cNvPr id="37" name="Shape 35"/>
-          <p:cNvSpPr/>
-          <p:nvPr/>
-        </p:nvSpPr>
-        <p:spPr>
-          <a:xfrm>
-            <a:off x="4850892" y="4169664"/>
+          <p:cNvPr id="43" name="Shape 41"/>
+          <p:cNvSpPr/>
+          <p:nvPr/>
+        </p:nvSpPr>
+        <p:spPr>
+          <a:xfrm>
+            <a:off x="3942207" y="4169664"/>
             <a:ext cx="685800" cy="475488"/>
           </a:xfrm>
           <a:prstGeom prst="rect">
@@ -10598,13 +11144,13 @@
       </p:sp>
       <p:sp>
         <p:nvSpPr>
-          <p:cNvPr id="38" name="Text 36"/>
-          <p:cNvSpPr/>
-          <p:nvPr/>
-        </p:nvSpPr>
-        <p:spPr>
-          <a:xfrm>
-            <a:off x="4850892" y="4169664"/>
+          <p:cNvPr id="44" name="Text 42"/>
+          <p:cNvSpPr/>
+          <p:nvPr/>
+        </p:nvSpPr>
+        <p:spPr>
+          <a:xfrm>
+            <a:off x="3942207" y="4169664"/>
             <a:ext cx="685800" cy="475488"/>
           </a:xfrm>
           <a:prstGeom prst="rect">
@@ -10629,7 +11175,7 @@
                 <a:ea typeface="Trebuchet MS" pitchFamily="34" charset="-122"/>
                 <a:cs typeface="Trebuchet MS" pitchFamily="34" charset="-120"/>
               </a:rPr>
-              <a:t>n</a:t>
+              <a:t>th</a:t>
             </a:r>
             <a:endParaRPr lang="en-US" sz="900" dirty="0"/>
           </a:p>
@@ -10637,13 +11183,13 @@
       </p:sp>
       <p:sp>
         <p:nvSpPr>
-          <p:cNvPr id="39" name="Shape 37"/>
-          <p:cNvSpPr/>
-          <p:nvPr/>
-        </p:nvSpPr>
-        <p:spPr>
-          <a:xfrm>
-            <a:off x="6062472" y="4169664"/>
+          <p:cNvPr id="45" name="Shape 43"/>
+          <p:cNvSpPr/>
+          <p:nvPr/>
+        </p:nvSpPr>
+        <p:spPr>
+          <a:xfrm>
+            <a:off x="4850892" y="4169664"/>
             <a:ext cx="685800" cy="475488"/>
           </a:xfrm>
           <a:prstGeom prst="rect">
@@ -10664,13 +11210,13 @@
       </p:sp>
       <p:sp>
         <p:nvSpPr>
-          <p:cNvPr id="40" name="Text 38"/>
-          <p:cNvSpPr/>
-          <p:nvPr/>
-        </p:nvSpPr>
-        <p:spPr>
-          <a:xfrm>
-            <a:off x="6062472" y="4169664"/>
+          <p:cNvPr id="46" name="Text 44"/>
+          <p:cNvSpPr/>
+          <p:nvPr/>
+        </p:nvSpPr>
+        <p:spPr>
+          <a:xfrm>
+            <a:off x="4850892" y="4169664"/>
             <a:ext cx="685800" cy="475488"/>
           </a:xfrm>
           <a:prstGeom prst="rect">
@@ -10695,7 +11241,7 @@
                 <a:ea typeface="Trebuchet MS" pitchFamily="34" charset="-122"/>
                 <a:cs typeface="Trebuchet MS" pitchFamily="34" charset="-120"/>
               </a:rPr>
-              <a:t>k</a:t>
+              <a:t>i</a:t>
             </a:r>
             <a:endParaRPr lang="en-US" sz="900" dirty="0"/>
           </a:p>
@@ -10703,13 +11249,13 @@
       </p:sp>
       <p:sp>
         <p:nvSpPr>
-          <p:cNvPr id="41" name="Shape 39"/>
-          <p:cNvSpPr/>
-          <p:nvPr/>
-        </p:nvSpPr>
-        <p:spPr>
-          <a:xfrm>
-            <a:off x="7274052" y="4169664"/>
+          <p:cNvPr id="47" name="Shape 45"/>
+          <p:cNvSpPr/>
+          <p:nvPr/>
+        </p:nvSpPr>
+        <p:spPr>
+          <a:xfrm>
+            <a:off x="5759577" y="4169664"/>
             <a:ext cx="685800" cy="475488"/>
           </a:xfrm>
           <a:prstGeom prst="rect">
@@ -10730,13 +11276,13 @@
       </p:sp>
       <p:sp>
         <p:nvSpPr>
-          <p:cNvPr id="42" name="Text 40"/>
-          <p:cNvSpPr/>
-          <p:nvPr/>
-        </p:nvSpPr>
-        <p:spPr>
-          <a:xfrm>
-            <a:off x="7274052" y="4169664"/>
+          <p:cNvPr id="48" name="Text 46"/>
+          <p:cNvSpPr/>
+          <p:nvPr/>
+        </p:nvSpPr>
+        <p:spPr>
+          <a:xfrm>
+            <a:off x="5759577" y="4169664"/>
             <a:ext cx="685800" cy="475488"/>
           </a:xfrm>
           <a:prstGeom prst="rect">
@@ -10761,7 +11307,139 @@
                 <a:ea typeface="Trebuchet MS" pitchFamily="34" charset="-122"/>
                 <a:cs typeface="Trebuchet MS" pitchFamily="34" charset="-120"/>
               </a:rPr>
-              <a:t>er</a:t>
+              <a:t>nk</a:t>
+            </a:r>
+            <a:endParaRPr lang="en-US" sz="900" dirty="0"/>
+          </a:p>
+        </p:txBody>
+      </p:sp>
+      <p:sp>
+        <p:nvSpPr>
+          <p:cNvPr id="49" name="Shape 47"/>
+          <p:cNvSpPr/>
+          <p:nvPr/>
+        </p:nvSpPr>
+        <p:spPr>
+          <a:xfrm>
+            <a:off x="6668262" y="4169664"/>
+            <a:ext cx="685800" cy="475488"/>
+          </a:xfrm>
+          <a:prstGeom prst="rect">
+            <a:avLst>
+              <a:gd name="adj" fmla="val 7692"/>
+            </a:avLst>
+          </a:prstGeom>
+          <a:solidFill>
+            <a:srgbClr val="FFFFFF"/>
+          </a:solidFill>
+          <a:ln w="12700">
+            <a:solidFill>
+              <a:srgbClr val="DB2777"/>
+            </a:solidFill>
+            <a:prstDash val="solid"/>
+          </a:ln>
+        </p:spPr>
+      </p:sp>
+      <p:sp>
+        <p:nvSpPr>
+          <p:cNvPr id="50" name="Text 48"/>
+          <p:cNvSpPr/>
+          <p:nvPr/>
+        </p:nvSpPr>
+        <p:spPr>
+          <a:xfrm>
+            <a:off x="6668262" y="4169664"/>
+            <a:ext cx="685800" cy="475488"/>
+          </a:xfrm>
+          <a:prstGeom prst="rect">
+            <a:avLst/>
+          </a:prstGeom>
+          <a:noFill/>
+          <a:ln/>
+        </p:spPr>
+        <p:txBody>
+          <a:bodyPr wrap="square" lIns="0" tIns="0" rIns="0" bIns="0" rtlCol="0" anchor="ctr"/>
+          <a:lstStyle/>
+          <a:p>
+            <a:pPr algn="ctr" indent="0" marL="0">
+              <a:buNone/>
+            </a:pPr>
+            <a:r>
+              <a:rPr lang="en-US" sz="900" b="1" dirty="0">
+                <a:solidFill>
+                  <a:srgbClr val="9D174D"/>
+                </a:solidFill>
+                <a:latin typeface="Trebuchet MS" pitchFamily="34" charset="0"/>
+                <a:ea typeface="Trebuchet MS" pitchFamily="34" charset="-122"/>
+                <a:cs typeface="Trebuchet MS" pitchFamily="34" charset="-120"/>
+              </a:rPr>
+              <a:t>i</a:t>
+            </a:r>
+            <a:endParaRPr lang="en-US" sz="900" dirty="0"/>
+          </a:p>
+        </p:txBody>
+      </p:sp>
+      <p:sp>
+        <p:nvSpPr>
+          <p:cNvPr id="51" name="Shape 49"/>
+          <p:cNvSpPr/>
+          <p:nvPr/>
+        </p:nvSpPr>
+        <p:spPr>
+          <a:xfrm>
+            <a:off x="7576947" y="4169664"/>
+            <a:ext cx="685800" cy="475488"/>
+          </a:xfrm>
+          <a:prstGeom prst="rect">
+            <a:avLst>
+              <a:gd name="adj" fmla="val 7692"/>
+            </a:avLst>
+          </a:prstGeom>
+          <a:solidFill>
+            <a:srgbClr val="FFFFFF"/>
+          </a:solidFill>
+          <a:ln w="12700">
+            <a:solidFill>
+              <a:srgbClr val="DB2777"/>
+            </a:solidFill>
+            <a:prstDash val="solid"/>
+          </a:ln>
+        </p:spPr>
+      </p:sp>
+      <p:sp>
+        <p:nvSpPr>
+          <p:cNvPr id="52" name="Text 50"/>
+          <p:cNvSpPr/>
+          <p:nvPr/>
+        </p:nvSpPr>
+        <p:spPr>
+          <a:xfrm>
+            <a:off x="7576947" y="4169664"/>
+            <a:ext cx="685800" cy="475488"/>
+          </a:xfrm>
+          <a:prstGeom prst="rect">
+            <a:avLst/>
+          </a:prstGeom>
+          <a:noFill/>
+          <a:ln/>
+        </p:spPr>
+        <p:txBody>
+          <a:bodyPr wrap="square" lIns="0" tIns="0" rIns="0" bIns="0" rtlCol="0" anchor="ctr"/>
+          <a:lstStyle/>
+          <a:p>
+            <a:pPr algn="ctr" indent="0" marL="0">
+              <a:buNone/>
+            </a:pPr>
+            <a:r>
+              <a:rPr lang="en-US" sz="900" b="1" dirty="0">
+                <a:solidFill>
+                  <a:srgbClr val="9D174D"/>
+                </a:solidFill>
+                <a:latin typeface="Trebuchet MS" pitchFamily="34" charset="0"/>
+                <a:ea typeface="Trebuchet MS" pitchFamily="34" charset="-122"/>
+                <a:cs typeface="Trebuchet MS" pitchFamily="34" charset="-120"/>
+              </a:rPr>
+              <a:t>ng</a:t>
             </a:r>
             <a:endParaRPr lang="en-US" sz="900" dirty="0"/>
           </a:p>
@@ -11192,7 +11870,7 @@
                 <a:ea typeface="Trebuchet MS" pitchFamily="34" charset="-122"/>
                 <a:cs typeface="Trebuchet MS" pitchFamily="34" charset="-120"/>
               </a:rPr>
-              <a:t>rethink</a:t>
+              <a:t>thinking</a:t>
             </a:r>
             <a:endParaRPr lang="en-US" sz="2800" dirty="0"/>
           </a:p>
@@ -12019,7 +12697,7 @@
                 <a:ea typeface="Trebuchet MS" pitchFamily="34" charset="-122"/>
                 <a:cs typeface="Trebuchet MS" pitchFamily="34" charset="-120"/>
               </a:rPr>
-              <a:t>rethink</a:t>
+              <a:t>thinking</a:t>
             </a:r>
             <a:endParaRPr lang="en-US" sz="2800" dirty="0"/>
           </a:p>
@@ -12108,11 +12786,11 @@
             </a:avLst>
           </a:prstGeom>
           <a:solidFill>
-            <a:srgbClr val="DDD6FE"/>
+            <a:srgbClr val="CCFBF1"/>
           </a:solidFill>
           <a:ln w="19050">
             <a:solidFill>
-              <a:srgbClr val="7C3AED"/>
+              <a:srgbClr val="0D9488"/>
             </a:solidFill>
             <a:prstDash val="solid"/>
           </a:ln>
@@ -12152,13 +12830,13 @@
             <a:r>
               <a:rPr lang="en-US" sz="1300" b="1" dirty="0">
                 <a:solidFill>
-                  <a:srgbClr val="4C1D95"/>
+                  <a:srgbClr val="0F766E"/>
                 </a:solidFill>
                 <a:latin typeface="Trebuchet MS" pitchFamily="34" charset="0"/>
                 <a:ea typeface="Trebuchet MS" pitchFamily="34" charset="-122"/>
                 <a:cs typeface="Trebuchet MS" pitchFamily="34" charset="-120"/>
               </a:rPr>
-              <a:t>re</a:t>
+              <a:t>think</a:t>
             </a:r>
             <a:endParaRPr lang="en-US" sz="1300" dirty="0"/>
           </a:p>
@@ -12197,7 +12875,7 @@
                 <a:ea typeface="Calibri" pitchFamily="34" charset="-122"/>
                 <a:cs typeface="Calibri" pitchFamily="34" charset="-120"/>
               </a:rPr>
-              <a:t>again</a:t>
+              <a:t>to use the mind</a:t>
             </a:r>
             <a:endParaRPr lang="en-US" sz="850" dirty="0"/>
           </a:p>
@@ -12220,11 +12898,11 @@
             </a:avLst>
           </a:prstGeom>
           <a:solidFill>
-            <a:srgbClr val="CCFBF1"/>
+            <a:srgbClr val="FCE7F3"/>
           </a:solidFill>
           <a:ln w="19050">
             <a:solidFill>
-              <a:srgbClr val="0D9488"/>
+              <a:srgbClr val="DB2777"/>
             </a:solidFill>
             <a:prstDash val="solid"/>
           </a:ln>
@@ -12264,13 +12942,13 @@
             <a:r>
               <a:rPr lang="en-US" sz="1300" b="1" dirty="0">
                 <a:solidFill>
-                  <a:srgbClr val="0F766E"/>
+                  <a:srgbClr val="9D174D"/>
                 </a:solidFill>
                 <a:latin typeface="Trebuchet MS" pitchFamily="34" charset="0"/>
                 <a:ea typeface="Trebuchet MS" pitchFamily="34" charset="-122"/>
                 <a:cs typeface="Trebuchet MS" pitchFamily="34" charset="-120"/>
               </a:rPr>
-              <a:t>think</a:t>
+              <a:t>ing</a:t>
             </a:r>
             <a:endParaRPr lang="en-US" sz="1300" dirty="0"/>
           </a:p>
@@ -12309,7 +12987,7 @@
                 <a:ea typeface="Calibri" pitchFamily="34" charset="-122"/>
                 <a:cs typeface="Calibri" pitchFamily="34" charset="-120"/>
               </a:rPr>
-              <a:t>to use the mind</a:t>
+              <a:t>ongoing action</a:t>
             </a:r>
             <a:endParaRPr lang="en-US" sz="850" dirty="0"/>
           </a:p>
@@ -13004,7 +13682,7 @@
                 <a:ea typeface="Trebuchet MS" pitchFamily="34" charset="-122"/>
                 <a:cs typeface="Trebuchet MS" pitchFamily="34" charset="-120"/>
               </a:rPr>
-              <a:t>rethink</a:t>
+              <a:t>thinking</a:t>
             </a:r>
             <a:endParaRPr lang="en-US" sz="2800" dirty="0"/>
           </a:p>
@@ -13093,11 +13771,11 @@
             </a:avLst>
           </a:prstGeom>
           <a:solidFill>
-            <a:srgbClr val="DDD6FE"/>
+            <a:srgbClr val="CCFBF1"/>
           </a:solidFill>
           <a:ln w="19050">
             <a:solidFill>
-              <a:srgbClr val="7C3AED"/>
+              <a:srgbClr val="0D9488"/>
             </a:solidFill>
             <a:prstDash val="solid"/>
           </a:ln>
@@ -13137,13 +13815,13 @@
             <a:r>
               <a:rPr lang="en-US" sz="1300" b="1" dirty="0">
                 <a:solidFill>
-                  <a:srgbClr val="4C1D95"/>
+                  <a:srgbClr val="0F766E"/>
                 </a:solidFill>
                 <a:latin typeface="Trebuchet MS" pitchFamily="34" charset="0"/>
                 <a:ea typeface="Trebuchet MS" pitchFamily="34" charset="-122"/>
                 <a:cs typeface="Trebuchet MS" pitchFamily="34" charset="-120"/>
               </a:rPr>
-              <a:t>re</a:t>
+              <a:t>think</a:t>
             </a:r>
             <a:endParaRPr lang="en-US" sz="1300" dirty="0"/>
           </a:p>
@@ -13182,7 +13860,7 @@
                 <a:ea typeface="Calibri" pitchFamily="34" charset="-122"/>
                 <a:cs typeface="Calibri" pitchFamily="34" charset="-120"/>
               </a:rPr>
-              <a:t>again</a:t>
+              <a:t>to use the mind</a:t>
             </a:r>
             <a:endParaRPr lang="en-US" sz="850" dirty="0"/>
           </a:p>
@@ -13205,11 +13883,11 @@
             </a:avLst>
           </a:prstGeom>
           <a:solidFill>
-            <a:srgbClr val="CCFBF1"/>
+            <a:srgbClr val="FCE7F3"/>
           </a:solidFill>
           <a:ln w="19050">
             <a:solidFill>
-              <a:srgbClr val="0D9488"/>
+              <a:srgbClr val="DB2777"/>
             </a:solidFill>
             <a:prstDash val="solid"/>
           </a:ln>
@@ -13249,13 +13927,13 @@
             <a:r>
               <a:rPr lang="en-US" sz="1300" b="1" dirty="0">
                 <a:solidFill>
-                  <a:srgbClr val="0F766E"/>
+                  <a:srgbClr val="9D174D"/>
                 </a:solidFill>
                 <a:latin typeface="Trebuchet MS" pitchFamily="34" charset="0"/>
                 <a:ea typeface="Trebuchet MS" pitchFamily="34" charset="-122"/>
                 <a:cs typeface="Trebuchet MS" pitchFamily="34" charset="-120"/>
               </a:rPr>
-              <a:t>think</a:t>
+              <a:t>ing</a:t>
             </a:r>
             <a:endParaRPr lang="en-US" sz="1300" dirty="0"/>
           </a:p>
@@ -13294,7 +13972,7 @@
                 <a:ea typeface="Calibri" pitchFamily="34" charset="-122"/>
                 <a:cs typeface="Calibri" pitchFamily="34" charset="-120"/>
               </a:rPr>
-              <a:t>to use the mind</a:t>
+              <a:t>ongoing action</a:t>
             </a:r>
             <a:endParaRPr lang="en-US" sz="850" dirty="0"/>
           </a:p>
@@ -13453,7 +14131,7 @@
                 <a:ea typeface="Trebuchet MS" pitchFamily="34" charset="-122"/>
                 <a:cs typeface="Trebuchet MS" pitchFamily="34" charset="-120"/>
               </a:rPr>
-              <a:t>re</a:t>
+              <a:t>think</a:t>
             </a:r>
             <a:endParaRPr lang="en-US" sz="1400" dirty="0"/>
           </a:p>
@@ -13558,7 +14236,7 @@
                 <a:ea typeface="Trebuchet MS" pitchFamily="34" charset="-122"/>
                 <a:cs typeface="Trebuchet MS" pitchFamily="34" charset="-120"/>
               </a:rPr>
-              <a:t>think</a:t>
+              <a:t>ing</a:t>
             </a:r>
             <a:endParaRPr lang="en-US" sz="1400" dirty="0"/>
           </a:p>
@@ -14386,7 +15064,7 @@
                 <a:ea typeface="Trebuchet MS" pitchFamily="34" charset="-122"/>
                 <a:cs typeface="Trebuchet MS" pitchFamily="34" charset="-120"/>
               </a:rPr>
-              <a:t>rethink</a:t>
+              <a:t>thinking</a:t>
             </a:r>
             <a:endParaRPr lang="en-US" sz="2800" dirty="0"/>
           </a:p>
@@ -14475,11 +15153,11 @@
             </a:avLst>
           </a:prstGeom>
           <a:solidFill>
-            <a:srgbClr val="DDD6FE"/>
+            <a:srgbClr val="CCFBF1"/>
           </a:solidFill>
           <a:ln w="19050">
             <a:solidFill>
-              <a:srgbClr val="7C3AED"/>
+              <a:srgbClr val="0D9488"/>
             </a:solidFill>
             <a:prstDash val="solid"/>
           </a:ln>
@@ -14519,13 +15197,13 @@
             <a:r>
               <a:rPr lang="en-US" sz="1300" b="1" dirty="0">
                 <a:solidFill>
-                  <a:srgbClr val="4C1D95"/>
+                  <a:srgbClr val="0F766E"/>
                 </a:solidFill>
                 <a:latin typeface="Trebuchet MS" pitchFamily="34" charset="0"/>
                 <a:ea typeface="Trebuchet MS" pitchFamily="34" charset="-122"/>
                 <a:cs typeface="Trebuchet MS" pitchFamily="34" charset="-120"/>
               </a:rPr>
-              <a:t>re</a:t>
+              <a:t>think</a:t>
             </a:r>
             <a:endParaRPr lang="en-US" sz="1300" dirty="0"/>
           </a:p>
@@ -14564,7 +15242,7 @@
                 <a:ea typeface="Calibri" pitchFamily="34" charset="-122"/>
                 <a:cs typeface="Calibri" pitchFamily="34" charset="-120"/>
               </a:rPr>
-              <a:t>again</a:t>
+              <a:t>to use the mind</a:t>
             </a:r>
             <a:endParaRPr lang="en-US" sz="850" dirty="0"/>
           </a:p>
@@ -14587,11 +15265,11 @@
             </a:avLst>
           </a:prstGeom>
           <a:solidFill>
-            <a:srgbClr val="CCFBF1"/>
+            <a:srgbClr val="FCE7F3"/>
           </a:solidFill>
           <a:ln w="19050">
             <a:solidFill>
-              <a:srgbClr val="0D9488"/>
+              <a:srgbClr val="DB2777"/>
             </a:solidFill>
             <a:prstDash val="solid"/>
           </a:ln>
@@ -14631,13 +15309,13 @@
             <a:r>
               <a:rPr lang="en-US" sz="1300" b="1" dirty="0">
                 <a:solidFill>
-                  <a:srgbClr val="0F766E"/>
+                  <a:srgbClr val="9D174D"/>
                 </a:solidFill>
                 <a:latin typeface="Trebuchet MS" pitchFamily="34" charset="0"/>
                 <a:ea typeface="Trebuchet MS" pitchFamily="34" charset="-122"/>
                 <a:cs typeface="Trebuchet MS" pitchFamily="34" charset="-120"/>
               </a:rPr>
-              <a:t>think</a:t>
+              <a:t>ing</a:t>
             </a:r>
             <a:endParaRPr lang="en-US" sz="1300" dirty="0"/>
           </a:p>
@@ -14676,7 +15354,7 @@
                 <a:ea typeface="Calibri" pitchFamily="34" charset="-122"/>
                 <a:cs typeface="Calibri" pitchFamily="34" charset="-120"/>
               </a:rPr>
-              <a:t>to use the mind</a:t>
+              <a:t>ongoing action</a:t>
             </a:r>
             <a:endParaRPr lang="en-US" sz="850" dirty="0"/>
           </a:p>
@@ -14835,7 +15513,7 @@
                 <a:ea typeface="Trebuchet MS" pitchFamily="34" charset="-122"/>
                 <a:cs typeface="Trebuchet MS" pitchFamily="34" charset="-120"/>
               </a:rPr>
-              <a:t>re</a:t>
+              <a:t>think</a:t>
             </a:r>
             <a:endParaRPr lang="en-US" sz="1400" dirty="0"/>
           </a:p>
@@ -14940,7 +15618,7 @@
                 <a:ea typeface="Trebuchet MS" pitchFamily="34" charset="-122"/>
                 <a:cs typeface="Trebuchet MS" pitchFamily="34" charset="-120"/>
               </a:rPr>
-              <a:t>think</a:t>
+              <a:t>ing</a:t>
             </a:r>
             <a:endParaRPr lang="en-US" sz="1400" dirty="0"/>
           </a:p>
@@ -15047,7 +15725,7 @@
         </p:nvSpPr>
         <p:spPr>
           <a:xfrm>
-            <a:off x="2254649" y="4169664"/>
+            <a:off x="2427732" y="4169664"/>
             <a:ext cx="685800" cy="475488"/>
           </a:xfrm>
           <a:prstGeom prst="rect">
@@ -15074,7 +15752,7 @@
         </p:nvSpPr>
         <p:spPr>
           <a:xfrm>
-            <a:off x="2254649" y="4169664"/>
+            <a:off x="2427732" y="4169664"/>
             <a:ext cx="685800" cy="475488"/>
           </a:xfrm>
           <a:prstGeom prst="rect">
@@ -15099,7 +15777,7 @@
                 <a:ea typeface="Trebuchet MS" pitchFamily="34" charset="-122"/>
                 <a:cs typeface="Trebuchet MS" pitchFamily="34" charset="-120"/>
               </a:rPr>
-              <a:t>r</a:t>
+              <a:t>th</a:t>
             </a:r>
             <a:endParaRPr lang="en-US" sz="900" dirty="0"/>
           </a:p>
@@ -15113,7 +15791,7 @@
         </p:nvSpPr>
         <p:spPr>
           <a:xfrm>
-            <a:off x="3293146" y="4169664"/>
+            <a:off x="3639312" y="4169664"/>
             <a:ext cx="685800" cy="475488"/>
           </a:xfrm>
           <a:prstGeom prst="rect">
@@ -15140,7 +15818,7 @@
         </p:nvSpPr>
         <p:spPr>
           <a:xfrm>
-            <a:off x="3293146" y="4169664"/>
+            <a:off x="3639312" y="4169664"/>
             <a:ext cx="685800" cy="475488"/>
           </a:xfrm>
           <a:prstGeom prst="rect">
@@ -15165,7 +15843,7 @@
                 <a:ea typeface="Trebuchet MS" pitchFamily="34" charset="-122"/>
                 <a:cs typeface="Trebuchet MS" pitchFamily="34" charset="-120"/>
               </a:rPr>
-              <a:t>e</a:t>
+              <a:t>i</a:t>
             </a:r>
             <a:endParaRPr lang="en-US" sz="900" dirty="0"/>
           </a:p>
@@ -15179,7 +15857,7 @@
         </p:nvSpPr>
         <p:spPr>
           <a:xfrm>
-            <a:off x="4331643" y="4169664"/>
+            <a:off x="4850892" y="4169664"/>
             <a:ext cx="685800" cy="475488"/>
           </a:xfrm>
           <a:prstGeom prst="rect">
@@ -15206,7 +15884,7 @@
         </p:nvSpPr>
         <p:spPr>
           <a:xfrm>
-            <a:off x="4331643" y="4169664"/>
+            <a:off x="4850892" y="4169664"/>
             <a:ext cx="685800" cy="475488"/>
           </a:xfrm>
           <a:prstGeom prst="rect">
@@ -15231,7 +15909,7 @@
                 <a:ea typeface="Trebuchet MS" pitchFamily="34" charset="-122"/>
                 <a:cs typeface="Trebuchet MS" pitchFamily="34" charset="-120"/>
               </a:rPr>
-              <a:t>th</a:t>
+              <a:t>nk</a:t>
             </a:r>
             <a:endParaRPr lang="en-US" sz="900" dirty="0"/>
           </a:p>
@@ -15245,7 +15923,7 @@
         </p:nvSpPr>
         <p:spPr>
           <a:xfrm>
-            <a:off x="5370141" y="4169664"/>
+            <a:off x="6062472" y="4169664"/>
             <a:ext cx="685800" cy="475488"/>
           </a:xfrm>
           <a:prstGeom prst="rect">
@@ -15272,7 +15950,7 @@
         </p:nvSpPr>
         <p:spPr>
           <a:xfrm>
-            <a:off x="5370141" y="4169664"/>
+            <a:off x="6062472" y="4169664"/>
             <a:ext cx="685800" cy="475488"/>
           </a:xfrm>
           <a:prstGeom prst="rect">
@@ -15311,7 +15989,7 @@
         </p:nvSpPr>
         <p:spPr>
           <a:xfrm>
-            <a:off x="6408638" y="4169664"/>
+            <a:off x="7274052" y="4169664"/>
             <a:ext cx="685800" cy="475488"/>
           </a:xfrm>
           <a:prstGeom prst="rect">
@@ -15338,7 +16016,7 @@
         </p:nvSpPr>
         <p:spPr>
           <a:xfrm>
-            <a:off x="6408638" y="4169664"/>
+            <a:off x="7274052" y="4169664"/>
             <a:ext cx="685800" cy="475488"/>
           </a:xfrm>
           <a:prstGeom prst="rect">
@@ -15363,73 +16041,7 @@
                 <a:ea typeface="Trebuchet MS" pitchFamily="34" charset="-122"/>
                 <a:cs typeface="Trebuchet MS" pitchFamily="34" charset="-120"/>
               </a:rPr>
-              <a:t>n</a:t>
-            </a:r>
-            <a:endParaRPr lang="en-US" sz="900" dirty="0"/>
-          </a:p>
-        </p:txBody>
-      </p:sp>
-      <p:sp>
-        <p:nvSpPr>
-          <p:cNvPr id="43" name="Shape 41"/>
-          <p:cNvSpPr/>
-          <p:nvPr/>
-        </p:nvSpPr>
-        <p:spPr>
-          <a:xfrm>
-            <a:off x="7447135" y="4169664"/>
-            <a:ext cx="685800" cy="475488"/>
-          </a:xfrm>
-          <a:prstGeom prst="rect">
-            <a:avLst>
-              <a:gd name="adj" fmla="val 7692"/>
-            </a:avLst>
-          </a:prstGeom>
-          <a:solidFill>
-            <a:srgbClr val="FFFFFF"/>
-          </a:solidFill>
-          <a:ln w="12700">
-            <a:solidFill>
-              <a:srgbClr val="DB2777"/>
-            </a:solidFill>
-            <a:prstDash val="solid"/>
-          </a:ln>
-        </p:spPr>
-      </p:sp>
-      <p:sp>
-        <p:nvSpPr>
-          <p:cNvPr id="44" name="Text 42"/>
-          <p:cNvSpPr/>
-          <p:nvPr/>
-        </p:nvSpPr>
-        <p:spPr>
-          <a:xfrm>
-            <a:off x="7447135" y="4169664"/>
-            <a:ext cx="685800" cy="475488"/>
-          </a:xfrm>
-          <a:prstGeom prst="rect">
-            <a:avLst/>
-          </a:prstGeom>
-          <a:noFill/>
-          <a:ln/>
-        </p:spPr>
-        <p:txBody>
-          <a:bodyPr wrap="square" lIns="0" tIns="0" rIns="0" bIns="0" rtlCol="0" anchor="ctr"/>
-          <a:lstStyle/>
-          <a:p>
-            <a:pPr algn="ctr" indent="0" marL="0">
-              <a:buNone/>
-            </a:pPr>
-            <a:r>
-              <a:rPr lang="en-US" sz="900" b="1" dirty="0">
-                <a:solidFill>
-                  <a:srgbClr val="9D174D"/>
-                </a:solidFill>
-                <a:latin typeface="Trebuchet MS" pitchFamily="34" charset="0"/>
-                <a:ea typeface="Trebuchet MS" pitchFamily="34" charset="-122"/>
-                <a:cs typeface="Trebuchet MS" pitchFamily="34" charset="-120"/>
-              </a:rPr>
-              <a:t>k</a:t>
+              <a:t>ng</a:t>
             </a:r>
             <a:endParaRPr lang="en-US" sz="900" dirty="0"/>
           </a:p>
@@ -16337,7 +16949,7 @@
                 <a:ea typeface="Trebuchet MS" pitchFamily="34" charset="-122"/>
                 <a:cs typeface="Trebuchet MS" pitchFamily="34" charset="-120"/>
               </a:rPr>
-              <a:t>2</a:t>
+              <a:t>1</a:t>
             </a:r>
             <a:pPr algn="ctr" indent="0" marL="0">
               <a:buNone/>
@@ -16351,7 +16963,7 @@
                 <a:ea typeface="Trebuchet MS" pitchFamily="34" charset="-122"/>
                 <a:cs typeface="Trebuchet MS" pitchFamily="34" charset="-120"/>
               </a:rPr>
-              <a:t>  punctuation marks</a:t>
+              <a:t>  punctuation mark</a:t>
             </a:r>
             <a:endParaRPr lang="en-US" sz="2800" dirty="0"/>
           </a:p>
@@ -16755,7 +17367,7 @@
                 <a:ea typeface="Calibri" pitchFamily="34" charset="-122"/>
                 <a:cs typeface="Calibri" pitchFamily="34" charset="-120"/>
               </a:rPr>
-              <a:t>She is an independent, </a:t>
+              <a:t>The </a:t>
             </a:r>
             <a:pPr algn="l" indent="0" marL="0">
               <a:buNone/>
@@ -16772,7 +17384,7 @@
                 <a:ea typeface="Calibri" pitchFamily="34" charset="-122"/>
                 <a:cs typeface="Calibri" pitchFamily="34" charset="-120"/>
               </a:rPr>
-              <a:t>freethinking</a:t>
+              <a:t>unthinkable</a:t>
             </a:r>
             <a:pPr algn="l" indent="0" marL="0">
               <a:buNone/>
@@ -16786,7 +17398,7 @@
                 <a:ea typeface="Calibri" pitchFamily="34" charset="-122"/>
                 <a:cs typeface="Calibri" pitchFamily="34" charset="-120"/>
               </a:rPr>
-              <a:t> student who loves to </a:t>
+              <a:t> happened when the </a:t>
             </a:r>
             <a:pPr algn="l" indent="0" marL="0">
               <a:buNone/>
@@ -16803,7 +17415,7 @@
                 <a:ea typeface="Calibri" pitchFamily="34" charset="-122"/>
                 <a:cs typeface="Calibri" pitchFamily="34" charset="-120"/>
               </a:rPr>
-              <a:t>overthink</a:t>
+              <a:t>thinker</a:t>
             </a:r>
             <a:pPr algn="l" indent="0" marL="0">
               <a:buNone/>
@@ -16817,7 +17429,38 @@
                 <a:ea typeface="Calibri" pitchFamily="34" charset="-122"/>
                 <a:cs typeface="Calibri" pitchFamily="34" charset="-120"/>
               </a:rPr>
-              <a:t> every problem she encounters!</a:t>
+              <a:t> realised he had </a:t>
+            </a:r>
+            <a:pPr algn="l" indent="0" marL="0">
+              <a:buNone/>
+            </a:pPr>
+            <a:r>
+              <a:rPr lang="en-US" sz="1800" b="1" dirty="0">
+                <a:solidFill>
+                  <a:srgbClr val="0D9488"/>
+                </a:solidFill>
+                <a:highlight>
+                  <a:srgbClr val="CCFBF1"/>
+                </a:highlight>
+                <a:latin typeface="Calibri" pitchFamily="34" charset="0"/>
+                <a:ea typeface="Calibri" pitchFamily="34" charset="-122"/>
+                <a:cs typeface="Calibri" pitchFamily="34" charset="-120"/>
+              </a:rPr>
+              <a:t>overthought</a:t>
+            </a:r>
+            <a:pPr algn="l" indent="0" marL="0">
+              <a:buNone/>
+            </a:pPr>
+            <a:r>
+              <a:rPr lang="en-US" sz="1800" dirty="0">
+                <a:solidFill>
+                  <a:srgbClr val="0F172A"/>
+                </a:solidFill>
+                <a:latin typeface="Calibri" pitchFamily="34" charset="0"/>
+                <a:ea typeface="Calibri" pitchFamily="34" charset="-122"/>
+                <a:cs typeface="Calibri" pitchFamily="34" charset="-120"/>
+              </a:rPr>
+              <a:t> every single part of his speech!</a:t>
             </a:r>
             <a:endParaRPr lang="en-US" sz="1800" dirty="0"/>
           </a:p>
@@ -16972,7 +17615,7 @@
                 <a:ea typeface="Trebuchet MS" pitchFamily="34" charset="-122"/>
                 <a:cs typeface="Trebuchet MS" pitchFamily="34" charset="-120"/>
               </a:rPr>
-              <a:t>freethinking</a:t>
+              <a:t>unthinkable</a:t>
             </a:r>
             <a:endParaRPr lang="en-US" sz="1400" dirty="0"/>
           </a:p>
@@ -17100,7 +17743,7 @@
                 <a:ea typeface="Trebuchet MS" pitchFamily="34" charset="-122"/>
                 <a:cs typeface="Trebuchet MS" pitchFamily="34" charset="-120"/>
               </a:rPr>
-              <a:t>overthink</a:t>
+              <a:t>thinker</a:t>
             </a:r>
             <a:endParaRPr lang="en-US" sz="1400" dirty="0"/>
           </a:p>
@@ -17228,7 +17871,7 @@
                 <a:ea typeface="Trebuchet MS" pitchFamily="34" charset="-122"/>
                 <a:cs typeface="Trebuchet MS" pitchFamily="34" charset="-120"/>
               </a:rPr>
-              <a:t>thinker</a:t>
+              <a:t>overthought</a:t>
             </a:r>
             <a:endParaRPr lang="en-US" sz="1400" dirty="0"/>
           </a:p>
@@ -17698,7 +18341,7 @@
                 <a:ea typeface="Trebuchet MS" pitchFamily="34" charset="-122"/>
                 <a:cs typeface="Trebuchet MS" pitchFamily="34" charset="-120"/>
               </a:rPr>
-              <a:t>freethinking</a:t>
+              <a:t>unthinkable</a:t>
             </a:r>
             <a:endParaRPr lang="en-US" sz="2800" dirty="0"/>
           </a:p>
@@ -18525,7 +19168,7 @@
                 <a:ea typeface="Trebuchet MS" pitchFamily="34" charset="-122"/>
                 <a:cs typeface="Trebuchet MS" pitchFamily="34" charset="-120"/>
               </a:rPr>
-              <a:t>freethinking</a:t>
+              <a:t>unthinkable</a:t>
             </a:r>
             <a:endParaRPr lang="en-US" sz="2800" dirty="0"/>
           </a:p>
@@ -18664,7 +19307,7 @@
                 <a:ea typeface="Trebuchet MS" pitchFamily="34" charset="-122"/>
                 <a:cs typeface="Trebuchet MS" pitchFamily="34" charset="-120"/>
               </a:rPr>
-              <a:t>free</a:t>
+              <a:t>un</a:t>
             </a:r>
             <a:endParaRPr lang="en-US" sz="1300" dirty="0"/>
           </a:p>
@@ -18703,7 +19346,7 @@
                 <a:ea typeface="Calibri" pitchFamily="34" charset="-122"/>
                 <a:cs typeface="Calibri" pitchFamily="34" charset="-120"/>
               </a:rPr>
-              <a:t>without restriction</a:t>
+              <a:t>not</a:t>
             </a:r>
             <a:endParaRPr lang="en-US" sz="850" dirty="0"/>
           </a:p>
@@ -18888,7 +19531,7 @@
                 <a:ea typeface="Trebuchet MS" pitchFamily="34" charset="-122"/>
                 <a:cs typeface="Trebuchet MS" pitchFamily="34" charset="-120"/>
               </a:rPr>
-              <a:t>ing</a:t>
+              <a:t>able</a:t>
             </a:r>
             <a:endParaRPr lang="en-US" sz="1300" dirty="0"/>
           </a:p>
@@ -18927,7 +19570,7 @@
                 <a:ea typeface="Calibri" pitchFamily="34" charset="-122"/>
                 <a:cs typeface="Calibri" pitchFamily="34" charset="-120"/>
               </a:rPr>
-              <a:t>in the process of</a:t>
+              <a:t>able to be done</a:t>
             </a:r>
             <a:endParaRPr lang="en-US" sz="850" dirty="0"/>
           </a:p>
@@ -19622,7 +20265,7 @@
                 <a:ea typeface="Trebuchet MS" pitchFamily="34" charset="-122"/>
                 <a:cs typeface="Trebuchet MS" pitchFamily="34" charset="-120"/>
               </a:rPr>
-              <a:t>freethinking</a:t>
+              <a:t>unthinkable</a:t>
             </a:r>
             <a:endParaRPr lang="en-US" sz="2800" dirty="0"/>
           </a:p>
@@ -19761,7 +20404,7 @@
                 <a:ea typeface="Trebuchet MS" pitchFamily="34" charset="-122"/>
                 <a:cs typeface="Trebuchet MS" pitchFamily="34" charset="-120"/>
               </a:rPr>
-              <a:t>free</a:t>
+              <a:t>un</a:t>
             </a:r>
             <a:endParaRPr lang="en-US" sz="1300" dirty="0"/>
           </a:p>
@@ -19800,7 +20443,7 @@
                 <a:ea typeface="Calibri" pitchFamily="34" charset="-122"/>
                 <a:cs typeface="Calibri" pitchFamily="34" charset="-120"/>
               </a:rPr>
-              <a:t>without restriction</a:t>
+              <a:t>not</a:t>
             </a:r>
             <a:endParaRPr lang="en-US" sz="850" dirty="0"/>
           </a:p>
@@ -19985,7 +20628,7 @@
                 <a:ea typeface="Trebuchet MS" pitchFamily="34" charset="-122"/>
                 <a:cs typeface="Trebuchet MS" pitchFamily="34" charset="-120"/>
               </a:rPr>
-              <a:t>ing</a:t>
+              <a:t>able</a:t>
             </a:r>
             <a:endParaRPr lang="en-US" sz="1300" dirty="0"/>
           </a:p>
@@ -20024,7 +20667,7 @@
                 <a:ea typeface="Calibri" pitchFamily="34" charset="-122"/>
                 <a:cs typeface="Calibri" pitchFamily="34" charset="-120"/>
               </a:rPr>
-              <a:t>in the process of</a:t>
+              <a:t>able to be done</a:t>
             </a:r>
             <a:endParaRPr lang="en-US" sz="850" dirty="0"/>
           </a:p>
@@ -20131,8 +20774,8 @@
         </p:nvSpPr>
         <p:spPr>
           <a:xfrm>
-            <a:off x="2313432" y="3364992"/>
-            <a:ext cx="1645920" cy="475488"/>
+            <a:off x="1975104" y="3364992"/>
+            <a:ext cx="1554480" cy="475488"/>
           </a:xfrm>
           <a:prstGeom prst="rect">
             <a:avLst>
@@ -20158,8 +20801,8 @@
         </p:nvSpPr>
         <p:spPr>
           <a:xfrm>
-            <a:off x="2313432" y="3364992"/>
-            <a:ext cx="1645920" cy="475488"/>
+            <a:off x="1975104" y="3364992"/>
+            <a:ext cx="1554480" cy="475488"/>
           </a:xfrm>
           <a:prstGeom prst="rect">
             <a:avLst/>
@@ -20183,7 +20826,7 @@
                 <a:ea typeface="Trebuchet MS" pitchFamily="34" charset="-122"/>
                 <a:cs typeface="Trebuchet MS" pitchFamily="34" charset="-120"/>
               </a:rPr>
-              <a:t>free</a:t>
+              <a:t>un</a:t>
             </a:r>
             <a:endParaRPr lang="en-US" sz="1400" dirty="0"/>
           </a:p>
@@ -20197,8 +20840,8 @@
         </p:nvSpPr>
         <p:spPr>
           <a:xfrm>
-            <a:off x="3959352" y="3364992"/>
-            <a:ext cx="411480" cy="475488"/>
+            <a:off x="3529584" y="3364992"/>
+            <a:ext cx="73152" cy="475488"/>
           </a:xfrm>
           <a:prstGeom prst="rect">
             <a:avLst/>
@@ -20236,8 +20879,8 @@
         </p:nvSpPr>
         <p:spPr>
           <a:xfrm>
-            <a:off x="4370832" y="3364992"/>
-            <a:ext cx="1645920" cy="475488"/>
+            <a:off x="3602736" y="3364992"/>
+            <a:ext cx="1554480" cy="475488"/>
           </a:xfrm>
           <a:prstGeom prst="rect">
             <a:avLst>
@@ -20263,8 +20906,8 @@
         </p:nvSpPr>
         <p:spPr>
           <a:xfrm>
-            <a:off x="4370832" y="3364992"/>
-            <a:ext cx="1645920" cy="475488"/>
+            <a:off x="3602736" y="3364992"/>
+            <a:ext cx="1554480" cy="475488"/>
           </a:xfrm>
           <a:prstGeom prst="rect">
             <a:avLst/>
@@ -20302,8 +20945,8 @@
         </p:nvSpPr>
         <p:spPr>
           <a:xfrm>
-            <a:off x="6016752" y="3364992"/>
-            <a:ext cx="411480" cy="475488"/>
+            <a:off x="5157216" y="3364992"/>
+            <a:ext cx="73152" cy="475488"/>
           </a:xfrm>
           <a:prstGeom prst="rect">
             <a:avLst/>
@@ -20341,8 +20984,8 @@
         </p:nvSpPr>
         <p:spPr>
           <a:xfrm>
-            <a:off x="6428232" y="3364992"/>
-            <a:ext cx="1645920" cy="475488"/>
+            <a:off x="5230368" y="3364992"/>
+            <a:ext cx="1554480" cy="475488"/>
           </a:xfrm>
           <a:prstGeom prst="rect">
             <a:avLst>
@@ -20368,8 +21011,8 @@
         </p:nvSpPr>
         <p:spPr>
           <a:xfrm>
-            <a:off x="6428232" y="3364992"/>
-            <a:ext cx="1645920" cy="475488"/>
+            <a:off x="5230368" y="3364992"/>
+            <a:ext cx="1554480" cy="475488"/>
           </a:xfrm>
           <a:prstGeom prst="rect">
             <a:avLst/>
@@ -20393,7 +21036,7 @@
                 <a:ea typeface="Trebuchet MS" pitchFamily="34" charset="-122"/>
                 <a:cs typeface="Trebuchet MS" pitchFamily="34" charset="-120"/>
               </a:rPr>
-              <a:t>ing</a:t>
+              <a:t>a</a:t>
             </a:r>
             <a:endParaRPr lang="en-US" sz="1400" dirty="0"/>
           </a:p>
@@ -20401,7 +21044,112 @@
       </p:sp>
       <p:sp>
         <p:nvSpPr>
-          <p:cNvPr id="36" name="Shape 34"/>
+          <p:cNvPr id="36" name="Text 34"/>
+          <p:cNvSpPr/>
+          <p:nvPr/>
+        </p:nvSpPr>
+        <p:spPr>
+          <a:xfrm>
+            <a:off x="6784848" y="3364992"/>
+            <a:ext cx="73152" cy="475488"/>
+          </a:xfrm>
+          <a:prstGeom prst="rect">
+            <a:avLst/>
+          </a:prstGeom>
+          <a:noFill/>
+          <a:ln/>
+        </p:spPr>
+        <p:txBody>
+          <a:bodyPr wrap="square" lIns="0" tIns="0" rIns="0" bIns="0" rtlCol="0" anchor="ctr"/>
+          <a:lstStyle/>
+          <a:p>
+            <a:pPr algn="ctr" indent="0" marL="0">
+              <a:buNone/>
+            </a:pPr>
+            <a:r>
+              <a:rPr lang="en-US" sz="1600" b="1" dirty="0">
+                <a:solidFill>
+                  <a:srgbClr val="0D9488"/>
+                </a:solidFill>
+                <a:latin typeface="Trebuchet MS" pitchFamily="34" charset="0"/>
+                <a:ea typeface="Trebuchet MS" pitchFamily="34" charset="-122"/>
+                <a:cs typeface="Trebuchet MS" pitchFamily="34" charset="-120"/>
+              </a:rPr>
+              <a:t>·</a:t>
+            </a:r>
+            <a:endParaRPr lang="en-US" sz="1600" dirty="0"/>
+          </a:p>
+        </p:txBody>
+      </p:sp>
+      <p:sp>
+        <p:nvSpPr>
+          <p:cNvPr id="37" name="Shape 35"/>
+          <p:cNvSpPr/>
+          <p:nvPr/>
+        </p:nvSpPr>
+        <p:spPr>
+          <a:xfrm>
+            <a:off x="6858000" y="3364992"/>
+            <a:ext cx="1554480" cy="475488"/>
+          </a:xfrm>
+          <a:prstGeom prst="rect">
+            <a:avLst>
+              <a:gd name="adj" fmla="val 9615"/>
+            </a:avLst>
+          </a:prstGeom>
+          <a:solidFill>
+            <a:srgbClr val="FFFFFF"/>
+          </a:solidFill>
+          <a:ln w="12700">
+            <a:solidFill>
+              <a:srgbClr val="0D9488"/>
+            </a:solidFill>
+            <a:prstDash val="solid"/>
+          </a:ln>
+        </p:spPr>
+      </p:sp>
+      <p:sp>
+        <p:nvSpPr>
+          <p:cNvPr id="38" name="Text 36"/>
+          <p:cNvSpPr/>
+          <p:nvPr/>
+        </p:nvSpPr>
+        <p:spPr>
+          <a:xfrm>
+            <a:off x="6858000" y="3364992"/>
+            <a:ext cx="1554480" cy="475488"/>
+          </a:xfrm>
+          <a:prstGeom prst="rect">
+            <a:avLst/>
+          </a:prstGeom>
+          <a:noFill/>
+          <a:ln/>
+        </p:spPr>
+        <p:txBody>
+          <a:bodyPr wrap="square" lIns="0" tIns="0" rIns="0" bIns="0" rtlCol="0" anchor="ctr"/>
+          <a:lstStyle/>
+          <a:p>
+            <a:pPr algn="ctr" indent="0" marL="0">
+              <a:buNone/>
+            </a:pPr>
+            <a:r>
+              <a:rPr lang="en-US" sz="1400" b="1" dirty="0">
+                <a:solidFill>
+                  <a:srgbClr val="0D9488"/>
+                </a:solidFill>
+                <a:latin typeface="Trebuchet MS" pitchFamily="34" charset="0"/>
+                <a:ea typeface="Trebuchet MS" pitchFamily="34" charset="-122"/>
+                <a:cs typeface="Trebuchet MS" pitchFamily="34" charset="-120"/>
+              </a:rPr>
+              <a:t>ble</a:t>
+            </a:r>
+            <a:endParaRPr lang="en-US" sz="1400" dirty="0"/>
+          </a:p>
+        </p:txBody>
+      </p:sp>
+      <p:sp>
+        <p:nvSpPr>
+          <p:cNvPr id="39" name="Shape 37"/>
           <p:cNvSpPr/>
           <p:nvPr/>
         </p:nvSpPr>
@@ -20428,7 +21176,7 @@
       </p:sp>
       <p:sp>
         <p:nvSpPr>
-          <p:cNvPr id="37" name="Text 35"/>
+          <p:cNvPr id="40" name="Text 38"/>
           <p:cNvSpPr/>
           <p:nvPr/>
         </p:nvSpPr>
@@ -20467,7 +21215,7 @@
       </p:sp>
       <p:sp>
         <p:nvSpPr>
-          <p:cNvPr id="38" name="Shape 36"/>
+          <p:cNvPr id="41" name="Shape 39"/>
           <p:cNvSpPr/>
           <p:nvPr/>
         </p:nvSpPr>
@@ -20494,7 +21242,7 @@
       </p:sp>
       <p:sp>
         <p:nvSpPr>
-          <p:cNvPr id="39" name="Text 37"/>
+          <p:cNvPr id="42" name="Text 40"/>
           <p:cNvSpPr/>
           <p:nvPr/>
         </p:nvSpPr>
@@ -20956,7 +21704,7 @@
                 <a:ea typeface="Trebuchet MS" pitchFamily="34" charset="-122"/>
                 <a:cs typeface="Trebuchet MS" pitchFamily="34" charset="-120"/>
               </a:rPr>
-              <a:t>freethinking</a:t>
+              <a:t>unthinkable</a:t>
             </a:r>
             <a:endParaRPr lang="en-US" sz="2800" dirty="0"/>
           </a:p>
@@ -21095,7 +21843,7 @@
                 <a:ea typeface="Trebuchet MS" pitchFamily="34" charset="-122"/>
                 <a:cs typeface="Trebuchet MS" pitchFamily="34" charset="-120"/>
               </a:rPr>
-              <a:t>free</a:t>
+              <a:t>un</a:t>
             </a:r>
             <a:endParaRPr lang="en-US" sz="1300" dirty="0"/>
           </a:p>
@@ -21134,7 +21882,7 @@
                 <a:ea typeface="Calibri" pitchFamily="34" charset="-122"/>
                 <a:cs typeface="Calibri" pitchFamily="34" charset="-120"/>
               </a:rPr>
-              <a:t>without restriction</a:t>
+              <a:t>not</a:t>
             </a:r>
             <a:endParaRPr lang="en-US" sz="850" dirty="0"/>
           </a:p>
@@ -21319,7 +22067,7 @@
                 <a:ea typeface="Trebuchet MS" pitchFamily="34" charset="-122"/>
                 <a:cs typeface="Trebuchet MS" pitchFamily="34" charset="-120"/>
               </a:rPr>
-              <a:t>ing</a:t>
+              <a:t>able</a:t>
             </a:r>
             <a:endParaRPr lang="en-US" sz="1300" dirty="0"/>
           </a:p>
@@ -21358,7 +22106,7 @@
                 <a:ea typeface="Calibri" pitchFamily="34" charset="-122"/>
                 <a:cs typeface="Calibri" pitchFamily="34" charset="-120"/>
               </a:rPr>
-              <a:t>in the process of</a:t>
+              <a:t>able to be done</a:t>
             </a:r>
             <a:endParaRPr lang="en-US" sz="850" dirty="0"/>
           </a:p>
@@ -21465,8 +22213,8 @@
         </p:nvSpPr>
         <p:spPr>
           <a:xfrm>
-            <a:off x="2313432" y="3364992"/>
-            <a:ext cx="1645920" cy="475488"/>
+            <a:off x="1975104" y="3364992"/>
+            <a:ext cx="1554480" cy="475488"/>
           </a:xfrm>
           <a:prstGeom prst="rect">
             <a:avLst>
@@ -21492,8 +22240,8 @@
         </p:nvSpPr>
         <p:spPr>
           <a:xfrm>
-            <a:off x="2313432" y="3364992"/>
-            <a:ext cx="1645920" cy="475488"/>
+            <a:off x="1975104" y="3364992"/>
+            <a:ext cx="1554480" cy="475488"/>
           </a:xfrm>
           <a:prstGeom prst="rect">
             <a:avLst/>
@@ -21517,7 +22265,7 @@
                 <a:ea typeface="Trebuchet MS" pitchFamily="34" charset="-122"/>
                 <a:cs typeface="Trebuchet MS" pitchFamily="34" charset="-120"/>
               </a:rPr>
-              <a:t>free</a:t>
+              <a:t>un</a:t>
             </a:r>
             <a:endParaRPr lang="en-US" sz="1400" dirty="0"/>
           </a:p>
@@ -21531,8 +22279,8 @@
         </p:nvSpPr>
         <p:spPr>
           <a:xfrm>
-            <a:off x="3959352" y="3364992"/>
-            <a:ext cx="411480" cy="475488"/>
+            <a:off x="3529584" y="3364992"/>
+            <a:ext cx="73152" cy="475488"/>
           </a:xfrm>
           <a:prstGeom prst="rect">
             <a:avLst/>
@@ -21570,8 +22318,8 @@
         </p:nvSpPr>
         <p:spPr>
           <a:xfrm>
-            <a:off x="4370832" y="3364992"/>
-            <a:ext cx="1645920" cy="475488"/>
+            <a:off x="3602736" y="3364992"/>
+            <a:ext cx="1554480" cy="475488"/>
           </a:xfrm>
           <a:prstGeom prst="rect">
             <a:avLst>
@@ -21597,8 +22345,8 @@
         </p:nvSpPr>
         <p:spPr>
           <a:xfrm>
-            <a:off x="4370832" y="3364992"/>
-            <a:ext cx="1645920" cy="475488"/>
+            <a:off x="3602736" y="3364992"/>
+            <a:ext cx="1554480" cy="475488"/>
           </a:xfrm>
           <a:prstGeom prst="rect">
             <a:avLst/>
@@ -21636,8 +22384,8 @@
         </p:nvSpPr>
         <p:spPr>
           <a:xfrm>
-            <a:off x="6016752" y="3364992"/>
-            <a:ext cx="411480" cy="475488"/>
+            <a:off x="5157216" y="3364992"/>
+            <a:ext cx="73152" cy="475488"/>
           </a:xfrm>
           <a:prstGeom prst="rect">
             <a:avLst/>
@@ -21675,8 +22423,8 @@
         </p:nvSpPr>
         <p:spPr>
           <a:xfrm>
-            <a:off x="6428232" y="3364992"/>
-            <a:ext cx="1645920" cy="475488"/>
+            <a:off x="5230368" y="3364992"/>
+            <a:ext cx="1554480" cy="475488"/>
           </a:xfrm>
           <a:prstGeom prst="rect">
             <a:avLst>
@@ -21702,8 +22450,8 @@
         </p:nvSpPr>
         <p:spPr>
           <a:xfrm>
-            <a:off x="6428232" y="3364992"/>
-            <a:ext cx="1645920" cy="475488"/>
+            <a:off x="5230368" y="3364992"/>
+            <a:ext cx="1554480" cy="475488"/>
           </a:xfrm>
           <a:prstGeom prst="rect">
             <a:avLst/>
@@ -21727,7 +22475,7 @@
                 <a:ea typeface="Trebuchet MS" pitchFamily="34" charset="-122"/>
                 <a:cs typeface="Trebuchet MS" pitchFamily="34" charset="-120"/>
               </a:rPr>
-              <a:t>ing</a:t>
+              <a:t>a</a:t>
             </a:r>
             <a:endParaRPr lang="en-US" sz="1400" dirty="0"/>
           </a:p>
@@ -21735,7 +22483,112 @@
       </p:sp>
       <p:sp>
         <p:nvSpPr>
-          <p:cNvPr id="36" name="Shape 34"/>
+          <p:cNvPr id="36" name="Text 34"/>
+          <p:cNvSpPr/>
+          <p:nvPr/>
+        </p:nvSpPr>
+        <p:spPr>
+          <a:xfrm>
+            <a:off x="6784848" y="3364992"/>
+            <a:ext cx="73152" cy="475488"/>
+          </a:xfrm>
+          <a:prstGeom prst="rect">
+            <a:avLst/>
+          </a:prstGeom>
+          <a:noFill/>
+          <a:ln/>
+        </p:spPr>
+        <p:txBody>
+          <a:bodyPr wrap="square" lIns="0" tIns="0" rIns="0" bIns="0" rtlCol="0" anchor="ctr"/>
+          <a:lstStyle/>
+          <a:p>
+            <a:pPr algn="ctr" indent="0" marL="0">
+              <a:buNone/>
+            </a:pPr>
+            <a:r>
+              <a:rPr lang="en-US" sz="1600" b="1" dirty="0">
+                <a:solidFill>
+                  <a:srgbClr val="0D9488"/>
+                </a:solidFill>
+                <a:latin typeface="Trebuchet MS" pitchFamily="34" charset="0"/>
+                <a:ea typeface="Trebuchet MS" pitchFamily="34" charset="-122"/>
+                <a:cs typeface="Trebuchet MS" pitchFamily="34" charset="-120"/>
+              </a:rPr>
+              <a:t>·</a:t>
+            </a:r>
+            <a:endParaRPr lang="en-US" sz="1600" dirty="0"/>
+          </a:p>
+        </p:txBody>
+      </p:sp>
+      <p:sp>
+        <p:nvSpPr>
+          <p:cNvPr id="37" name="Shape 35"/>
+          <p:cNvSpPr/>
+          <p:nvPr/>
+        </p:nvSpPr>
+        <p:spPr>
+          <a:xfrm>
+            <a:off x="6858000" y="3364992"/>
+            <a:ext cx="1554480" cy="475488"/>
+          </a:xfrm>
+          <a:prstGeom prst="rect">
+            <a:avLst>
+              <a:gd name="adj" fmla="val 9615"/>
+            </a:avLst>
+          </a:prstGeom>
+          <a:solidFill>
+            <a:srgbClr val="FFFFFF"/>
+          </a:solidFill>
+          <a:ln w="12700">
+            <a:solidFill>
+              <a:srgbClr val="0D9488"/>
+            </a:solidFill>
+            <a:prstDash val="solid"/>
+          </a:ln>
+        </p:spPr>
+      </p:sp>
+      <p:sp>
+        <p:nvSpPr>
+          <p:cNvPr id="38" name="Text 36"/>
+          <p:cNvSpPr/>
+          <p:nvPr/>
+        </p:nvSpPr>
+        <p:spPr>
+          <a:xfrm>
+            <a:off x="6858000" y="3364992"/>
+            <a:ext cx="1554480" cy="475488"/>
+          </a:xfrm>
+          <a:prstGeom prst="rect">
+            <a:avLst/>
+          </a:prstGeom>
+          <a:noFill/>
+          <a:ln/>
+        </p:spPr>
+        <p:txBody>
+          <a:bodyPr wrap="square" lIns="0" tIns="0" rIns="0" bIns="0" rtlCol="0" anchor="ctr"/>
+          <a:lstStyle/>
+          <a:p>
+            <a:pPr algn="ctr" indent="0" marL="0">
+              <a:buNone/>
+            </a:pPr>
+            <a:r>
+              <a:rPr lang="en-US" sz="1400" b="1" dirty="0">
+                <a:solidFill>
+                  <a:srgbClr val="0D9488"/>
+                </a:solidFill>
+                <a:latin typeface="Trebuchet MS" pitchFamily="34" charset="0"/>
+                <a:ea typeface="Trebuchet MS" pitchFamily="34" charset="-122"/>
+                <a:cs typeface="Trebuchet MS" pitchFamily="34" charset="-120"/>
+              </a:rPr>
+              <a:t>ble</a:t>
+            </a:r>
+            <a:endParaRPr lang="en-US" sz="1400" dirty="0"/>
+          </a:p>
+        </p:txBody>
+      </p:sp>
+      <p:sp>
+        <p:nvSpPr>
+          <p:cNvPr id="39" name="Shape 37"/>
           <p:cNvSpPr/>
           <p:nvPr/>
         </p:nvSpPr>
@@ -21762,7 +22615,7 @@
       </p:sp>
       <p:sp>
         <p:nvSpPr>
-          <p:cNvPr id="37" name="Text 35"/>
+          <p:cNvPr id="40" name="Text 38"/>
           <p:cNvSpPr/>
           <p:nvPr/>
         </p:nvSpPr>
@@ -21801,7 +22654,7 @@
       </p:sp>
       <p:sp>
         <p:nvSpPr>
-          <p:cNvPr id="38" name="Shape 36"/>
+          <p:cNvPr id="41" name="Shape 39"/>
           <p:cNvSpPr/>
           <p:nvPr/>
         </p:nvSpPr>
@@ -21828,14 +22681,14 @@
       </p:sp>
       <p:sp>
         <p:nvSpPr>
-          <p:cNvPr id="39" name="Shape 37"/>
-          <p:cNvSpPr/>
-          <p:nvPr/>
-        </p:nvSpPr>
-        <p:spPr>
-          <a:xfrm>
-            <a:off x="1951330" y="4169664"/>
-            <a:ext cx="676656" cy="475488"/>
+          <p:cNvPr id="42" name="Shape 40"/>
+          <p:cNvSpPr/>
+          <p:nvPr/>
+        </p:nvSpPr>
+        <p:spPr>
+          <a:xfrm>
+            <a:off x="2023872" y="4169664"/>
+            <a:ext cx="685800" cy="475488"/>
           </a:xfrm>
           <a:prstGeom prst="rect">
             <a:avLst>
@@ -21855,14 +22708,14 @@
       </p:sp>
       <p:sp>
         <p:nvSpPr>
-          <p:cNvPr id="40" name="Text 38"/>
-          <p:cNvSpPr/>
-          <p:nvPr/>
-        </p:nvSpPr>
-        <p:spPr>
-          <a:xfrm>
-            <a:off x="1951330" y="4169664"/>
-            <a:ext cx="676656" cy="475488"/>
+          <p:cNvPr id="43" name="Text 41"/>
+          <p:cNvSpPr/>
+          <p:nvPr/>
+        </p:nvSpPr>
+        <p:spPr>
+          <a:xfrm>
+            <a:off x="2023872" y="4169664"/>
+            <a:ext cx="685800" cy="475488"/>
           </a:xfrm>
           <a:prstGeom prst="rect">
             <a:avLst/>
@@ -21886,7 +22739,7 @@
                 <a:ea typeface="Trebuchet MS" pitchFamily="34" charset="-122"/>
                 <a:cs typeface="Trebuchet MS" pitchFamily="34" charset="-120"/>
               </a:rPr>
-              <a:t>f</a:t>
+              <a:t>u</a:t>
             </a:r>
             <a:endParaRPr lang="en-US" sz="900" dirty="0"/>
           </a:p>
@@ -21894,14 +22747,14 @@
       </p:sp>
       <p:sp>
         <p:nvSpPr>
-          <p:cNvPr id="41" name="Shape 39"/>
-          <p:cNvSpPr/>
-          <p:nvPr/>
-        </p:nvSpPr>
-        <p:spPr>
-          <a:xfrm>
-            <a:off x="2677363" y="4169664"/>
-            <a:ext cx="676656" cy="475488"/>
+          <p:cNvPr id="44" name="Shape 42"/>
+          <p:cNvSpPr/>
+          <p:nvPr/>
+        </p:nvSpPr>
+        <p:spPr>
+          <a:xfrm>
+            <a:off x="2831592" y="4169664"/>
+            <a:ext cx="685800" cy="475488"/>
           </a:xfrm>
           <a:prstGeom prst="rect">
             <a:avLst>
@@ -21921,14 +22774,14 @@
       </p:sp>
       <p:sp>
         <p:nvSpPr>
-          <p:cNvPr id="42" name="Text 40"/>
-          <p:cNvSpPr/>
-          <p:nvPr/>
-        </p:nvSpPr>
-        <p:spPr>
-          <a:xfrm>
-            <a:off x="2677363" y="4169664"/>
-            <a:ext cx="676656" cy="475488"/>
+          <p:cNvPr id="45" name="Text 43"/>
+          <p:cNvSpPr/>
+          <p:nvPr/>
+        </p:nvSpPr>
+        <p:spPr>
+          <a:xfrm>
+            <a:off x="2831592" y="4169664"/>
+            <a:ext cx="685800" cy="475488"/>
           </a:xfrm>
           <a:prstGeom prst="rect">
             <a:avLst/>
@@ -21952,7 +22805,7 @@
                 <a:ea typeface="Trebuchet MS" pitchFamily="34" charset="-122"/>
                 <a:cs typeface="Trebuchet MS" pitchFamily="34" charset="-120"/>
               </a:rPr>
-              <a:t>r</a:t>
+              <a:t>n</a:t>
             </a:r>
             <a:endParaRPr lang="en-US" sz="900" dirty="0"/>
           </a:p>
@@ -21960,14 +22813,14 @@
       </p:sp>
       <p:sp>
         <p:nvSpPr>
-          <p:cNvPr id="43" name="Shape 41"/>
-          <p:cNvSpPr/>
-          <p:nvPr/>
-        </p:nvSpPr>
-        <p:spPr>
-          <a:xfrm>
-            <a:off x="3403397" y="4169664"/>
-            <a:ext cx="676656" cy="475488"/>
+          <p:cNvPr id="46" name="Shape 44"/>
+          <p:cNvSpPr/>
+          <p:nvPr/>
+        </p:nvSpPr>
+        <p:spPr>
+          <a:xfrm>
+            <a:off x="3639312" y="4169664"/>
+            <a:ext cx="685800" cy="475488"/>
           </a:xfrm>
           <a:prstGeom prst="rect">
             <a:avLst>
@@ -21987,14 +22840,14 @@
       </p:sp>
       <p:sp>
         <p:nvSpPr>
-          <p:cNvPr id="44" name="Text 42"/>
-          <p:cNvSpPr/>
-          <p:nvPr/>
-        </p:nvSpPr>
-        <p:spPr>
-          <a:xfrm>
-            <a:off x="3403397" y="4169664"/>
-            <a:ext cx="676656" cy="475488"/>
+          <p:cNvPr id="47" name="Text 45"/>
+          <p:cNvSpPr/>
+          <p:nvPr/>
+        </p:nvSpPr>
+        <p:spPr>
+          <a:xfrm>
+            <a:off x="3639312" y="4169664"/>
+            <a:ext cx="685800" cy="475488"/>
           </a:xfrm>
           <a:prstGeom prst="rect">
             <a:avLst/>
@@ -22018,7 +22871,7 @@
                 <a:ea typeface="Trebuchet MS" pitchFamily="34" charset="-122"/>
                 <a:cs typeface="Trebuchet MS" pitchFamily="34" charset="-120"/>
               </a:rPr>
-              <a:t>ee</a:t>
+              <a:t>th</a:t>
             </a:r>
             <a:endParaRPr lang="en-US" sz="900" dirty="0"/>
           </a:p>
@@ -22026,14 +22879,14 @@
       </p:sp>
       <p:sp>
         <p:nvSpPr>
-          <p:cNvPr id="45" name="Shape 43"/>
-          <p:cNvSpPr/>
-          <p:nvPr/>
-        </p:nvSpPr>
-        <p:spPr>
-          <a:xfrm>
-            <a:off x="4129430" y="4169664"/>
-            <a:ext cx="676656" cy="475488"/>
+          <p:cNvPr id="48" name="Shape 46"/>
+          <p:cNvSpPr/>
+          <p:nvPr/>
+        </p:nvSpPr>
+        <p:spPr>
+          <a:xfrm>
+            <a:off x="4447032" y="4169664"/>
+            <a:ext cx="685800" cy="475488"/>
           </a:xfrm>
           <a:prstGeom prst="rect">
             <a:avLst>
@@ -22053,14 +22906,14 @@
       </p:sp>
       <p:sp>
         <p:nvSpPr>
-          <p:cNvPr id="46" name="Text 44"/>
-          <p:cNvSpPr/>
-          <p:nvPr/>
-        </p:nvSpPr>
-        <p:spPr>
-          <a:xfrm>
-            <a:off x="4129430" y="4169664"/>
-            <a:ext cx="676656" cy="475488"/>
+          <p:cNvPr id="49" name="Text 47"/>
+          <p:cNvSpPr/>
+          <p:nvPr/>
+        </p:nvSpPr>
+        <p:spPr>
+          <a:xfrm>
+            <a:off x="4447032" y="4169664"/>
+            <a:ext cx="685800" cy="475488"/>
           </a:xfrm>
           <a:prstGeom prst="rect">
             <a:avLst/>
@@ -22084,7 +22937,7 @@
                 <a:ea typeface="Trebuchet MS" pitchFamily="34" charset="-122"/>
                 <a:cs typeface="Trebuchet MS" pitchFamily="34" charset="-120"/>
               </a:rPr>
-              <a:t>th</a:t>
+              <a:t>i</a:t>
             </a:r>
             <a:endParaRPr lang="en-US" sz="900" dirty="0"/>
           </a:p>
@@ -22092,14 +22945,14 @@
       </p:sp>
       <p:sp>
         <p:nvSpPr>
-          <p:cNvPr id="47" name="Shape 45"/>
-          <p:cNvSpPr/>
-          <p:nvPr/>
-        </p:nvSpPr>
-        <p:spPr>
-          <a:xfrm>
-            <a:off x="4855464" y="4169664"/>
-            <a:ext cx="676656" cy="475488"/>
+          <p:cNvPr id="50" name="Shape 48"/>
+          <p:cNvSpPr/>
+          <p:nvPr/>
+        </p:nvSpPr>
+        <p:spPr>
+          <a:xfrm>
+            <a:off x="5254752" y="4169664"/>
+            <a:ext cx="685800" cy="475488"/>
           </a:xfrm>
           <a:prstGeom prst="rect">
             <a:avLst>
@@ -22119,14 +22972,14 @@
       </p:sp>
       <p:sp>
         <p:nvSpPr>
-          <p:cNvPr id="48" name="Text 46"/>
-          <p:cNvSpPr/>
-          <p:nvPr/>
-        </p:nvSpPr>
-        <p:spPr>
-          <a:xfrm>
-            <a:off x="4855464" y="4169664"/>
-            <a:ext cx="676656" cy="475488"/>
+          <p:cNvPr id="51" name="Text 49"/>
+          <p:cNvSpPr/>
+          <p:nvPr/>
+        </p:nvSpPr>
+        <p:spPr>
+          <a:xfrm>
+            <a:off x="5254752" y="4169664"/>
+            <a:ext cx="685800" cy="475488"/>
           </a:xfrm>
           <a:prstGeom prst="rect">
             <a:avLst/>
@@ -22150,7 +23003,7 @@
                 <a:ea typeface="Trebuchet MS" pitchFamily="34" charset="-122"/>
                 <a:cs typeface="Trebuchet MS" pitchFamily="34" charset="-120"/>
               </a:rPr>
-              <a:t>i</a:t>
+              <a:t>nk</a:t>
             </a:r>
             <a:endParaRPr lang="en-US" sz="900" dirty="0"/>
           </a:p>
@@ -22158,14 +23011,14 @@
       </p:sp>
       <p:sp>
         <p:nvSpPr>
-          <p:cNvPr id="49" name="Shape 47"/>
-          <p:cNvSpPr/>
-          <p:nvPr/>
-        </p:nvSpPr>
-        <p:spPr>
-          <a:xfrm>
-            <a:off x="5581498" y="4169664"/>
-            <a:ext cx="676656" cy="475488"/>
+          <p:cNvPr id="52" name="Shape 50"/>
+          <p:cNvSpPr/>
+          <p:nvPr/>
+        </p:nvSpPr>
+        <p:spPr>
+          <a:xfrm>
+            <a:off x="6062472" y="4169664"/>
+            <a:ext cx="685800" cy="475488"/>
           </a:xfrm>
           <a:prstGeom prst="rect">
             <a:avLst>
@@ -22185,14 +23038,14 @@
       </p:sp>
       <p:sp>
         <p:nvSpPr>
-          <p:cNvPr id="50" name="Text 48"/>
-          <p:cNvSpPr/>
-          <p:nvPr/>
-        </p:nvSpPr>
-        <p:spPr>
-          <a:xfrm>
-            <a:off x="5581498" y="4169664"/>
-            <a:ext cx="676656" cy="475488"/>
+          <p:cNvPr id="53" name="Text 51"/>
+          <p:cNvSpPr/>
+          <p:nvPr/>
+        </p:nvSpPr>
+        <p:spPr>
+          <a:xfrm>
+            <a:off x="6062472" y="4169664"/>
+            <a:ext cx="685800" cy="475488"/>
           </a:xfrm>
           <a:prstGeom prst="rect">
             <a:avLst/>
@@ -22216,7 +23069,7 @@
                 <a:ea typeface="Trebuchet MS" pitchFamily="34" charset="-122"/>
                 <a:cs typeface="Trebuchet MS" pitchFamily="34" charset="-120"/>
               </a:rPr>
-              <a:t>n</a:t>
+              <a:t>a</a:t>
             </a:r>
             <a:endParaRPr lang="en-US" sz="900" dirty="0"/>
           </a:p>
@@ -22224,14 +23077,14 @@
       </p:sp>
       <p:sp>
         <p:nvSpPr>
-          <p:cNvPr id="51" name="Shape 49"/>
-          <p:cNvSpPr/>
-          <p:nvPr/>
-        </p:nvSpPr>
-        <p:spPr>
-          <a:xfrm>
-            <a:off x="6307531" y="4169664"/>
-            <a:ext cx="676656" cy="475488"/>
+          <p:cNvPr id="54" name="Shape 52"/>
+          <p:cNvSpPr/>
+          <p:nvPr/>
+        </p:nvSpPr>
+        <p:spPr>
+          <a:xfrm>
+            <a:off x="6870192" y="4169664"/>
+            <a:ext cx="685800" cy="475488"/>
           </a:xfrm>
           <a:prstGeom prst="rect">
             <a:avLst>
@@ -22251,14 +23104,14 @@
       </p:sp>
       <p:sp>
         <p:nvSpPr>
-          <p:cNvPr id="52" name="Text 50"/>
-          <p:cNvSpPr/>
-          <p:nvPr/>
-        </p:nvSpPr>
-        <p:spPr>
-          <a:xfrm>
-            <a:off x="6307531" y="4169664"/>
-            <a:ext cx="676656" cy="475488"/>
+          <p:cNvPr id="55" name="Text 53"/>
+          <p:cNvSpPr/>
+          <p:nvPr/>
+        </p:nvSpPr>
+        <p:spPr>
+          <a:xfrm>
+            <a:off x="6870192" y="4169664"/>
+            <a:ext cx="685800" cy="475488"/>
           </a:xfrm>
           <a:prstGeom prst="rect">
             <a:avLst/>
@@ -22282,7 +23135,7 @@
                 <a:ea typeface="Trebuchet MS" pitchFamily="34" charset="-122"/>
                 <a:cs typeface="Trebuchet MS" pitchFamily="34" charset="-120"/>
               </a:rPr>
-              <a:t>k</a:t>
+              <a:t>b</a:t>
             </a:r>
             <a:endParaRPr lang="en-US" sz="900" dirty="0"/>
           </a:p>
@@ -22290,14 +23143,14 @@
       </p:sp>
       <p:sp>
         <p:nvSpPr>
-          <p:cNvPr id="53" name="Shape 51"/>
-          <p:cNvSpPr/>
-          <p:nvPr/>
-        </p:nvSpPr>
-        <p:spPr>
-          <a:xfrm>
-            <a:off x="7033565" y="4169664"/>
-            <a:ext cx="676656" cy="475488"/>
+          <p:cNvPr id="56" name="Shape 54"/>
+          <p:cNvSpPr/>
+          <p:nvPr/>
+        </p:nvSpPr>
+        <p:spPr>
+          <a:xfrm>
+            <a:off x="7677912" y="4169664"/>
+            <a:ext cx="685800" cy="475488"/>
           </a:xfrm>
           <a:prstGeom prst="rect">
             <a:avLst>
@@ -22317,14 +23170,14 @@
       </p:sp>
       <p:sp>
         <p:nvSpPr>
-          <p:cNvPr id="54" name="Text 52"/>
-          <p:cNvSpPr/>
-          <p:nvPr/>
-        </p:nvSpPr>
-        <p:spPr>
-          <a:xfrm>
-            <a:off x="7033565" y="4169664"/>
-            <a:ext cx="676656" cy="475488"/>
+          <p:cNvPr id="57" name="Text 55"/>
+          <p:cNvSpPr/>
+          <p:nvPr/>
+        </p:nvSpPr>
+        <p:spPr>
+          <a:xfrm>
+            <a:off x="7677912" y="4169664"/>
+            <a:ext cx="685800" cy="475488"/>
           </a:xfrm>
           <a:prstGeom prst="rect">
             <a:avLst/>
@@ -22348,73 +23201,7 @@
                 <a:ea typeface="Trebuchet MS" pitchFamily="34" charset="-122"/>
                 <a:cs typeface="Trebuchet MS" pitchFamily="34" charset="-120"/>
               </a:rPr>
-              <a:t>i</a:t>
-            </a:r>
-            <a:endParaRPr lang="en-US" sz="900" dirty="0"/>
-          </a:p>
-        </p:txBody>
-      </p:sp>
-      <p:sp>
-        <p:nvSpPr>
-          <p:cNvPr id="55" name="Shape 53"/>
-          <p:cNvSpPr/>
-          <p:nvPr/>
-        </p:nvSpPr>
-        <p:spPr>
-          <a:xfrm>
-            <a:off x="7759598" y="4169664"/>
-            <a:ext cx="676656" cy="475488"/>
-          </a:xfrm>
-          <a:prstGeom prst="rect">
-            <a:avLst>
-              <a:gd name="adj" fmla="val 7692"/>
-            </a:avLst>
-          </a:prstGeom>
-          <a:solidFill>
-            <a:srgbClr val="FFFFFF"/>
-          </a:solidFill>
-          <a:ln w="12700">
-            <a:solidFill>
-              <a:srgbClr val="DB2777"/>
-            </a:solidFill>
-            <a:prstDash val="solid"/>
-          </a:ln>
-        </p:spPr>
-      </p:sp>
-      <p:sp>
-        <p:nvSpPr>
-          <p:cNvPr id="56" name="Text 54"/>
-          <p:cNvSpPr/>
-          <p:nvPr/>
-        </p:nvSpPr>
-        <p:spPr>
-          <a:xfrm>
-            <a:off x="7759598" y="4169664"/>
-            <a:ext cx="676656" cy="475488"/>
-          </a:xfrm>
-          <a:prstGeom prst="rect">
-            <a:avLst/>
-          </a:prstGeom>
-          <a:noFill/>
-          <a:ln/>
-        </p:spPr>
-        <p:txBody>
-          <a:bodyPr wrap="square" lIns="0" tIns="0" rIns="0" bIns="0" rtlCol="0" anchor="ctr"/>
-          <a:lstStyle/>
-          <a:p>
-            <a:pPr algn="ctr" indent="0" marL="0">
-              <a:buNone/>
-            </a:pPr>
-            <a:r>
-              <a:rPr lang="en-US" sz="900" b="1" dirty="0">
-                <a:solidFill>
-                  <a:srgbClr val="9D174D"/>
-                </a:solidFill>
-                <a:latin typeface="Trebuchet MS" pitchFamily="34" charset="0"/>
-                <a:ea typeface="Trebuchet MS" pitchFamily="34" charset="-122"/>
-                <a:cs typeface="Trebuchet MS" pitchFamily="34" charset="-120"/>
-              </a:rPr>
-              <a:t>ng</a:t>
+              <a:t>le</a:t>
             </a:r>
             <a:endParaRPr lang="en-US" sz="900" dirty="0"/>
           </a:p>
@@ -22845,7 +23632,7 @@
                 <a:ea typeface="Trebuchet MS" pitchFamily="34" charset="-122"/>
                 <a:cs typeface="Trebuchet MS" pitchFamily="34" charset="-120"/>
               </a:rPr>
-              <a:t>overthink</a:t>
+              <a:t>thinker</a:t>
             </a:r>
             <a:endParaRPr lang="en-US" sz="2800" dirty="0"/>
           </a:p>
@@ -23672,7 +24459,7 @@
                 <a:ea typeface="Trebuchet MS" pitchFamily="34" charset="-122"/>
                 <a:cs typeface="Trebuchet MS" pitchFamily="34" charset="-120"/>
               </a:rPr>
-              <a:t>overthink</a:t>
+              <a:t>thinker</a:t>
             </a:r>
             <a:endParaRPr lang="en-US" sz="2800" dirty="0"/>
           </a:p>
@@ -23761,11 +24548,11 @@
             </a:avLst>
           </a:prstGeom>
           <a:solidFill>
-            <a:srgbClr val="DDD6FE"/>
+            <a:srgbClr val="CCFBF1"/>
           </a:solidFill>
           <a:ln w="19050">
             <a:solidFill>
-              <a:srgbClr val="7C3AED"/>
+              <a:srgbClr val="0D9488"/>
             </a:solidFill>
             <a:prstDash val="solid"/>
           </a:ln>
@@ -23805,13 +24592,13 @@
             <a:r>
               <a:rPr lang="en-US" sz="1300" b="1" dirty="0">
                 <a:solidFill>
-                  <a:srgbClr val="4C1D95"/>
+                  <a:srgbClr val="0F766E"/>
                 </a:solidFill>
                 <a:latin typeface="Trebuchet MS" pitchFamily="34" charset="0"/>
                 <a:ea typeface="Trebuchet MS" pitchFamily="34" charset="-122"/>
                 <a:cs typeface="Trebuchet MS" pitchFamily="34" charset="-120"/>
               </a:rPr>
-              <a:t>over</a:t>
+              <a:t>think</a:t>
             </a:r>
             <a:endParaRPr lang="en-US" sz="1300" dirty="0"/>
           </a:p>
@@ -23850,7 +24637,7 @@
                 <a:ea typeface="Calibri" pitchFamily="34" charset="-122"/>
                 <a:cs typeface="Calibri" pitchFamily="34" charset="-120"/>
               </a:rPr>
-              <a:t>too much</a:t>
+              <a:t>to use the mind</a:t>
             </a:r>
             <a:endParaRPr lang="en-US" sz="850" dirty="0"/>
           </a:p>
@@ -23873,11 +24660,11 @@
             </a:avLst>
           </a:prstGeom>
           <a:solidFill>
-            <a:srgbClr val="CCFBF1"/>
+            <a:srgbClr val="FCE7F3"/>
           </a:solidFill>
           <a:ln w="19050">
             <a:solidFill>
-              <a:srgbClr val="0D9488"/>
+              <a:srgbClr val="DB2777"/>
             </a:solidFill>
             <a:prstDash val="solid"/>
           </a:ln>
@@ -23917,13 +24704,13 @@
             <a:r>
               <a:rPr lang="en-US" sz="1300" b="1" dirty="0">
                 <a:solidFill>
-                  <a:srgbClr val="0F766E"/>
+                  <a:srgbClr val="9D174D"/>
                 </a:solidFill>
                 <a:latin typeface="Trebuchet MS" pitchFamily="34" charset="0"/>
                 <a:ea typeface="Trebuchet MS" pitchFamily="34" charset="-122"/>
                 <a:cs typeface="Trebuchet MS" pitchFamily="34" charset="-120"/>
               </a:rPr>
-              <a:t>think</a:t>
+              <a:t>er</a:t>
             </a:r>
             <a:endParaRPr lang="en-US" sz="1300" dirty="0"/>
           </a:p>
@@ -23962,7 +24749,7 @@
                 <a:ea typeface="Calibri" pitchFamily="34" charset="-122"/>
                 <a:cs typeface="Calibri" pitchFamily="34" charset="-120"/>
               </a:rPr>
-              <a:t>to use the mind</a:t>
+              <a:t>a person who does something</a:t>
             </a:r>
             <a:endParaRPr lang="en-US" sz="850" dirty="0"/>
           </a:p>
@@ -25376,7 +26163,7 @@
                 <a:ea typeface="Trebuchet MS" pitchFamily="34" charset="-122"/>
                 <a:cs typeface="Trebuchet MS" pitchFamily="34" charset="-120"/>
               </a:rPr>
-              <a:t>overthink</a:t>
+              <a:t>thinker</a:t>
             </a:r>
             <a:endParaRPr lang="en-US" sz="2800" dirty="0"/>
           </a:p>
@@ -25465,11 +26252,11 @@
             </a:avLst>
           </a:prstGeom>
           <a:solidFill>
-            <a:srgbClr val="DDD6FE"/>
+            <a:srgbClr val="CCFBF1"/>
           </a:solidFill>
           <a:ln w="19050">
             <a:solidFill>
-              <a:srgbClr val="7C3AED"/>
+              <a:srgbClr val="0D9488"/>
             </a:solidFill>
             <a:prstDash val="solid"/>
           </a:ln>
@@ -25509,13 +26296,13 @@
             <a:r>
               <a:rPr lang="en-US" sz="1300" b="1" dirty="0">
                 <a:solidFill>
-                  <a:srgbClr val="4C1D95"/>
+                  <a:srgbClr val="0F766E"/>
                 </a:solidFill>
                 <a:latin typeface="Trebuchet MS" pitchFamily="34" charset="0"/>
                 <a:ea typeface="Trebuchet MS" pitchFamily="34" charset="-122"/>
                 <a:cs typeface="Trebuchet MS" pitchFamily="34" charset="-120"/>
               </a:rPr>
-              <a:t>over</a:t>
+              <a:t>think</a:t>
             </a:r>
             <a:endParaRPr lang="en-US" sz="1300" dirty="0"/>
           </a:p>
@@ -25554,7 +26341,7 @@
                 <a:ea typeface="Calibri" pitchFamily="34" charset="-122"/>
                 <a:cs typeface="Calibri" pitchFamily="34" charset="-120"/>
               </a:rPr>
-              <a:t>too much</a:t>
+              <a:t>to use the mind</a:t>
             </a:r>
             <a:endParaRPr lang="en-US" sz="850" dirty="0"/>
           </a:p>
@@ -25577,11 +26364,11 @@
             </a:avLst>
           </a:prstGeom>
           <a:solidFill>
-            <a:srgbClr val="CCFBF1"/>
+            <a:srgbClr val="FCE7F3"/>
           </a:solidFill>
           <a:ln w="19050">
             <a:solidFill>
-              <a:srgbClr val="0D9488"/>
+              <a:srgbClr val="DB2777"/>
             </a:solidFill>
             <a:prstDash val="solid"/>
           </a:ln>
@@ -25621,13 +26408,13 @@
             <a:r>
               <a:rPr lang="en-US" sz="1300" b="1" dirty="0">
                 <a:solidFill>
-                  <a:srgbClr val="0F766E"/>
+                  <a:srgbClr val="9D174D"/>
                 </a:solidFill>
                 <a:latin typeface="Trebuchet MS" pitchFamily="34" charset="0"/>
                 <a:ea typeface="Trebuchet MS" pitchFamily="34" charset="-122"/>
                 <a:cs typeface="Trebuchet MS" pitchFamily="34" charset="-120"/>
               </a:rPr>
-              <a:t>think</a:t>
+              <a:t>er</a:t>
             </a:r>
             <a:endParaRPr lang="en-US" sz="1300" dirty="0"/>
           </a:p>
@@ -25666,7 +26453,7 @@
                 <a:ea typeface="Calibri" pitchFamily="34" charset="-122"/>
                 <a:cs typeface="Calibri" pitchFamily="34" charset="-120"/>
               </a:rPr>
-              <a:t>to use the mind</a:t>
+              <a:t>a person who does something</a:t>
             </a:r>
             <a:endParaRPr lang="en-US" sz="850" dirty="0"/>
           </a:p>
@@ -25773,7 +26560,7 @@
         </p:nvSpPr>
         <p:spPr>
           <a:xfrm>
-            <a:off x="2313432" y="3364992"/>
+            <a:off x="2999232" y="3364992"/>
             <a:ext cx="1645920" cy="475488"/>
           </a:xfrm>
           <a:prstGeom prst="rect">
@@ -25800,7 +26587,7 @@
         </p:nvSpPr>
         <p:spPr>
           <a:xfrm>
-            <a:off x="2313432" y="3364992"/>
+            <a:off x="2999232" y="3364992"/>
             <a:ext cx="1645920" cy="475488"/>
           </a:xfrm>
           <a:prstGeom prst="rect">
@@ -25825,7 +26612,7 @@
                 <a:ea typeface="Trebuchet MS" pitchFamily="34" charset="-122"/>
                 <a:cs typeface="Trebuchet MS" pitchFamily="34" charset="-120"/>
               </a:rPr>
-              <a:t>o</a:t>
+              <a:t>think</a:t>
             </a:r>
             <a:endParaRPr lang="en-US" sz="1400" dirty="0"/>
           </a:p>
@@ -25839,8 +26626,8 @@
         </p:nvSpPr>
         <p:spPr>
           <a:xfrm>
-            <a:off x="3959352" y="3364992"/>
-            <a:ext cx="411480" cy="475488"/>
+            <a:off x="4645152" y="3364992"/>
+            <a:ext cx="1097280" cy="475488"/>
           </a:xfrm>
           <a:prstGeom prst="rect">
             <a:avLst/>
@@ -25878,7 +26665,7 @@
         </p:nvSpPr>
         <p:spPr>
           <a:xfrm>
-            <a:off x="4370832" y="3364992"/>
+            <a:off x="5742432" y="3364992"/>
             <a:ext cx="1645920" cy="475488"/>
           </a:xfrm>
           <a:prstGeom prst="rect">
@@ -25905,7 +26692,7 @@
         </p:nvSpPr>
         <p:spPr>
           <a:xfrm>
-            <a:off x="4370832" y="3364992"/>
+            <a:off x="5742432" y="3364992"/>
             <a:ext cx="1645920" cy="475488"/>
           </a:xfrm>
           <a:prstGeom prst="rect">
@@ -25930,7 +26717,7 @@
                 <a:ea typeface="Trebuchet MS" pitchFamily="34" charset="-122"/>
                 <a:cs typeface="Trebuchet MS" pitchFamily="34" charset="-120"/>
               </a:rPr>
-              <a:t>ver</a:t>
+              <a:t>er</a:t>
             </a:r>
             <a:endParaRPr lang="en-US" sz="1400" dirty="0"/>
           </a:p>
@@ -25938,119 +26725,80 @@
       </p:sp>
       <p:sp>
         <p:nvSpPr>
-          <p:cNvPr id="30" name="Text 28"/>
-          <p:cNvSpPr/>
-          <p:nvPr/>
-        </p:nvSpPr>
-        <p:spPr>
-          <a:xfrm>
-            <a:off x="6016752" y="3364992"/>
-            <a:ext cx="411480" cy="475488"/>
-          </a:xfrm>
-          <a:prstGeom prst="rect">
-            <a:avLst/>
-          </a:prstGeom>
-          <a:noFill/>
-          <a:ln/>
-        </p:spPr>
-        <p:txBody>
-          <a:bodyPr wrap="square" lIns="0" tIns="0" rIns="0" bIns="0" rtlCol="0" anchor="ctr"/>
-          <a:lstStyle/>
-          <a:p>
-            <a:pPr algn="ctr" indent="0" marL="0">
-              <a:buNone/>
-            </a:pPr>
-            <a:r>
-              <a:rPr lang="en-US" sz="1600" b="1" dirty="0">
-                <a:solidFill>
-                  <a:srgbClr val="0D9488"/>
+          <p:cNvPr id="30" name="Shape 28"/>
+          <p:cNvSpPr/>
+          <p:nvPr/>
+        </p:nvSpPr>
+        <p:spPr>
+          <a:xfrm>
+            <a:off x="365760" y="4096512"/>
+            <a:ext cx="1371600" cy="804672"/>
+          </a:xfrm>
+          <a:prstGeom prst="rect">
+            <a:avLst>
+              <a:gd name="adj" fmla="val 6818"/>
+            </a:avLst>
+          </a:prstGeom>
+          <a:solidFill>
+            <a:srgbClr val="E2E8F0"/>
+          </a:solidFill>
+          <a:ln w="12700">
+            <a:solidFill>
+              <a:srgbClr val="E2E8F0"/>
+            </a:solidFill>
+            <a:prstDash val="solid"/>
+          </a:ln>
+        </p:spPr>
+      </p:sp>
+      <p:sp>
+        <p:nvSpPr>
+          <p:cNvPr id="31" name="Text 29"/>
+          <p:cNvSpPr/>
+          <p:nvPr/>
+        </p:nvSpPr>
+        <p:spPr>
+          <a:xfrm>
+            <a:off x="365760" y="4096512"/>
+            <a:ext cx="1371600" cy="804672"/>
+          </a:xfrm>
+          <a:prstGeom prst="rect">
+            <a:avLst/>
+          </a:prstGeom>
+          <a:noFill/>
+          <a:ln/>
+        </p:spPr>
+        <p:txBody>
+          <a:bodyPr wrap="square" lIns="0" tIns="0" rIns="0" bIns="0" rtlCol="0" anchor="ctr"/>
+          <a:lstStyle/>
+          <a:p>
+            <a:pPr algn="ctr" indent="0" marL="0">
+              <a:buNone/>
+            </a:pPr>
+            <a:r>
+              <a:rPr lang="en-US" sz="1100" b="1" dirty="0">
+                <a:solidFill>
+                  <a:srgbClr val="475569"/>
                 </a:solidFill>
                 <a:latin typeface="Trebuchet MS" pitchFamily="34" charset="0"/>
                 <a:ea typeface="Trebuchet MS" pitchFamily="34" charset="-122"/>
                 <a:cs typeface="Trebuchet MS" pitchFamily="34" charset="-120"/>
               </a:rPr>
-              <a:t>·</a:t>
-            </a:r>
-            <a:endParaRPr lang="en-US" sz="1600" dirty="0"/>
-          </a:p>
-        </p:txBody>
-      </p:sp>
-      <p:sp>
-        <p:nvSpPr>
-          <p:cNvPr id="31" name="Shape 29"/>
-          <p:cNvSpPr/>
-          <p:nvPr/>
-        </p:nvSpPr>
-        <p:spPr>
-          <a:xfrm>
-            <a:off x="6428232" y="3364992"/>
-            <a:ext cx="1645920" cy="475488"/>
-          </a:xfrm>
-          <a:prstGeom prst="rect">
-            <a:avLst>
-              <a:gd name="adj" fmla="val 9615"/>
-            </a:avLst>
-          </a:prstGeom>
-          <a:solidFill>
-            <a:srgbClr val="FFFFFF"/>
-          </a:solidFill>
-          <a:ln w="12700">
-            <a:solidFill>
-              <a:srgbClr val="0D9488"/>
-            </a:solidFill>
-            <a:prstDash val="solid"/>
-          </a:ln>
-        </p:spPr>
-      </p:sp>
-      <p:sp>
-        <p:nvSpPr>
-          <p:cNvPr id="32" name="Text 30"/>
-          <p:cNvSpPr/>
-          <p:nvPr/>
-        </p:nvSpPr>
-        <p:spPr>
-          <a:xfrm>
-            <a:off x="6428232" y="3364992"/>
-            <a:ext cx="1645920" cy="475488"/>
-          </a:xfrm>
-          <a:prstGeom prst="rect">
-            <a:avLst/>
-          </a:prstGeom>
-          <a:noFill/>
-          <a:ln/>
-        </p:spPr>
-        <p:txBody>
-          <a:bodyPr wrap="square" lIns="0" tIns="0" rIns="0" bIns="0" rtlCol="0" anchor="ctr"/>
-          <a:lstStyle/>
-          <a:p>
-            <a:pPr algn="ctr" indent="0" marL="0">
-              <a:buNone/>
-            </a:pPr>
-            <a:r>
-              <a:rPr lang="en-US" sz="1400" b="1" dirty="0">
-                <a:solidFill>
-                  <a:srgbClr val="0D9488"/>
-                </a:solidFill>
-                <a:latin typeface="Trebuchet MS" pitchFamily="34" charset="0"/>
-                <a:ea typeface="Trebuchet MS" pitchFamily="34" charset="-122"/>
-                <a:cs typeface="Trebuchet MS" pitchFamily="34" charset="-120"/>
-              </a:rPr>
-              <a:t>think</a:t>
-            </a:r>
-            <a:endParaRPr lang="en-US" sz="1400" dirty="0"/>
-          </a:p>
-        </p:txBody>
-      </p:sp>
-      <p:sp>
-        <p:nvSpPr>
-          <p:cNvPr id="33" name="Shape 31"/>
-          <p:cNvSpPr/>
-          <p:nvPr/>
-        </p:nvSpPr>
-        <p:spPr>
-          <a:xfrm>
-            <a:off x="365760" y="4096512"/>
-            <a:ext cx="1371600" cy="804672"/>
+              <a:t>Phonemes</a:t>
+            </a:r>
+            <a:endParaRPr lang="en-US" sz="1100" dirty="0"/>
+          </a:p>
+        </p:txBody>
+      </p:sp>
+      <p:sp>
+        <p:nvSpPr>
+          <p:cNvPr id="32" name="Shape 30"/>
+          <p:cNvSpPr/>
+          <p:nvPr/>
+        </p:nvSpPr>
+        <p:spPr>
+          <a:xfrm>
+            <a:off x="1874520" y="4096512"/>
+            <a:ext cx="6903720" cy="804672"/>
           </a:xfrm>
           <a:prstGeom prst="rect">
             <a:avLst>
@@ -26058,85 +26806,19 @@
             </a:avLst>
           </a:prstGeom>
           <a:solidFill>
-            <a:srgbClr val="E2E8F0"/>
+            <a:srgbClr val="F8FAFC"/>
           </a:solidFill>
           <a:ln w="12700">
             <a:solidFill>
               <a:srgbClr val="E2E8F0"/>
             </a:solidFill>
-            <a:prstDash val="solid"/>
-          </a:ln>
-        </p:spPr>
-      </p:sp>
-      <p:sp>
-        <p:nvSpPr>
-          <p:cNvPr id="34" name="Text 32"/>
-          <p:cNvSpPr/>
-          <p:nvPr/>
-        </p:nvSpPr>
-        <p:spPr>
-          <a:xfrm>
-            <a:off x="365760" y="4096512"/>
-            <a:ext cx="1371600" cy="804672"/>
-          </a:xfrm>
-          <a:prstGeom prst="rect">
-            <a:avLst/>
-          </a:prstGeom>
-          <a:noFill/>
-          <a:ln/>
-        </p:spPr>
-        <p:txBody>
-          <a:bodyPr wrap="square" lIns="0" tIns="0" rIns="0" bIns="0" rtlCol="0" anchor="ctr"/>
-          <a:lstStyle/>
-          <a:p>
-            <a:pPr algn="ctr" indent="0" marL="0">
-              <a:buNone/>
-            </a:pPr>
-            <a:r>
-              <a:rPr lang="en-US" sz="1100" b="1" dirty="0">
-                <a:solidFill>
-                  <a:srgbClr val="475569"/>
-                </a:solidFill>
-                <a:latin typeface="Trebuchet MS" pitchFamily="34" charset="0"/>
-                <a:ea typeface="Trebuchet MS" pitchFamily="34" charset="-122"/>
-                <a:cs typeface="Trebuchet MS" pitchFamily="34" charset="-120"/>
-              </a:rPr>
-              <a:t>Phonemes</a:t>
-            </a:r>
-            <a:endParaRPr lang="en-US" sz="1100" dirty="0"/>
-          </a:p>
-        </p:txBody>
-      </p:sp>
-      <p:sp>
-        <p:nvSpPr>
-          <p:cNvPr id="35" name="Shape 33"/>
-          <p:cNvSpPr/>
-          <p:nvPr/>
-        </p:nvSpPr>
-        <p:spPr>
-          <a:xfrm>
-            <a:off x="1874520" y="4096512"/>
-            <a:ext cx="6903720" cy="804672"/>
-          </a:xfrm>
-          <a:prstGeom prst="rect">
-            <a:avLst>
-              <a:gd name="adj" fmla="val 6818"/>
-            </a:avLst>
-          </a:prstGeom>
-          <a:solidFill>
-            <a:srgbClr val="F8FAFC"/>
-          </a:solidFill>
-          <a:ln w="12700">
-            <a:solidFill>
-              <a:srgbClr val="E2E8F0"/>
-            </a:solidFill>
             <a:prstDash val="dash"/>
           </a:ln>
         </p:spPr>
       </p:sp>
       <p:sp>
         <p:nvSpPr>
-          <p:cNvPr id="36" name="Text 34"/>
+          <p:cNvPr id="33" name="Text 31"/>
           <p:cNvSpPr/>
           <p:nvPr/>
         </p:nvSpPr>
@@ -26598,7 +27280,7 @@
                 <a:ea typeface="Trebuchet MS" pitchFamily="34" charset="-122"/>
                 <a:cs typeface="Trebuchet MS" pitchFamily="34" charset="-120"/>
               </a:rPr>
-              <a:t>overthink</a:t>
+              <a:t>thinker</a:t>
             </a:r>
             <a:endParaRPr lang="en-US" sz="2800" dirty="0"/>
           </a:p>
@@ -26687,11 +27369,11 @@
             </a:avLst>
           </a:prstGeom>
           <a:solidFill>
-            <a:srgbClr val="DDD6FE"/>
+            <a:srgbClr val="CCFBF1"/>
           </a:solidFill>
           <a:ln w="19050">
             <a:solidFill>
-              <a:srgbClr val="7C3AED"/>
+              <a:srgbClr val="0D9488"/>
             </a:solidFill>
             <a:prstDash val="solid"/>
           </a:ln>
@@ -26731,13 +27413,13 @@
             <a:r>
               <a:rPr lang="en-US" sz="1300" b="1" dirty="0">
                 <a:solidFill>
-                  <a:srgbClr val="4C1D95"/>
+                  <a:srgbClr val="0F766E"/>
                 </a:solidFill>
                 <a:latin typeface="Trebuchet MS" pitchFamily="34" charset="0"/>
                 <a:ea typeface="Trebuchet MS" pitchFamily="34" charset="-122"/>
                 <a:cs typeface="Trebuchet MS" pitchFamily="34" charset="-120"/>
               </a:rPr>
-              <a:t>over</a:t>
+              <a:t>think</a:t>
             </a:r>
             <a:endParaRPr lang="en-US" sz="1300" dirty="0"/>
           </a:p>
@@ -26776,7 +27458,7 @@
                 <a:ea typeface="Calibri" pitchFamily="34" charset="-122"/>
                 <a:cs typeface="Calibri" pitchFamily="34" charset="-120"/>
               </a:rPr>
-              <a:t>too much</a:t>
+              <a:t>to use the mind</a:t>
             </a:r>
             <a:endParaRPr lang="en-US" sz="850" dirty="0"/>
           </a:p>
@@ -26799,11 +27481,11 @@
             </a:avLst>
           </a:prstGeom>
           <a:solidFill>
-            <a:srgbClr val="CCFBF1"/>
+            <a:srgbClr val="FCE7F3"/>
           </a:solidFill>
           <a:ln w="19050">
             <a:solidFill>
-              <a:srgbClr val="0D9488"/>
+              <a:srgbClr val="DB2777"/>
             </a:solidFill>
             <a:prstDash val="solid"/>
           </a:ln>
@@ -26843,13 +27525,13 @@
             <a:r>
               <a:rPr lang="en-US" sz="1300" b="1" dirty="0">
                 <a:solidFill>
-                  <a:srgbClr val="0F766E"/>
+                  <a:srgbClr val="9D174D"/>
                 </a:solidFill>
                 <a:latin typeface="Trebuchet MS" pitchFamily="34" charset="0"/>
                 <a:ea typeface="Trebuchet MS" pitchFamily="34" charset="-122"/>
                 <a:cs typeface="Trebuchet MS" pitchFamily="34" charset="-120"/>
               </a:rPr>
-              <a:t>think</a:t>
+              <a:t>er</a:t>
             </a:r>
             <a:endParaRPr lang="en-US" sz="1300" dirty="0"/>
           </a:p>
@@ -26888,7 +27570,7 @@
                 <a:ea typeface="Calibri" pitchFamily="34" charset="-122"/>
                 <a:cs typeface="Calibri" pitchFamily="34" charset="-120"/>
               </a:rPr>
-              <a:t>to use the mind</a:t>
+              <a:t>a person who does something</a:t>
             </a:r>
             <a:endParaRPr lang="en-US" sz="850" dirty="0"/>
           </a:p>
@@ -26995,7 +27677,7 @@
         </p:nvSpPr>
         <p:spPr>
           <a:xfrm>
-            <a:off x="2313432" y="3364992"/>
+            <a:off x="2999232" y="3364992"/>
             <a:ext cx="1645920" cy="475488"/>
           </a:xfrm>
           <a:prstGeom prst="rect">
@@ -27022,7 +27704,7 @@
         </p:nvSpPr>
         <p:spPr>
           <a:xfrm>
-            <a:off x="2313432" y="3364992"/>
+            <a:off x="2999232" y="3364992"/>
             <a:ext cx="1645920" cy="475488"/>
           </a:xfrm>
           <a:prstGeom prst="rect">
@@ -27047,7 +27729,7 @@
                 <a:ea typeface="Trebuchet MS" pitchFamily="34" charset="-122"/>
                 <a:cs typeface="Trebuchet MS" pitchFamily="34" charset="-120"/>
               </a:rPr>
-              <a:t>o</a:t>
+              <a:t>think</a:t>
             </a:r>
             <a:endParaRPr lang="en-US" sz="1400" dirty="0"/>
           </a:p>
@@ -27061,8 +27743,8 @@
         </p:nvSpPr>
         <p:spPr>
           <a:xfrm>
-            <a:off x="3959352" y="3364992"/>
-            <a:ext cx="411480" cy="475488"/>
+            <a:off x="4645152" y="3364992"/>
+            <a:ext cx="1097280" cy="475488"/>
           </a:xfrm>
           <a:prstGeom prst="rect">
             <a:avLst/>
@@ -27100,7 +27782,7 @@
         </p:nvSpPr>
         <p:spPr>
           <a:xfrm>
-            <a:off x="4370832" y="3364992"/>
+            <a:off x="5742432" y="3364992"/>
             <a:ext cx="1645920" cy="475488"/>
           </a:xfrm>
           <a:prstGeom prst="rect">
@@ -27127,7 +27809,7 @@
         </p:nvSpPr>
         <p:spPr>
           <a:xfrm>
-            <a:off x="4370832" y="3364992"/>
+            <a:off x="5742432" y="3364992"/>
             <a:ext cx="1645920" cy="475488"/>
           </a:xfrm>
           <a:prstGeom prst="rect">
@@ -27152,7 +27834,7 @@
                 <a:ea typeface="Trebuchet MS" pitchFamily="34" charset="-122"/>
                 <a:cs typeface="Trebuchet MS" pitchFamily="34" charset="-120"/>
               </a:rPr>
-              <a:t>ver</a:t>
+              <a:t>er</a:t>
             </a:r>
             <a:endParaRPr lang="en-US" sz="1400" dirty="0"/>
           </a:p>
@@ -27160,211 +27842,238 @@
       </p:sp>
       <p:sp>
         <p:nvSpPr>
-          <p:cNvPr id="30" name="Text 28"/>
-          <p:cNvSpPr/>
-          <p:nvPr/>
-        </p:nvSpPr>
-        <p:spPr>
-          <a:xfrm>
-            <a:off x="6016752" y="3364992"/>
-            <a:ext cx="411480" cy="475488"/>
-          </a:xfrm>
-          <a:prstGeom prst="rect">
-            <a:avLst/>
-          </a:prstGeom>
-          <a:noFill/>
-          <a:ln/>
-        </p:spPr>
-        <p:txBody>
-          <a:bodyPr wrap="square" lIns="0" tIns="0" rIns="0" bIns="0" rtlCol="0" anchor="ctr"/>
-          <a:lstStyle/>
-          <a:p>
-            <a:pPr algn="ctr" indent="0" marL="0">
-              <a:buNone/>
-            </a:pPr>
-            <a:r>
-              <a:rPr lang="en-US" sz="1600" b="1" dirty="0">
-                <a:solidFill>
-                  <a:srgbClr val="0D9488"/>
+          <p:cNvPr id="30" name="Shape 28"/>
+          <p:cNvSpPr/>
+          <p:nvPr/>
+        </p:nvSpPr>
+        <p:spPr>
+          <a:xfrm>
+            <a:off x="365760" y="4096512"/>
+            <a:ext cx="1371600" cy="804672"/>
+          </a:xfrm>
+          <a:prstGeom prst="rect">
+            <a:avLst>
+              <a:gd name="adj" fmla="val 6818"/>
+            </a:avLst>
+          </a:prstGeom>
+          <a:solidFill>
+            <a:srgbClr val="E2E8F0"/>
+          </a:solidFill>
+          <a:ln w="12700">
+            <a:solidFill>
+              <a:srgbClr val="E2E8F0"/>
+            </a:solidFill>
+            <a:prstDash val="solid"/>
+          </a:ln>
+        </p:spPr>
+      </p:sp>
+      <p:sp>
+        <p:nvSpPr>
+          <p:cNvPr id="31" name="Text 29"/>
+          <p:cNvSpPr/>
+          <p:nvPr/>
+        </p:nvSpPr>
+        <p:spPr>
+          <a:xfrm>
+            <a:off x="365760" y="4096512"/>
+            <a:ext cx="1371600" cy="804672"/>
+          </a:xfrm>
+          <a:prstGeom prst="rect">
+            <a:avLst/>
+          </a:prstGeom>
+          <a:noFill/>
+          <a:ln/>
+        </p:spPr>
+        <p:txBody>
+          <a:bodyPr wrap="square" lIns="0" tIns="0" rIns="0" bIns="0" rtlCol="0" anchor="ctr"/>
+          <a:lstStyle/>
+          <a:p>
+            <a:pPr algn="ctr" indent="0" marL="0">
+              <a:buNone/>
+            </a:pPr>
+            <a:r>
+              <a:rPr lang="en-US" sz="1100" b="1" dirty="0">
+                <a:solidFill>
+                  <a:srgbClr val="475569"/>
                 </a:solidFill>
                 <a:latin typeface="Trebuchet MS" pitchFamily="34" charset="0"/>
                 <a:ea typeface="Trebuchet MS" pitchFamily="34" charset="-122"/>
                 <a:cs typeface="Trebuchet MS" pitchFamily="34" charset="-120"/>
               </a:rPr>
-              <a:t>·</a:t>
-            </a:r>
-            <a:endParaRPr lang="en-US" sz="1600" dirty="0"/>
-          </a:p>
-        </p:txBody>
-      </p:sp>
-      <p:sp>
-        <p:nvSpPr>
-          <p:cNvPr id="31" name="Shape 29"/>
-          <p:cNvSpPr/>
-          <p:nvPr/>
-        </p:nvSpPr>
-        <p:spPr>
-          <a:xfrm>
-            <a:off x="6428232" y="3364992"/>
-            <a:ext cx="1645920" cy="475488"/>
+              <a:t>Phonemes</a:t>
+            </a:r>
+            <a:endParaRPr lang="en-US" sz="1100" dirty="0"/>
+          </a:p>
+        </p:txBody>
+      </p:sp>
+      <p:sp>
+        <p:nvSpPr>
+          <p:cNvPr id="32" name="Shape 30"/>
+          <p:cNvSpPr/>
+          <p:nvPr/>
+        </p:nvSpPr>
+        <p:spPr>
+          <a:xfrm>
+            <a:off x="1874520" y="4096512"/>
+            <a:ext cx="6903720" cy="658368"/>
           </a:xfrm>
           <a:prstGeom prst="rect">
             <a:avLst>
-              <a:gd name="adj" fmla="val 9615"/>
+              <a:gd name="adj" fmla="val 8333"/>
             </a:avLst>
           </a:prstGeom>
           <a:solidFill>
+            <a:srgbClr val="FCE7F3"/>
+          </a:solidFill>
+          <a:ln w="12700">
+            <a:solidFill>
+              <a:srgbClr val="DB2777"/>
+            </a:solidFill>
+            <a:prstDash val="solid"/>
+          </a:ln>
+        </p:spPr>
+      </p:sp>
+      <p:sp>
+        <p:nvSpPr>
+          <p:cNvPr id="33" name="Shape 31"/>
+          <p:cNvSpPr/>
+          <p:nvPr/>
+        </p:nvSpPr>
+        <p:spPr>
+          <a:xfrm>
+            <a:off x="2670048" y="4169664"/>
+            <a:ext cx="685800" cy="475488"/>
+          </a:xfrm>
+          <a:prstGeom prst="rect">
+            <a:avLst>
+              <a:gd name="adj" fmla="val 7692"/>
+            </a:avLst>
+          </a:prstGeom>
+          <a:solidFill>
             <a:srgbClr val="FFFFFF"/>
           </a:solidFill>
           <a:ln w="12700">
             <a:solidFill>
-              <a:srgbClr val="0D9488"/>
-            </a:solidFill>
-            <a:prstDash val="solid"/>
-          </a:ln>
-        </p:spPr>
-      </p:sp>
-      <p:sp>
-        <p:nvSpPr>
-          <p:cNvPr id="32" name="Text 30"/>
-          <p:cNvSpPr/>
-          <p:nvPr/>
-        </p:nvSpPr>
-        <p:spPr>
-          <a:xfrm>
-            <a:off x="6428232" y="3364992"/>
-            <a:ext cx="1645920" cy="475488"/>
-          </a:xfrm>
-          <a:prstGeom prst="rect">
-            <a:avLst/>
-          </a:prstGeom>
-          <a:noFill/>
-          <a:ln/>
-        </p:spPr>
-        <p:txBody>
-          <a:bodyPr wrap="square" lIns="0" tIns="0" rIns="0" bIns="0" rtlCol="0" anchor="ctr"/>
-          <a:lstStyle/>
-          <a:p>
-            <a:pPr algn="ctr" indent="0" marL="0">
-              <a:buNone/>
-            </a:pPr>
-            <a:r>
-              <a:rPr lang="en-US" sz="1400" b="1" dirty="0">
-                <a:solidFill>
-                  <a:srgbClr val="0D9488"/>
+              <a:srgbClr val="DB2777"/>
+            </a:solidFill>
+            <a:prstDash val="solid"/>
+          </a:ln>
+        </p:spPr>
+      </p:sp>
+      <p:sp>
+        <p:nvSpPr>
+          <p:cNvPr id="34" name="Text 32"/>
+          <p:cNvSpPr/>
+          <p:nvPr/>
+        </p:nvSpPr>
+        <p:spPr>
+          <a:xfrm>
+            <a:off x="2670048" y="4169664"/>
+            <a:ext cx="685800" cy="475488"/>
+          </a:xfrm>
+          <a:prstGeom prst="rect">
+            <a:avLst/>
+          </a:prstGeom>
+          <a:noFill/>
+          <a:ln/>
+        </p:spPr>
+        <p:txBody>
+          <a:bodyPr wrap="square" lIns="0" tIns="0" rIns="0" bIns="0" rtlCol="0" anchor="ctr"/>
+          <a:lstStyle/>
+          <a:p>
+            <a:pPr algn="ctr" indent="0" marL="0">
+              <a:buNone/>
+            </a:pPr>
+            <a:r>
+              <a:rPr lang="en-US" sz="900" b="1" dirty="0">
+                <a:solidFill>
+                  <a:srgbClr val="9D174D"/>
                 </a:solidFill>
                 <a:latin typeface="Trebuchet MS" pitchFamily="34" charset="0"/>
                 <a:ea typeface="Trebuchet MS" pitchFamily="34" charset="-122"/>
                 <a:cs typeface="Trebuchet MS" pitchFamily="34" charset="-120"/>
               </a:rPr>
-              <a:t>think</a:t>
-            </a:r>
-            <a:endParaRPr lang="en-US" sz="1400" dirty="0"/>
-          </a:p>
-        </p:txBody>
-      </p:sp>
-      <p:sp>
-        <p:nvSpPr>
-          <p:cNvPr id="33" name="Shape 31"/>
-          <p:cNvSpPr/>
-          <p:nvPr/>
-        </p:nvSpPr>
-        <p:spPr>
-          <a:xfrm>
-            <a:off x="365760" y="4096512"/>
-            <a:ext cx="1371600" cy="804672"/>
+              <a:t>th</a:t>
+            </a:r>
+            <a:endParaRPr lang="en-US" sz="900" dirty="0"/>
+          </a:p>
+        </p:txBody>
+      </p:sp>
+      <p:sp>
+        <p:nvSpPr>
+          <p:cNvPr id="35" name="Shape 33"/>
+          <p:cNvSpPr/>
+          <p:nvPr/>
+        </p:nvSpPr>
+        <p:spPr>
+          <a:xfrm>
+            <a:off x="4123944" y="4169664"/>
+            <a:ext cx="685800" cy="475488"/>
           </a:xfrm>
           <a:prstGeom prst="rect">
             <a:avLst>
-              <a:gd name="adj" fmla="val 6818"/>
+              <a:gd name="adj" fmla="val 7692"/>
             </a:avLst>
           </a:prstGeom>
           <a:solidFill>
-            <a:srgbClr val="E2E8F0"/>
-          </a:solidFill>
-          <a:ln w="12700">
-            <a:solidFill>
-              <a:srgbClr val="E2E8F0"/>
-            </a:solidFill>
-            <a:prstDash val="solid"/>
-          </a:ln>
-        </p:spPr>
-      </p:sp>
-      <p:sp>
-        <p:nvSpPr>
-          <p:cNvPr id="34" name="Text 32"/>
-          <p:cNvSpPr/>
-          <p:nvPr/>
-        </p:nvSpPr>
-        <p:spPr>
-          <a:xfrm>
-            <a:off x="365760" y="4096512"/>
-            <a:ext cx="1371600" cy="804672"/>
-          </a:xfrm>
-          <a:prstGeom prst="rect">
-            <a:avLst/>
-          </a:prstGeom>
-          <a:noFill/>
-          <a:ln/>
-        </p:spPr>
-        <p:txBody>
-          <a:bodyPr wrap="square" lIns="0" tIns="0" rIns="0" bIns="0" rtlCol="0" anchor="ctr"/>
-          <a:lstStyle/>
-          <a:p>
-            <a:pPr algn="ctr" indent="0" marL="0">
-              <a:buNone/>
-            </a:pPr>
-            <a:r>
-              <a:rPr lang="en-US" sz="1100" b="1" dirty="0">
-                <a:solidFill>
-                  <a:srgbClr val="475569"/>
+            <a:srgbClr val="FFFFFF"/>
+          </a:solidFill>
+          <a:ln w="12700">
+            <a:solidFill>
+              <a:srgbClr val="DB2777"/>
+            </a:solidFill>
+            <a:prstDash val="solid"/>
+          </a:ln>
+        </p:spPr>
+      </p:sp>
+      <p:sp>
+        <p:nvSpPr>
+          <p:cNvPr id="36" name="Text 34"/>
+          <p:cNvSpPr/>
+          <p:nvPr/>
+        </p:nvSpPr>
+        <p:spPr>
+          <a:xfrm>
+            <a:off x="4123944" y="4169664"/>
+            <a:ext cx="685800" cy="475488"/>
+          </a:xfrm>
+          <a:prstGeom prst="rect">
+            <a:avLst/>
+          </a:prstGeom>
+          <a:noFill/>
+          <a:ln/>
+        </p:spPr>
+        <p:txBody>
+          <a:bodyPr wrap="square" lIns="0" tIns="0" rIns="0" bIns="0" rtlCol="0" anchor="ctr"/>
+          <a:lstStyle/>
+          <a:p>
+            <a:pPr algn="ctr" indent="0" marL="0">
+              <a:buNone/>
+            </a:pPr>
+            <a:r>
+              <a:rPr lang="en-US" sz="900" b="1" dirty="0">
+                <a:solidFill>
+                  <a:srgbClr val="9D174D"/>
                 </a:solidFill>
                 <a:latin typeface="Trebuchet MS" pitchFamily="34" charset="0"/>
                 <a:ea typeface="Trebuchet MS" pitchFamily="34" charset="-122"/>
                 <a:cs typeface="Trebuchet MS" pitchFamily="34" charset="-120"/>
               </a:rPr>
-              <a:t>Phonemes</a:t>
-            </a:r>
-            <a:endParaRPr lang="en-US" sz="1100" dirty="0"/>
-          </a:p>
-        </p:txBody>
-      </p:sp>
-      <p:sp>
-        <p:nvSpPr>
-          <p:cNvPr id="35" name="Shape 33"/>
-          <p:cNvSpPr/>
-          <p:nvPr/>
-        </p:nvSpPr>
-        <p:spPr>
-          <a:xfrm>
-            <a:off x="1874520" y="4096512"/>
-            <a:ext cx="6903720" cy="658368"/>
-          </a:xfrm>
-          <a:prstGeom prst="rect">
-            <a:avLst>
-              <a:gd name="adj" fmla="val 8333"/>
-            </a:avLst>
-          </a:prstGeom>
-          <a:solidFill>
-            <a:srgbClr val="FCE7F3"/>
-          </a:solidFill>
-          <a:ln w="12700">
-            <a:solidFill>
-              <a:srgbClr val="DB2777"/>
-            </a:solidFill>
-            <a:prstDash val="solid"/>
-          </a:ln>
-        </p:spPr>
-      </p:sp>
-      <p:sp>
-        <p:nvSpPr>
-          <p:cNvPr id="36" name="Shape 34"/>
-          <p:cNvSpPr/>
-          <p:nvPr/>
-        </p:nvSpPr>
-        <p:spPr>
-          <a:xfrm>
-            <a:off x="2124837" y="4169664"/>
+              <a:t>i</a:t>
+            </a:r>
+            <a:endParaRPr lang="en-US" sz="900" dirty="0"/>
+          </a:p>
+        </p:txBody>
+      </p:sp>
+      <p:sp>
+        <p:nvSpPr>
+          <p:cNvPr id="37" name="Shape 35"/>
+          <p:cNvSpPr/>
+          <p:nvPr/>
+        </p:nvSpPr>
+        <p:spPr>
+          <a:xfrm>
+            <a:off x="5577840" y="4169664"/>
             <a:ext cx="685800" cy="475488"/>
           </a:xfrm>
           <a:prstGeom prst="rect">
@@ -27385,13 +28094,13 @@
       </p:sp>
       <p:sp>
         <p:nvSpPr>
-          <p:cNvPr id="37" name="Text 35"/>
-          <p:cNvSpPr/>
-          <p:nvPr/>
-        </p:nvSpPr>
-        <p:spPr>
-          <a:xfrm>
-            <a:off x="2124837" y="4169664"/>
+          <p:cNvPr id="38" name="Text 36"/>
+          <p:cNvSpPr/>
+          <p:nvPr/>
+        </p:nvSpPr>
+        <p:spPr>
+          <a:xfrm>
+            <a:off x="5577840" y="4169664"/>
             <a:ext cx="685800" cy="475488"/>
           </a:xfrm>
           <a:prstGeom prst="rect">
@@ -27416,7 +28125,7 @@
                 <a:ea typeface="Trebuchet MS" pitchFamily="34" charset="-122"/>
                 <a:cs typeface="Trebuchet MS" pitchFamily="34" charset="-120"/>
               </a:rPr>
-              <a:t>o</a:t>
+              <a:t>nk</a:t>
             </a:r>
             <a:endParaRPr lang="en-US" sz="900" dirty="0"/>
           </a:p>
@@ -27424,13 +28133,13 @@
       </p:sp>
       <p:sp>
         <p:nvSpPr>
-          <p:cNvPr id="38" name="Shape 36"/>
-          <p:cNvSpPr/>
-          <p:nvPr/>
-        </p:nvSpPr>
-        <p:spPr>
-          <a:xfrm>
-            <a:off x="3033522" y="4169664"/>
+          <p:cNvPr id="39" name="Shape 37"/>
+          <p:cNvSpPr/>
+          <p:nvPr/>
+        </p:nvSpPr>
+        <p:spPr>
+          <a:xfrm>
+            <a:off x="7031736" y="4169664"/>
             <a:ext cx="685800" cy="475488"/>
           </a:xfrm>
           <a:prstGeom prst="rect">
@@ -27451,13 +28160,13 @@
       </p:sp>
       <p:sp>
         <p:nvSpPr>
-          <p:cNvPr id="39" name="Text 37"/>
-          <p:cNvSpPr/>
-          <p:nvPr/>
-        </p:nvSpPr>
-        <p:spPr>
-          <a:xfrm>
-            <a:off x="3033522" y="4169664"/>
+          <p:cNvPr id="40" name="Text 38"/>
+          <p:cNvSpPr/>
+          <p:nvPr/>
+        </p:nvSpPr>
+        <p:spPr>
+          <a:xfrm>
+            <a:off x="7031736" y="4169664"/>
             <a:ext cx="685800" cy="475488"/>
           </a:xfrm>
           <a:prstGeom prst="rect">
@@ -27482,337 +28191,7 @@
                 <a:ea typeface="Trebuchet MS" pitchFamily="34" charset="-122"/>
                 <a:cs typeface="Trebuchet MS" pitchFamily="34" charset="-120"/>
               </a:rPr>
-              <a:t>v</a:t>
-            </a:r>
-            <a:endParaRPr lang="en-US" sz="900" dirty="0"/>
-          </a:p>
-        </p:txBody>
-      </p:sp>
-      <p:sp>
-        <p:nvSpPr>
-          <p:cNvPr id="40" name="Shape 38"/>
-          <p:cNvSpPr/>
-          <p:nvPr/>
-        </p:nvSpPr>
-        <p:spPr>
-          <a:xfrm>
-            <a:off x="3942207" y="4169664"/>
-            <a:ext cx="685800" cy="475488"/>
-          </a:xfrm>
-          <a:prstGeom prst="rect">
-            <a:avLst>
-              <a:gd name="adj" fmla="val 7692"/>
-            </a:avLst>
-          </a:prstGeom>
-          <a:solidFill>
-            <a:srgbClr val="FFFFFF"/>
-          </a:solidFill>
-          <a:ln w="12700">
-            <a:solidFill>
-              <a:srgbClr val="DB2777"/>
-            </a:solidFill>
-            <a:prstDash val="solid"/>
-          </a:ln>
-        </p:spPr>
-      </p:sp>
-      <p:sp>
-        <p:nvSpPr>
-          <p:cNvPr id="41" name="Text 39"/>
-          <p:cNvSpPr/>
-          <p:nvPr/>
-        </p:nvSpPr>
-        <p:spPr>
-          <a:xfrm>
-            <a:off x="3942207" y="4169664"/>
-            <a:ext cx="685800" cy="475488"/>
-          </a:xfrm>
-          <a:prstGeom prst="rect">
-            <a:avLst/>
-          </a:prstGeom>
-          <a:noFill/>
-          <a:ln/>
-        </p:spPr>
-        <p:txBody>
-          <a:bodyPr wrap="square" lIns="0" tIns="0" rIns="0" bIns="0" rtlCol="0" anchor="ctr"/>
-          <a:lstStyle/>
-          <a:p>
-            <a:pPr algn="ctr" indent="0" marL="0">
-              <a:buNone/>
-            </a:pPr>
-            <a:r>
-              <a:rPr lang="en-US" sz="900" b="1" dirty="0">
-                <a:solidFill>
-                  <a:srgbClr val="9D174D"/>
-                </a:solidFill>
-                <a:latin typeface="Trebuchet MS" pitchFamily="34" charset="0"/>
-                <a:ea typeface="Trebuchet MS" pitchFamily="34" charset="-122"/>
-                <a:cs typeface="Trebuchet MS" pitchFamily="34" charset="-120"/>
-              </a:rPr>
               <a:t>er</a:t>
-            </a:r>
-            <a:endParaRPr lang="en-US" sz="900" dirty="0"/>
-          </a:p>
-        </p:txBody>
-      </p:sp>
-      <p:sp>
-        <p:nvSpPr>
-          <p:cNvPr id="42" name="Shape 40"/>
-          <p:cNvSpPr/>
-          <p:nvPr/>
-        </p:nvSpPr>
-        <p:spPr>
-          <a:xfrm>
-            <a:off x="4850892" y="4169664"/>
-            <a:ext cx="685800" cy="475488"/>
-          </a:xfrm>
-          <a:prstGeom prst="rect">
-            <a:avLst>
-              <a:gd name="adj" fmla="val 7692"/>
-            </a:avLst>
-          </a:prstGeom>
-          <a:solidFill>
-            <a:srgbClr val="FFFFFF"/>
-          </a:solidFill>
-          <a:ln w="12700">
-            <a:solidFill>
-              <a:srgbClr val="DB2777"/>
-            </a:solidFill>
-            <a:prstDash val="solid"/>
-          </a:ln>
-        </p:spPr>
-      </p:sp>
-      <p:sp>
-        <p:nvSpPr>
-          <p:cNvPr id="43" name="Text 41"/>
-          <p:cNvSpPr/>
-          <p:nvPr/>
-        </p:nvSpPr>
-        <p:spPr>
-          <a:xfrm>
-            <a:off x="4850892" y="4169664"/>
-            <a:ext cx="685800" cy="475488"/>
-          </a:xfrm>
-          <a:prstGeom prst="rect">
-            <a:avLst/>
-          </a:prstGeom>
-          <a:noFill/>
-          <a:ln/>
-        </p:spPr>
-        <p:txBody>
-          <a:bodyPr wrap="square" lIns="0" tIns="0" rIns="0" bIns="0" rtlCol="0" anchor="ctr"/>
-          <a:lstStyle/>
-          <a:p>
-            <a:pPr algn="ctr" indent="0" marL="0">
-              <a:buNone/>
-            </a:pPr>
-            <a:r>
-              <a:rPr lang="en-US" sz="900" b="1" dirty="0">
-                <a:solidFill>
-                  <a:srgbClr val="9D174D"/>
-                </a:solidFill>
-                <a:latin typeface="Trebuchet MS" pitchFamily="34" charset="0"/>
-                <a:ea typeface="Trebuchet MS" pitchFamily="34" charset="-122"/>
-                <a:cs typeface="Trebuchet MS" pitchFamily="34" charset="-120"/>
-              </a:rPr>
-              <a:t>th</a:t>
-            </a:r>
-            <a:endParaRPr lang="en-US" sz="900" dirty="0"/>
-          </a:p>
-        </p:txBody>
-      </p:sp>
-      <p:sp>
-        <p:nvSpPr>
-          <p:cNvPr id="44" name="Shape 42"/>
-          <p:cNvSpPr/>
-          <p:nvPr/>
-        </p:nvSpPr>
-        <p:spPr>
-          <a:xfrm>
-            <a:off x="5759577" y="4169664"/>
-            <a:ext cx="685800" cy="475488"/>
-          </a:xfrm>
-          <a:prstGeom prst="rect">
-            <a:avLst>
-              <a:gd name="adj" fmla="val 7692"/>
-            </a:avLst>
-          </a:prstGeom>
-          <a:solidFill>
-            <a:srgbClr val="FFFFFF"/>
-          </a:solidFill>
-          <a:ln w="12700">
-            <a:solidFill>
-              <a:srgbClr val="DB2777"/>
-            </a:solidFill>
-            <a:prstDash val="solid"/>
-          </a:ln>
-        </p:spPr>
-      </p:sp>
-      <p:sp>
-        <p:nvSpPr>
-          <p:cNvPr id="45" name="Text 43"/>
-          <p:cNvSpPr/>
-          <p:nvPr/>
-        </p:nvSpPr>
-        <p:spPr>
-          <a:xfrm>
-            <a:off x="5759577" y="4169664"/>
-            <a:ext cx="685800" cy="475488"/>
-          </a:xfrm>
-          <a:prstGeom prst="rect">
-            <a:avLst/>
-          </a:prstGeom>
-          <a:noFill/>
-          <a:ln/>
-        </p:spPr>
-        <p:txBody>
-          <a:bodyPr wrap="square" lIns="0" tIns="0" rIns="0" bIns="0" rtlCol="0" anchor="ctr"/>
-          <a:lstStyle/>
-          <a:p>
-            <a:pPr algn="ctr" indent="0" marL="0">
-              <a:buNone/>
-            </a:pPr>
-            <a:r>
-              <a:rPr lang="en-US" sz="900" b="1" dirty="0">
-                <a:solidFill>
-                  <a:srgbClr val="9D174D"/>
-                </a:solidFill>
-                <a:latin typeface="Trebuchet MS" pitchFamily="34" charset="0"/>
-                <a:ea typeface="Trebuchet MS" pitchFamily="34" charset="-122"/>
-                <a:cs typeface="Trebuchet MS" pitchFamily="34" charset="-120"/>
-              </a:rPr>
-              <a:t>i</a:t>
-            </a:r>
-            <a:endParaRPr lang="en-US" sz="900" dirty="0"/>
-          </a:p>
-        </p:txBody>
-      </p:sp>
-      <p:sp>
-        <p:nvSpPr>
-          <p:cNvPr id="46" name="Shape 44"/>
-          <p:cNvSpPr/>
-          <p:nvPr/>
-        </p:nvSpPr>
-        <p:spPr>
-          <a:xfrm>
-            <a:off x="6668262" y="4169664"/>
-            <a:ext cx="685800" cy="475488"/>
-          </a:xfrm>
-          <a:prstGeom prst="rect">
-            <a:avLst>
-              <a:gd name="adj" fmla="val 7692"/>
-            </a:avLst>
-          </a:prstGeom>
-          <a:solidFill>
-            <a:srgbClr val="FFFFFF"/>
-          </a:solidFill>
-          <a:ln w="12700">
-            <a:solidFill>
-              <a:srgbClr val="DB2777"/>
-            </a:solidFill>
-            <a:prstDash val="solid"/>
-          </a:ln>
-        </p:spPr>
-      </p:sp>
-      <p:sp>
-        <p:nvSpPr>
-          <p:cNvPr id="47" name="Text 45"/>
-          <p:cNvSpPr/>
-          <p:nvPr/>
-        </p:nvSpPr>
-        <p:spPr>
-          <a:xfrm>
-            <a:off x="6668262" y="4169664"/>
-            <a:ext cx="685800" cy="475488"/>
-          </a:xfrm>
-          <a:prstGeom prst="rect">
-            <a:avLst/>
-          </a:prstGeom>
-          <a:noFill/>
-          <a:ln/>
-        </p:spPr>
-        <p:txBody>
-          <a:bodyPr wrap="square" lIns="0" tIns="0" rIns="0" bIns="0" rtlCol="0" anchor="ctr"/>
-          <a:lstStyle/>
-          <a:p>
-            <a:pPr algn="ctr" indent="0" marL="0">
-              <a:buNone/>
-            </a:pPr>
-            <a:r>
-              <a:rPr lang="en-US" sz="900" b="1" dirty="0">
-                <a:solidFill>
-                  <a:srgbClr val="9D174D"/>
-                </a:solidFill>
-                <a:latin typeface="Trebuchet MS" pitchFamily="34" charset="0"/>
-                <a:ea typeface="Trebuchet MS" pitchFamily="34" charset="-122"/>
-                <a:cs typeface="Trebuchet MS" pitchFamily="34" charset="-120"/>
-              </a:rPr>
-              <a:t>n</a:t>
-            </a:r>
-            <a:endParaRPr lang="en-US" sz="900" dirty="0"/>
-          </a:p>
-        </p:txBody>
-      </p:sp>
-      <p:sp>
-        <p:nvSpPr>
-          <p:cNvPr id="48" name="Shape 46"/>
-          <p:cNvSpPr/>
-          <p:nvPr/>
-        </p:nvSpPr>
-        <p:spPr>
-          <a:xfrm>
-            <a:off x="7576947" y="4169664"/>
-            <a:ext cx="685800" cy="475488"/>
-          </a:xfrm>
-          <a:prstGeom prst="rect">
-            <a:avLst>
-              <a:gd name="adj" fmla="val 7692"/>
-            </a:avLst>
-          </a:prstGeom>
-          <a:solidFill>
-            <a:srgbClr val="FFFFFF"/>
-          </a:solidFill>
-          <a:ln w="12700">
-            <a:solidFill>
-              <a:srgbClr val="DB2777"/>
-            </a:solidFill>
-            <a:prstDash val="solid"/>
-          </a:ln>
-        </p:spPr>
-      </p:sp>
-      <p:sp>
-        <p:nvSpPr>
-          <p:cNvPr id="49" name="Text 47"/>
-          <p:cNvSpPr/>
-          <p:nvPr/>
-        </p:nvSpPr>
-        <p:spPr>
-          <a:xfrm>
-            <a:off x="7576947" y="4169664"/>
-            <a:ext cx="685800" cy="475488"/>
-          </a:xfrm>
-          <a:prstGeom prst="rect">
-            <a:avLst/>
-          </a:prstGeom>
-          <a:noFill/>
-          <a:ln/>
-        </p:spPr>
-        <p:txBody>
-          <a:bodyPr wrap="square" lIns="0" tIns="0" rIns="0" bIns="0" rtlCol="0" anchor="ctr"/>
-          <a:lstStyle/>
-          <a:p>
-            <a:pPr algn="ctr" indent="0" marL="0">
-              <a:buNone/>
-            </a:pPr>
-            <a:r>
-              <a:rPr lang="en-US" sz="900" b="1" dirty="0">
-                <a:solidFill>
-                  <a:srgbClr val="9D174D"/>
-                </a:solidFill>
-                <a:latin typeface="Trebuchet MS" pitchFamily="34" charset="0"/>
-                <a:ea typeface="Trebuchet MS" pitchFamily="34" charset="-122"/>
-                <a:cs typeface="Trebuchet MS" pitchFamily="34" charset="-120"/>
-              </a:rPr>
-              <a:t>k</a:t>
             </a:r>
             <a:endParaRPr lang="en-US" sz="900" dirty="0"/>
           </a:p>
@@ -28243,7 +28622,7 @@
                 <a:ea typeface="Trebuchet MS" pitchFamily="34" charset="-122"/>
                 <a:cs typeface="Trebuchet MS" pitchFamily="34" charset="-120"/>
               </a:rPr>
-              <a:t>thinker</a:t>
+              <a:t>overthought</a:t>
             </a:r>
             <a:endParaRPr lang="en-US" sz="2800" dirty="0"/>
           </a:p>
@@ -29070,7 +29449,7 @@
                 <a:ea typeface="Trebuchet MS" pitchFamily="34" charset="-122"/>
                 <a:cs typeface="Trebuchet MS" pitchFamily="34" charset="-120"/>
               </a:rPr>
-              <a:t>thinker</a:t>
+              <a:t>overthought</a:t>
             </a:r>
             <a:endParaRPr lang="en-US" sz="2800" dirty="0"/>
           </a:p>
@@ -29159,11 +29538,11 @@
             </a:avLst>
           </a:prstGeom>
           <a:solidFill>
-            <a:srgbClr val="CCFBF1"/>
+            <a:srgbClr val="DDD6FE"/>
           </a:solidFill>
           <a:ln w="19050">
             <a:solidFill>
-              <a:srgbClr val="0D9488"/>
+              <a:srgbClr val="7C3AED"/>
             </a:solidFill>
             <a:prstDash val="solid"/>
           </a:ln>
@@ -29203,13 +29582,13 @@
             <a:r>
               <a:rPr lang="en-US" sz="1300" b="1" dirty="0">
                 <a:solidFill>
-                  <a:srgbClr val="0F766E"/>
+                  <a:srgbClr val="4C1D95"/>
                 </a:solidFill>
                 <a:latin typeface="Trebuchet MS" pitchFamily="34" charset="0"/>
                 <a:ea typeface="Trebuchet MS" pitchFamily="34" charset="-122"/>
                 <a:cs typeface="Trebuchet MS" pitchFamily="34" charset="-120"/>
               </a:rPr>
-              <a:t>think</a:t>
+              <a:t>over</a:t>
             </a:r>
             <a:endParaRPr lang="en-US" sz="1300" dirty="0"/>
           </a:p>
@@ -29248,7 +29627,7 @@
                 <a:ea typeface="Calibri" pitchFamily="34" charset="-122"/>
                 <a:cs typeface="Calibri" pitchFamily="34" charset="-120"/>
               </a:rPr>
-              <a:t>to use the mind</a:t>
+              <a:t>too much</a:t>
             </a:r>
             <a:endParaRPr lang="en-US" sz="850" dirty="0"/>
           </a:p>
@@ -29321,7 +29700,7 @@
                 <a:ea typeface="Trebuchet MS" pitchFamily="34" charset="-122"/>
                 <a:cs typeface="Trebuchet MS" pitchFamily="34" charset="-120"/>
               </a:rPr>
-              <a:t>er</a:t>
+              <a:t>thought</a:t>
             </a:r>
             <a:endParaRPr lang="en-US" sz="1300" dirty="0"/>
           </a:p>
@@ -29360,7 +29739,7 @@
                 <a:ea typeface="Calibri" pitchFamily="34" charset="-122"/>
                 <a:cs typeface="Calibri" pitchFamily="34" charset="-120"/>
               </a:rPr>
-              <a:t>a person who does something</a:t>
+              <a:t>past tense of think</a:t>
             </a:r>
             <a:endParaRPr lang="en-US" sz="850" dirty="0"/>
           </a:p>
@@ -30055,7 +30434,7 @@
                 <a:ea typeface="Trebuchet MS" pitchFamily="34" charset="-122"/>
                 <a:cs typeface="Trebuchet MS" pitchFamily="34" charset="-120"/>
               </a:rPr>
-              <a:t>thinker</a:t>
+              <a:t>overthought</a:t>
             </a:r>
             <a:endParaRPr lang="en-US" sz="2800" dirty="0"/>
           </a:p>
@@ -30144,11 +30523,11 @@
             </a:avLst>
           </a:prstGeom>
           <a:solidFill>
-            <a:srgbClr val="CCFBF1"/>
+            <a:srgbClr val="DDD6FE"/>
           </a:solidFill>
           <a:ln w="19050">
             <a:solidFill>
-              <a:srgbClr val="0D9488"/>
+              <a:srgbClr val="7C3AED"/>
             </a:solidFill>
             <a:prstDash val="solid"/>
           </a:ln>
@@ -30188,13 +30567,13 @@
             <a:r>
               <a:rPr lang="en-US" sz="1300" b="1" dirty="0">
                 <a:solidFill>
-                  <a:srgbClr val="0F766E"/>
+                  <a:srgbClr val="4C1D95"/>
                 </a:solidFill>
                 <a:latin typeface="Trebuchet MS" pitchFamily="34" charset="0"/>
                 <a:ea typeface="Trebuchet MS" pitchFamily="34" charset="-122"/>
                 <a:cs typeface="Trebuchet MS" pitchFamily="34" charset="-120"/>
               </a:rPr>
-              <a:t>think</a:t>
+              <a:t>over</a:t>
             </a:r>
             <a:endParaRPr lang="en-US" sz="1300" dirty="0"/>
           </a:p>
@@ -30233,7 +30612,7 @@
                 <a:ea typeface="Calibri" pitchFamily="34" charset="-122"/>
                 <a:cs typeface="Calibri" pitchFamily="34" charset="-120"/>
               </a:rPr>
-              <a:t>to use the mind</a:t>
+              <a:t>too much</a:t>
             </a:r>
             <a:endParaRPr lang="en-US" sz="850" dirty="0"/>
           </a:p>
@@ -30306,7 +30685,7 @@
                 <a:ea typeface="Trebuchet MS" pitchFamily="34" charset="-122"/>
                 <a:cs typeface="Trebuchet MS" pitchFamily="34" charset="-120"/>
               </a:rPr>
-              <a:t>er</a:t>
+              <a:t>thought</a:t>
             </a:r>
             <a:endParaRPr lang="en-US" sz="1300" dirty="0"/>
           </a:p>
@@ -30345,7 +30724,7 @@
                 <a:ea typeface="Calibri" pitchFamily="34" charset="-122"/>
                 <a:cs typeface="Calibri" pitchFamily="34" charset="-120"/>
               </a:rPr>
-              <a:t>a person who does something</a:t>
+              <a:t>past tense of think</a:t>
             </a:r>
             <a:endParaRPr lang="en-US" sz="850" dirty="0"/>
           </a:p>
@@ -30452,7 +30831,7 @@
         </p:nvSpPr>
         <p:spPr>
           <a:xfrm>
-            <a:off x="2999232" y="3364992"/>
+            <a:off x="2313432" y="3364992"/>
             <a:ext cx="1645920" cy="475488"/>
           </a:xfrm>
           <a:prstGeom prst="rect">
@@ -30479,7 +30858,7 @@
         </p:nvSpPr>
         <p:spPr>
           <a:xfrm>
-            <a:off x="2999232" y="3364992"/>
+            <a:off x="2313432" y="3364992"/>
             <a:ext cx="1645920" cy="475488"/>
           </a:xfrm>
           <a:prstGeom prst="rect">
@@ -30504,7 +30883,7 @@
                 <a:ea typeface="Trebuchet MS" pitchFamily="34" charset="-122"/>
                 <a:cs typeface="Trebuchet MS" pitchFamily="34" charset="-120"/>
               </a:rPr>
-              <a:t>think</a:t>
+              <a:t>o</a:t>
             </a:r>
             <a:endParaRPr lang="en-US" sz="1400" dirty="0"/>
           </a:p>
@@ -30518,8 +30897,8 @@
         </p:nvSpPr>
         <p:spPr>
           <a:xfrm>
-            <a:off x="4645152" y="3364992"/>
-            <a:ext cx="1097280" cy="475488"/>
+            <a:off x="3959352" y="3364992"/>
+            <a:ext cx="411480" cy="475488"/>
           </a:xfrm>
           <a:prstGeom prst="rect">
             <a:avLst/>
@@ -30557,7 +30936,7 @@
         </p:nvSpPr>
         <p:spPr>
           <a:xfrm>
-            <a:off x="5742432" y="3364992"/>
+            <a:off x="4370832" y="3364992"/>
             <a:ext cx="1645920" cy="475488"/>
           </a:xfrm>
           <a:prstGeom prst="rect">
@@ -30584,7 +30963,7 @@
         </p:nvSpPr>
         <p:spPr>
           <a:xfrm>
-            <a:off x="5742432" y="3364992"/>
+            <a:off x="4370832" y="3364992"/>
             <a:ext cx="1645920" cy="475488"/>
           </a:xfrm>
           <a:prstGeom prst="rect">
@@ -30609,7 +30988,7 @@
                 <a:ea typeface="Trebuchet MS" pitchFamily="34" charset="-122"/>
                 <a:cs typeface="Trebuchet MS" pitchFamily="34" charset="-120"/>
               </a:rPr>
-              <a:t>er</a:t>
+              <a:t>ver</a:t>
             </a:r>
             <a:endParaRPr lang="en-US" sz="1400" dirty="0"/>
           </a:p>
@@ -30617,7 +30996,112 @@
       </p:sp>
       <p:sp>
         <p:nvSpPr>
-          <p:cNvPr id="30" name="Shape 28"/>
+          <p:cNvPr id="30" name="Text 28"/>
+          <p:cNvSpPr/>
+          <p:nvPr/>
+        </p:nvSpPr>
+        <p:spPr>
+          <a:xfrm>
+            <a:off x="6016752" y="3364992"/>
+            <a:ext cx="411480" cy="475488"/>
+          </a:xfrm>
+          <a:prstGeom prst="rect">
+            <a:avLst/>
+          </a:prstGeom>
+          <a:noFill/>
+          <a:ln/>
+        </p:spPr>
+        <p:txBody>
+          <a:bodyPr wrap="square" lIns="0" tIns="0" rIns="0" bIns="0" rtlCol="0" anchor="ctr"/>
+          <a:lstStyle/>
+          <a:p>
+            <a:pPr algn="ctr" indent="0" marL="0">
+              <a:buNone/>
+            </a:pPr>
+            <a:r>
+              <a:rPr lang="en-US" sz="1600" b="1" dirty="0">
+                <a:solidFill>
+                  <a:srgbClr val="0D9488"/>
+                </a:solidFill>
+                <a:latin typeface="Trebuchet MS" pitchFamily="34" charset="0"/>
+                <a:ea typeface="Trebuchet MS" pitchFamily="34" charset="-122"/>
+                <a:cs typeface="Trebuchet MS" pitchFamily="34" charset="-120"/>
+              </a:rPr>
+              <a:t>·</a:t>
+            </a:r>
+            <a:endParaRPr lang="en-US" sz="1600" dirty="0"/>
+          </a:p>
+        </p:txBody>
+      </p:sp>
+      <p:sp>
+        <p:nvSpPr>
+          <p:cNvPr id="31" name="Shape 29"/>
+          <p:cNvSpPr/>
+          <p:nvPr/>
+        </p:nvSpPr>
+        <p:spPr>
+          <a:xfrm>
+            <a:off x="6428232" y="3364992"/>
+            <a:ext cx="1645920" cy="475488"/>
+          </a:xfrm>
+          <a:prstGeom prst="rect">
+            <a:avLst>
+              <a:gd name="adj" fmla="val 9615"/>
+            </a:avLst>
+          </a:prstGeom>
+          <a:solidFill>
+            <a:srgbClr val="FFFFFF"/>
+          </a:solidFill>
+          <a:ln w="12700">
+            <a:solidFill>
+              <a:srgbClr val="0D9488"/>
+            </a:solidFill>
+            <a:prstDash val="solid"/>
+          </a:ln>
+        </p:spPr>
+      </p:sp>
+      <p:sp>
+        <p:nvSpPr>
+          <p:cNvPr id="32" name="Text 30"/>
+          <p:cNvSpPr/>
+          <p:nvPr/>
+        </p:nvSpPr>
+        <p:spPr>
+          <a:xfrm>
+            <a:off x="6428232" y="3364992"/>
+            <a:ext cx="1645920" cy="475488"/>
+          </a:xfrm>
+          <a:prstGeom prst="rect">
+            <a:avLst/>
+          </a:prstGeom>
+          <a:noFill/>
+          <a:ln/>
+        </p:spPr>
+        <p:txBody>
+          <a:bodyPr wrap="square" lIns="0" tIns="0" rIns="0" bIns="0" rtlCol="0" anchor="ctr"/>
+          <a:lstStyle/>
+          <a:p>
+            <a:pPr algn="ctr" indent="0" marL="0">
+              <a:buNone/>
+            </a:pPr>
+            <a:r>
+              <a:rPr lang="en-US" sz="1400" b="1" dirty="0">
+                <a:solidFill>
+                  <a:srgbClr val="0D9488"/>
+                </a:solidFill>
+                <a:latin typeface="Trebuchet MS" pitchFamily="34" charset="0"/>
+                <a:ea typeface="Trebuchet MS" pitchFamily="34" charset="-122"/>
+                <a:cs typeface="Trebuchet MS" pitchFamily="34" charset="-120"/>
+              </a:rPr>
+              <a:t>thought</a:t>
+            </a:r>
+            <a:endParaRPr lang="en-US" sz="1400" dirty="0"/>
+          </a:p>
+        </p:txBody>
+      </p:sp>
+      <p:sp>
+        <p:nvSpPr>
+          <p:cNvPr id="33" name="Shape 31"/>
           <p:cNvSpPr/>
           <p:nvPr/>
         </p:nvSpPr>
@@ -30644,7 +31128,7 @@
       </p:sp>
       <p:sp>
         <p:nvSpPr>
-          <p:cNvPr id="31" name="Text 29"/>
+          <p:cNvPr id="34" name="Text 32"/>
           <p:cNvSpPr/>
           <p:nvPr/>
         </p:nvSpPr>
@@ -30683,7 +31167,7 @@
       </p:sp>
       <p:sp>
         <p:nvSpPr>
-          <p:cNvPr id="32" name="Shape 30"/>
+          <p:cNvPr id="35" name="Shape 33"/>
           <p:cNvSpPr/>
           <p:nvPr/>
         </p:nvSpPr>
@@ -30710,7 +31194,7 @@
       </p:sp>
       <p:sp>
         <p:nvSpPr>
-          <p:cNvPr id="33" name="Text 31"/>
+          <p:cNvPr id="36" name="Text 34"/>
           <p:cNvSpPr/>
           <p:nvPr/>
         </p:nvSpPr>
@@ -31172,7 +31656,7 @@
                 <a:ea typeface="Trebuchet MS" pitchFamily="34" charset="-122"/>
                 <a:cs typeface="Trebuchet MS" pitchFamily="34" charset="-120"/>
               </a:rPr>
-              <a:t>thinker</a:t>
+              <a:t>overthought</a:t>
             </a:r>
             <a:endParaRPr lang="en-US" sz="2800" dirty="0"/>
           </a:p>
@@ -31261,11 +31745,11 @@
             </a:avLst>
           </a:prstGeom>
           <a:solidFill>
-            <a:srgbClr val="CCFBF1"/>
+            <a:srgbClr val="DDD6FE"/>
           </a:solidFill>
           <a:ln w="19050">
             <a:solidFill>
-              <a:srgbClr val="0D9488"/>
+              <a:srgbClr val="7C3AED"/>
             </a:solidFill>
             <a:prstDash val="solid"/>
           </a:ln>
@@ -31305,13 +31789,13 @@
             <a:r>
               <a:rPr lang="en-US" sz="1300" b="1" dirty="0">
                 <a:solidFill>
-                  <a:srgbClr val="0F766E"/>
+                  <a:srgbClr val="4C1D95"/>
                 </a:solidFill>
                 <a:latin typeface="Trebuchet MS" pitchFamily="34" charset="0"/>
                 <a:ea typeface="Trebuchet MS" pitchFamily="34" charset="-122"/>
                 <a:cs typeface="Trebuchet MS" pitchFamily="34" charset="-120"/>
               </a:rPr>
-              <a:t>think</a:t>
+              <a:t>over</a:t>
             </a:r>
             <a:endParaRPr lang="en-US" sz="1300" dirty="0"/>
           </a:p>
@@ -31350,7 +31834,7 @@
                 <a:ea typeface="Calibri" pitchFamily="34" charset="-122"/>
                 <a:cs typeface="Calibri" pitchFamily="34" charset="-120"/>
               </a:rPr>
-              <a:t>to use the mind</a:t>
+              <a:t>too much</a:t>
             </a:r>
             <a:endParaRPr lang="en-US" sz="850" dirty="0"/>
           </a:p>
@@ -31423,7 +31907,7 @@
                 <a:ea typeface="Trebuchet MS" pitchFamily="34" charset="-122"/>
                 <a:cs typeface="Trebuchet MS" pitchFamily="34" charset="-120"/>
               </a:rPr>
-              <a:t>er</a:t>
+              <a:t>thought</a:t>
             </a:r>
             <a:endParaRPr lang="en-US" sz="1300" dirty="0"/>
           </a:p>
@@ -31462,7 +31946,7 @@
                 <a:ea typeface="Calibri" pitchFamily="34" charset="-122"/>
                 <a:cs typeface="Calibri" pitchFamily="34" charset="-120"/>
               </a:rPr>
-              <a:t>a person who does something</a:t>
+              <a:t>past tense of think</a:t>
             </a:r>
             <a:endParaRPr lang="en-US" sz="850" dirty="0"/>
           </a:p>
@@ -31569,7 +32053,7 @@
         </p:nvSpPr>
         <p:spPr>
           <a:xfrm>
-            <a:off x="2999232" y="3364992"/>
+            <a:off x="2313432" y="3364992"/>
             <a:ext cx="1645920" cy="475488"/>
           </a:xfrm>
           <a:prstGeom prst="rect">
@@ -31596,7 +32080,7 @@
         </p:nvSpPr>
         <p:spPr>
           <a:xfrm>
-            <a:off x="2999232" y="3364992"/>
+            <a:off x="2313432" y="3364992"/>
             <a:ext cx="1645920" cy="475488"/>
           </a:xfrm>
           <a:prstGeom prst="rect">
@@ -31621,7 +32105,7 @@
                 <a:ea typeface="Trebuchet MS" pitchFamily="34" charset="-122"/>
                 <a:cs typeface="Trebuchet MS" pitchFamily="34" charset="-120"/>
               </a:rPr>
-              <a:t>think</a:t>
+              <a:t>o</a:t>
             </a:r>
             <a:endParaRPr lang="en-US" sz="1400" dirty="0"/>
           </a:p>
@@ -31635,8 +32119,8 @@
         </p:nvSpPr>
         <p:spPr>
           <a:xfrm>
-            <a:off x="4645152" y="3364992"/>
-            <a:ext cx="1097280" cy="475488"/>
+            <a:off x="3959352" y="3364992"/>
+            <a:ext cx="411480" cy="475488"/>
           </a:xfrm>
           <a:prstGeom prst="rect">
             <a:avLst/>
@@ -31674,7 +32158,7 @@
         </p:nvSpPr>
         <p:spPr>
           <a:xfrm>
-            <a:off x="5742432" y="3364992"/>
+            <a:off x="4370832" y="3364992"/>
             <a:ext cx="1645920" cy="475488"/>
           </a:xfrm>
           <a:prstGeom prst="rect">
@@ -31701,7 +32185,7 @@
         </p:nvSpPr>
         <p:spPr>
           <a:xfrm>
-            <a:off x="5742432" y="3364992"/>
+            <a:off x="4370832" y="3364992"/>
             <a:ext cx="1645920" cy="475488"/>
           </a:xfrm>
           <a:prstGeom prst="rect">
@@ -31726,7 +32210,7 @@
                 <a:ea typeface="Trebuchet MS" pitchFamily="34" charset="-122"/>
                 <a:cs typeface="Trebuchet MS" pitchFamily="34" charset="-120"/>
               </a:rPr>
-              <a:t>er</a:t>
+              <a:t>ver</a:t>
             </a:r>
             <a:endParaRPr lang="en-US" sz="1400" dirty="0"/>
           </a:p>
@@ -31734,7 +32218,112 @@
       </p:sp>
       <p:sp>
         <p:nvSpPr>
-          <p:cNvPr id="30" name="Shape 28"/>
+          <p:cNvPr id="30" name="Text 28"/>
+          <p:cNvSpPr/>
+          <p:nvPr/>
+        </p:nvSpPr>
+        <p:spPr>
+          <a:xfrm>
+            <a:off x="6016752" y="3364992"/>
+            <a:ext cx="411480" cy="475488"/>
+          </a:xfrm>
+          <a:prstGeom prst="rect">
+            <a:avLst/>
+          </a:prstGeom>
+          <a:noFill/>
+          <a:ln/>
+        </p:spPr>
+        <p:txBody>
+          <a:bodyPr wrap="square" lIns="0" tIns="0" rIns="0" bIns="0" rtlCol="0" anchor="ctr"/>
+          <a:lstStyle/>
+          <a:p>
+            <a:pPr algn="ctr" indent="0" marL="0">
+              <a:buNone/>
+            </a:pPr>
+            <a:r>
+              <a:rPr lang="en-US" sz="1600" b="1" dirty="0">
+                <a:solidFill>
+                  <a:srgbClr val="0D9488"/>
+                </a:solidFill>
+                <a:latin typeface="Trebuchet MS" pitchFamily="34" charset="0"/>
+                <a:ea typeface="Trebuchet MS" pitchFamily="34" charset="-122"/>
+                <a:cs typeface="Trebuchet MS" pitchFamily="34" charset="-120"/>
+              </a:rPr>
+              <a:t>·</a:t>
+            </a:r>
+            <a:endParaRPr lang="en-US" sz="1600" dirty="0"/>
+          </a:p>
+        </p:txBody>
+      </p:sp>
+      <p:sp>
+        <p:nvSpPr>
+          <p:cNvPr id="31" name="Shape 29"/>
+          <p:cNvSpPr/>
+          <p:nvPr/>
+        </p:nvSpPr>
+        <p:spPr>
+          <a:xfrm>
+            <a:off x="6428232" y="3364992"/>
+            <a:ext cx="1645920" cy="475488"/>
+          </a:xfrm>
+          <a:prstGeom prst="rect">
+            <a:avLst>
+              <a:gd name="adj" fmla="val 9615"/>
+            </a:avLst>
+          </a:prstGeom>
+          <a:solidFill>
+            <a:srgbClr val="FFFFFF"/>
+          </a:solidFill>
+          <a:ln w="12700">
+            <a:solidFill>
+              <a:srgbClr val="0D9488"/>
+            </a:solidFill>
+            <a:prstDash val="solid"/>
+          </a:ln>
+        </p:spPr>
+      </p:sp>
+      <p:sp>
+        <p:nvSpPr>
+          <p:cNvPr id="32" name="Text 30"/>
+          <p:cNvSpPr/>
+          <p:nvPr/>
+        </p:nvSpPr>
+        <p:spPr>
+          <a:xfrm>
+            <a:off x="6428232" y="3364992"/>
+            <a:ext cx="1645920" cy="475488"/>
+          </a:xfrm>
+          <a:prstGeom prst="rect">
+            <a:avLst/>
+          </a:prstGeom>
+          <a:noFill/>
+          <a:ln/>
+        </p:spPr>
+        <p:txBody>
+          <a:bodyPr wrap="square" lIns="0" tIns="0" rIns="0" bIns="0" rtlCol="0" anchor="ctr"/>
+          <a:lstStyle/>
+          <a:p>
+            <a:pPr algn="ctr" indent="0" marL="0">
+              <a:buNone/>
+            </a:pPr>
+            <a:r>
+              <a:rPr lang="en-US" sz="1400" b="1" dirty="0">
+                <a:solidFill>
+                  <a:srgbClr val="0D9488"/>
+                </a:solidFill>
+                <a:latin typeface="Trebuchet MS" pitchFamily="34" charset="0"/>
+                <a:ea typeface="Trebuchet MS" pitchFamily="34" charset="-122"/>
+                <a:cs typeface="Trebuchet MS" pitchFamily="34" charset="-120"/>
+              </a:rPr>
+              <a:t>thought</a:t>
+            </a:r>
+            <a:endParaRPr lang="en-US" sz="1400" dirty="0"/>
+          </a:p>
+        </p:txBody>
+      </p:sp>
+      <p:sp>
+        <p:nvSpPr>
+          <p:cNvPr id="33" name="Shape 31"/>
           <p:cNvSpPr/>
           <p:nvPr/>
         </p:nvSpPr>
@@ -31761,7 +32350,7 @@
       </p:sp>
       <p:sp>
         <p:nvSpPr>
-          <p:cNvPr id="31" name="Text 29"/>
+          <p:cNvPr id="34" name="Text 32"/>
           <p:cNvSpPr/>
           <p:nvPr/>
         </p:nvSpPr>
@@ -31800,18 +32389,18 @@
       </p:sp>
       <p:sp>
         <p:nvSpPr>
-          <p:cNvPr id="32" name="Shape 30"/>
+          <p:cNvPr id="35" name="Shape 33"/>
           <p:cNvSpPr/>
           <p:nvPr/>
         </p:nvSpPr>
         <p:spPr>
           <a:xfrm>
             <a:off x="1874520" y="4096512"/>
-            <a:ext cx="6903720" cy="658368"/>
+            <a:ext cx="6903720" cy="804672"/>
           </a:xfrm>
           <a:prstGeom prst="rect">
             <a:avLst>
-              <a:gd name="adj" fmla="val 8333"/>
+              <a:gd name="adj" fmla="val 6818"/>
             </a:avLst>
           </a:prstGeom>
           <a:solidFill>
@@ -31827,18 +32416,18 @@
       </p:sp>
       <p:sp>
         <p:nvSpPr>
-          <p:cNvPr id="33" name="Shape 31"/>
-          <p:cNvSpPr/>
-          <p:nvPr/>
-        </p:nvSpPr>
-        <p:spPr>
-          <a:xfrm>
-            <a:off x="2427732" y="4169664"/>
-            <a:ext cx="685800" cy="475488"/>
+          <p:cNvPr id="36" name="Shape 34"/>
+          <p:cNvSpPr/>
+          <p:nvPr/>
+        </p:nvSpPr>
+        <p:spPr>
+          <a:xfrm>
+            <a:off x="2254649" y="4169664"/>
+            <a:ext cx="685800" cy="384048"/>
           </a:xfrm>
           <a:prstGeom prst="rect">
             <a:avLst>
-              <a:gd name="adj" fmla="val 7692"/>
+              <a:gd name="adj" fmla="val 9524"/>
             </a:avLst>
           </a:prstGeom>
           <a:solidFill>
@@ -31854,14 +32443,14 @@
       </p:sp>
       <p:sp>
         <p:nvSpPr>
-          <p:cNvPr id="34" name="Text 32"/>
-          <p:cNvSpPr/>
-          <p:nvPr/>
-        </p:nvSpPr>
-        <p:spPr>
-          <a:xfrm>
-            <a:off x="2427732" y="4169664"/>
-            <a:ext cx="685800" cy="475488"/>
+          <p:cNvPr id="37" name="Text 35"/>
+          <p:cNvSpPr/>
+          <p:nvPr/>
+        </p:nvSpPr>
+        <p:spPr>
+          <a:xfrm>
+            <a:off x="2254649" y="4169664"/>
+            <a:ext cx="685800" cy="384048"/>
           </a:xfrm>
           <a:prstGeom prst="rect">
             <a:avLst/>
@@ -31885,7 +32474,7 @@
                 <a:ea typeface="Trebuchet MS" pitchFamily="34" charset="-122"/>
                 <a:cs typeface="Trebuchet MS" pitchFamily="34" charset="-120"/>
               </a:rPr>
-              <a:t>th</a:t>
+              <a:t>o</a:t>
             </a:r>
             <a:endParaRPr lang="en-US" sz="900" dirty="0"/>
           </a:p>
@@ -31893,18 +32482,18 @@
       </p:sp>
       <p:sp>
         <p:nvSpPr>
-          <p:cNvPr id="35" name="Shape 33"/>
-          <p:cNvSpPr/>
-          <p:nvPr/>
-        </p:nvSpPr>
-        <p:spPr>
-          <a:xfrm>
-            <a:off x="3639312" y="4169664"/>
-            <a:ext cx="685800" cy="475488"/>
+          <p:cNvPr id="38" name="Shape 36"/>
+          <p:cNvSpPr/>
+          <p:nvPr/>
+        </p:nvSpPr>
+        <p:spPr>
+          <a:xfrm>
+            <a:off x="3293146" y="4169664"/>
+            <a:ext cx="685800" cy="384048"/>
           </a:xfrm>
           <a:prstGeom prst="rect">
             <a:avLst>
-              <a:gd name="adj" fmla="val 7692"/>
+              <a:gd name="adj" fmla="val 9524"/>
             </a:avLst>
           </a:prstGeom>
           <a:solidFill>
@@ -31920,14 +32509,14 @@
       </p:sp>
       <p:sp>
         <p:nvSpPr>
-          <p:cNvPr id="36" name="Text 34"/>
-          <p:cNvSpPr/>
-          <p:nvPr/>
-        </p:nvSpPr>
-        <p:spPr>
-          <a:xfrm>
-            <a:off x="3639312" y="4169664"/>
-            <a:ext cx="685800" cy="475488"/>
+          <p:cNvPr id="39" name="Text 37"/>
+          <p:cNvSpPr/>
+          <p:nvPr/>
+        </p:nvSpPr>
+        <p:spPr>
+          <a:xfrm>
+            <a:off x="3293146" y="4169664"/>
+            <a:ext cx="685800" cy="384048"/>
           </a:xfrm>
           <a:prstGeom prst="rect">
             <a:avLst/>
@@ -31951,7 +32540,7 @@
                 <a:ea typeface="Trebuchet MS" pitchFamily="34" charset="-122"/>
                 <a:cs typeface="Trebuchet MS" pitchFamily="34" charset="-120"/>
               </a:rPr>
-              <a:t>i</a:t>
+              <a:t>v</a:t>
             </a:r>
             <a:endParaRPr lang="en-US" sz="900" dirty="0"/>
           </a:p>
@@ -31959,18 +32548,18 @@
       </p:sp>
       <p:sp>
         <p:nvSpPr>
-          <p:cNvPr id="37" name="Shape 35"/>
-          <p:cNvSpPr/>
-          <p:nvPr/>
-        </p:nvSpPr>
-        <p:spPr>
-          <a:xfrm>
-            <a:off x="4850892" y="4169664"/>
-            <a:ext cx="685800" cy="475488"/>
+          <p:cNvPr id="40" name="Shape 38"/>
+          <p:cNvSpPr/>
+          <p:nvPr/>
+        </p:nvSpPr>
+        <p:spPr>
+          <a:xfrm>
+            <a:off x="4331643" y="4169664"/>
+            <a:ext cx="685800" cy="384048"/>
           </a:xfrm>
           <a:prstGeom prst="rect">
             <a:avLst>
-              <a:gd name="adj" fmla="val 7692"/>
+              <a:gd name="adj" fmla="val 9524"/>
             </a:avLst>
           </a:prstGeom>
           <a:solidFill>
@@ -31986,14 +32575,14 @@
       </p:sp>
       <p:sp>
         <p:nvSpPr>
-          <p:cNvPr id="38" name="Text 36"/>
-          <p:cNvSpPr/>
-          <p:nvPr/>
-        </p:nvSpPr>
-        <p:spPr>
-          <a:xfrm>
-            <a:off x="4850892" y="4169664"/>
-            <a:ext cx="685800" cy="475488"/>
+          <p:cNvPr id="41" name="Text 39"/>
+          <p:cNvSpPr/>
+          <p:nvPr/>
+        </p:nvSpPr>
+        <p:spPr>
+          <a:xfrm>
+            <a:off x="4331643" y="4169664"/>
+            <a:ext cx="685800" cy="384048"/>
           </a:xfrm>
           <a:prstGeom prst="rect">
             <a:avLst/>
@@ -32017,7 +32606,7 @@
                 <a:ea typeface="Trebuchet MS" pitchFamily="34" charset="-122"/>
                 <a:cs typeface="Trebuchet MS" pitchFamily="34" charset="-120"/>
               </a:rPr>
-              <a:t>n</a:t>
+              <a:t>er</a:t>
             </a:r>
             <a:endParaRPr lang="en-US" sz="900" dirty="0"/>
           </a:p>
@@ -32025,18 +32614,18 @@
       </p:sp>
       <p:sp>
         <p:nvSpPr>
-          <p:cNvPr id="39" name="Shape 37"/>
-          <p:cNvSpPr/>
-          <p:nvPr/>
-        </p:nvSpPr>
-        <p:spPr>
-          <a:xfrm>
-            <a:off x="6062472" y="4169664"/>
-            <a:ext cx="685800" cy="475488"/>
+          <p:cNvPr id="42" name="Shape 40"/>
+          <p:cNvSpPr/>
+          <p:nvPr/>
+        </p:nvSpPr>
+        <p:spPr>
+          <a:xfrm>
+            <a:off x="5370141" y="4169664"/>
+            <a:ext cx="685800" cy="384048"/>
           </a:xfrm>
           <a:prstGeom prst="rect">
             <a:avLst>
-              <a:gd name="adj" fmla="val 7692"/>
+              <a:gd name="adj" fmla="val 9524"/>
             </a:avLst>
           </a:prstGeom>
           <a:solidFill>
@@ -32052,14 +32641,14 @@
       </p:sp>
       <p:sp>
         <p:nvSpPr>
-          <p:cNvPr id="40" name="Text 38"/>
-          <p:cNvSpPr/>
-          <p:nvPr/>
-        </p:nvSpPr>
-        <p:spPr>
-          <a:xfrm>
-            <a:off x="6062472" y="4169664"/>
-            <a:ext cx="685800" cy="475488"/>
+          <p:cNvPr id="43" name="Text 41"/>
+          <p:cNvSpPr/>
+          <p:nvPr/>
+        </p:nvSpPr>
+        <p:spPr>
+          <a:xfrm>
+            <a:off x="5370141" y="4169664"/>
+            <a:ext cx="685800" cy="384048"/>
           </a:xfrm>
           <a:prstGeom prst="rect">
             <a:avLst/>
@@ -32083,7 +32672,7 @@
                 <a:ea typeface="Trebuchet MS" pitchFamily="34" charset="-122"/>
                 <a:cs typeface="Trebuchet MS" pitchFamily="34" charset="-120"/>
               </a:rPr>
-              <a:t>k</a:t>
+              <a:t>th</a:t>
             </a:r>
             <a:endParaRPr lang="en-US" sz="900" dirty="0"/>
           </a:p>
@@ -32091,18 +32680,18 @@
       </p:sp>
       <p:sp>
         <p:nvSpPr>
-          <p:cNvPr id="41" name="Shape 39"/>
-          <p:cNvSpPr/>
-          <p:nvPr/>
-        </p:nvSpPr>
-        <p:spPr>
-          <a:xfrm>
-            <a:off x="7274052" y="4169664"/>
-            <a:ext cx="685800" cy="475488"/>
+          <p:cNvPr id="44" name="Shape 42"/>
+          <p:cNvSpPr/>
+          <p:nvPr/>
+        </p:nvSpPr>
+        <p:spPr>
+          <a:xfrm>
+            <a:off x="6408638" y="4169664"/>
+            <a:ext cx="685800" cy="384048"/>
           </a:xfrm>
           <a:prstGeom prst="rect">
             <a:avLst>
-              <a:gd name="adj" fmla="val 7692"/>
+              <a:gd name="adj" fmla="val 9524"/>
             </a:avLst>
           </a:prstGeom>
           <a:solidFill>
@@ -32118,14 +32707,14 @@
       </p:sp>
       <p:sp>
         <p:nvSpPr>
-          <p:cNvPr id="42" name="Text 40"/>
-          <p:cNvSpPr/>
-          <p:nvPr/>
-        </p:nvSpPr>
-        <p:spPr>
-          <a:xfrm>
-            <a:off x="7274052" y="4169664"/>
-            <a:ext cx="685800" cy="475488"/>
+          <p:cNvPr id="45" name="Text 43"/>
+          <p:cNvSpPr/>
+          <p:nvPr/>
+        </p:nvSpPr>
+        <p:spPr>
+          <a:xfrm>
+            <a:off x="6408638" y="4169664"/>
+            <a:ext cx="685800" cy="384048"/>
           </a:xfrm>
           <a:prstGeom prst="rect">
             <a:avLst/>
@@ -32149,7 +32738,112 @@
                 <a:ea typeface="Trebuchet MS" pitchFamily="34" charset="-122"/>
                 <a:cs typeface="Trebuchet MS" pitchFamily="34" charset="-120"/>
               </a:rPr>
-              <a:t>er</a:t>
+              <a:t>ough</a:t>
+            </a:r>
+            <a:endParaRPr lang="en-US" sz="900" dirty="0"/>
+          </a:p>
+        </p:txBody>
+      </p:sp>
+      <p:sp>
+        <p:nvSpPr>
+          <p:cNvPr id="46" name="Text 44"/>
+          <p:cNvSpPr/>
+          <p:nvPr/>
+        </p:nvSpPr>
+        <p:spPr>
+          <a:xfrm>
+            <a:off x="6408638" y="4572000"/>
+            <a:ext cx="685800" cy="219456"/>
+          </a:xfrm>
+          <a:prstGeom prst="rect">
+            <a:avLst/>
+          </a:prstGeom>
+          <a:noFill/>
+          <a:ln/>
+        </p:spPr>
+        <p:txBody>
+          <a:bodyPr wrap="square" lIns="0" tIns="0" rIns="0" bIns="0" rtlCol="0" anchor="t"/>
+          <a:lstStyle/>
+          <a:p>
+            <a:pPr algn="ctr" indent="0" marL="0">
+              <a:buNone/>
+            </a:pPr>
+            <a:r>
+              <a:rPr lang="en-US" sz="750" i="1" dirty="0">
+                <a:solidFill>
+                  <a:srgbClr val="94A3B8"/>
+                </a:solidFill>
+                <a:latin typeface="Calibri" pitchFamily="34" charset="0"/>
+                <a:ea typeface="Calibri" pitchFamily="34" charset="-122"/>
+                <a:cs typeface="Calibri" pitchFamily="34" charset="-120"/>
+              </a:rPr>
+              <a:t>/aw/</a:t>
+            </a:r>
+            <a:endParaRPr lang="en-US" sz="750" dirty="0"/>
+          </a:p>
+        </p:txBody>
+      </p:sp>
+      <p:sp>
+        <p:nvSpPr>
+          <p:cNvPr id="47" name="Shape 45"/>
+          <p:cNvSpPr/>
+          <p:nvPr/>
+        </p:nvSpPr>
+        <p:spPr>
+          <a:xfrm>
+            <a:off x="7447135" y="4169664"/>
+            <a:ext cx="685800" cy="384048"/>
+          </a:xfrm>
+          <a:prstGeom prst="rect">
+            <a:avLst>
+              <a:gd name="adj" fmla="val 9524"/>
+            </a:avLst>
+          </a:prstGeom>
+          <a:solidFill>
+            <a:srgbClr val="FFFFFF"/>
+          </a:solidFill>
+          <a:ln w="12700">
+            <a:solidFill>
+              <a:srgbClr val="DB2777"/>
+            </a:solidFill>
+            <a:prstDash val="solid"/>
+          </a:ln>
+        </p:spPr>
+      </p:sp>
+      <p:sp>
+        <p:nvSpPr>
+          <p:cNvPr id="48" name="Text 46"/>
+          <p:cNvSpPr/>
+          <p:nvPr/>
+        </p:nvSpPr>
+        <p:spPr>
+          <a:xfrm>
+            <a:off x="7447135" y="4169664"/>
+            <a:ext cx="685800" cy="384048"/>
+          </a:xfrm>
+          <a:prstGeom prst="rect">
+            <a:avLst/>
+          </a:prstGeom>
+          <a:noFill/>
+          <a:ln/>
+        </p:spPr>
+        <p:txBody>
+          <a:bodyPr wrap="square" lIns="0" tIns="0" rIns="0" bIns="0" rtlCol="0" anchor="ctr"/>
+          <a:lstStyle/>
+          <a:p>
+            <a:pPr algn="ctr" indent="0" marL="0">
+              <a:buNone/>
+            </a:pPr>
+            <a:r>
+              <a:rPr lang="en-US" sz="900" b="1" dirty="0">
+                <a:solidFill>
+                  <a:srgbClr val="9D174D"/>
+                </a:solidFill>
+                <a:latin typeface="Trebuchet MS" pitchFamily="34" charset="0"/>
+                <a:ea typeface="Trebuchet MS" pitchFamily="34" charset="-122"/>
+                <a:cs typeface="Trebuchet MS" pitchFamily="34" charset="-120"/>
+              </a:rPr>
+              <a:t>t</a:t>
             </a:r>
             <a:endParaRPr lang="en-US" sz="900" dirty="0"/>
           </a:p>
@@ -34345,7 +35039,7 @@
                 <a:ea typeface="Trebuchet MS" pitchFamily="34" charset="-122"/>
                 <a:cs typeface="Trebuchet MS" pitchFamily="34" charset="-120"/>
               </a:rPr>
-              <a:t>-ers</a:t>
+              <a:t>-able</a:t>
             </a:r>
             <a:endParaRPr lang="en-US" sz="1300" dirty="0"/>
           </a:p>
@@ -34409,7 +35103,7 @@
                 <a:ea typeface="Trebuchet MS" pitchFamily="34" charset="-122"/>
                 <a:cs typeface="Trebuchet MS" pitchFamily="34" charset="-120"/>
               </a:rPr>
-              <a:t>free-</a:t>
+              <a:t>out-</a:t>
             </a:r>
             <a:endParaRPr lang="en-US" sz="1300" dirty="0"/>
           </a:p>
@@ -34498,7 +35192,7 @@
                 <a:ea typeface="Trebuchet MS" pitchFamily="34" charset="-122"/>
                 <a:cs typeface="Trebuchet MS" pitchFamily="34" charset="-120"/>
               </a:rPr>
-              <a:t>-able</a:t>
+              <a:t>-ers</a:t>
             </a:r>
             <a:endParaRPr lang="en-US" sz="1300" dirty="0"/>
           </a:p>
@@ -34562,7 +35256,7 @@
                 <a:ea typeface="Trebuchet MS" pitchFamily="34" charset="-122"/>
                 <a:cs typeface="Trebuchet MS" pitchFamily="34" charset="-120"/>
               </a:rPr>
-              <a:t>out-</a:t>
+              <a:t>fore-</a:t>
             </a:r>
             <a:endParaRPr lang="en-US" sz="1300" dirty="0"/>
           </a:p>
@@ -34651,7 +35345,7 @@
                 <a:ea typeface="Trebuchet MS" pitchFamily="34" charset="-122"/>
                 <a:cs typeface="Trebuchet MS" pitchFamily="34" charset="-120"/>
               </a:rPr>
-              <a:t>-ingly</a:t>
+              <a:t>-s</a:t>
             </a:r>
             <a:endParaRPr lang="en-US" sz="1300" dirty="0"/>
           </a:p>
@@ -35086,7 +35780,7 @@
                 <a:ea typeface="Trebuchet MS" pitchFamily="34" charset="-122"/>
                 <a:cs typeface="Trebuchet MS" pitchFamily="34" charset="-120"/>
               </a:rPr>
-              <a:t>freethinking</a:t>
+              <a:t>outthink</a:t>
             </a:r>
             <a:endParaRPr lang="en-US" sz="1200" dirty="0"/>
           </a:p>
@@ -35152,7 +35846,7 @@
                 <a:ea typeface="Trebuchet MS" pitchFamily="34" charset="-122"/>
                 <a:cs typeface="Trebuchet MS" pitchFamily="34" charset="-120"/>
               </a:rPr>
-              <a:t>outthink</a:t>
+              <a:t>forethink</a:t>
             </a:r>
             <a:endParaRPr lang="en-US" sz="1200" dirty="0"/>
           </a:p>
@@ -35218,7 +35912,7 @@
                 <a:ea typeface="Trebuchet MS" pitchFamily="34" charset="-122"/>
                 <a:cs typeface="Trebuchet MS" pitchFamily="34" charset="-120"/>
               </a:rPr>
-              <a:t>thinkable</a:t>
+              <a:t>thinkers</a:t>
             </a:r>
             <a:endParaRPr lang="en-US" sz="1200" dirty="0"/>
           </a:p>
@@ -36406,7 +37100,7 @@
                 <a:ea typeface="Calibri" pitchFamily="34" charset="-122"/>
                 <a:cs typeface="Calibri" pitchFamily="34" charset="-120"/>
               </a:rPr>
-              <a:t>1.  The word 'rethink' means to think about something again.</a:t>
+              <a:t>1.  'Unthinkable' means something that is easy and pleasant to imagine.</a:t>
             </a:r>
             <a:endParaRPr lang="en-US" sz="1300" dirty="0"/>
           </a:p>
@@ -36429,11 +37123,11 @@
             </a:avLst>
           </a:prstGeom>
           <a:solidFill>
-            <a:srgbClr val="DCFCE7"/>
-          </a:solidFill>
-          <a:ln w="12700">
-            <a:solidFill>
-              <a:srgbClr val="16A34A"/>
+            <a:srgbClr val="FEE2E2"/>
+          </a:solidFill>
+          <a:ln w="12700">
+            <a:solidFill>
+              <a:srgbClr val="DC2626"/>
             </a:solidFill>
             <a:prstDash val="solid"/>
           </a:ln>
@@ -36466,13 +37160,13 @@
             <a:r>
               <a:rPr lang="en-US" sz="1100" b="1" dirty="0">
                 <a:solidFill>
-                  <a:srgbClr val="16A34A"/>
+                  <a:srgbClr val="DC2626"/>
                 </a:solidFill>
                 <a:latin typeface="Trebuchet MS" pitchFamily="34" charset="0"/>
                 <a:ea typeface="Trebuchet MS" pitchFamily="34" charset="-122"/>
                 <a:cs typeface="Trebuchet MS" pitchFamily="34" charset="-120"/>
               </a:rPr>
-              <a:t>TRUE</a:t>
+              <a:t>FALSE</a:t>
             </a:r>
             <a:endParaRPr lang="en-US" sz="1100" dirty="0"/>
           </a:p>
@@ -36545,7 +37239,7 @@
                 <a:ea typeface="Calibri" pitchFamily="34" charset="-122"/>
                 <a:cs typeface="Calibri" pitchFamily="34" charset="-120"/>
               </a:rPr>
-              <a:t>2.  The root 'think' comes from Latin.</a:t>
+              <a:t>2.  Adding '-er' to 'think' makes 'thinker', meaning a person who thinks.</a:t>
             </a:r>
             <a:endParaRPr lang="en-US" sz="1300" dirty="0"/>
           </a:p>
@@ -36568,11 +37262,11 @@
             </a:avLst>
           </a:prstGeom>
           <a:solidFill>
-            <a:srgbClr val="FEE2E2"/>
-          </a:solidFill>
-          <a:ln w="12700">
-            <a:solidFill>
-              <a:srgbClr val="DC2626"/>
+            <a:srgbClr val="DCFCE7"/>
+          </a:solidFill>
+          <a:ln w="12700">
+            <a:solidFill>
+              <a:srgbClr val="16A34A"/>
             </a:solidFill>
             <a:prstDash val="solid"/>
           </a:ln>
@@ -36605,13 +37299,13 @@
             <a:r>
               <a:rPr lang="en-US" sz="1100" b="1" dirty="0">
                 <a:solidFill>
-                  <a:srgbClr val="DC2626"/>
+                  <a:srgbClr val="16A34A"/>
                 </a:solidFill>
                 <a:latin typeface="Trebuchet MS" pitchFamily="34" charset="0"/>
                 <a:ea typeface="Trebuchet MS" pitchFamily="34" charset="-122"/>
                 <a:cs typeface="Trebuchet MS" pitchFamily="34" charset="-120"/>
               </a:rPr>
-              <a:t>FALSE</a:t>
+              <a:t>TRUE</a:t>
             </a:r>
             <a:endParaRPr lang="en-US" sz="1100" dirty="0"/>
           </a:p>
@@ -36684,7 +37378,7 @@
                 <a:ea typeface="Calibri" pitchFamily="34" charset="-122"/>
                 <a:cs typeface="Calibri" pitchFamily="34" charset="-120"/>
               </a:rPr>
-              <a:t>3.  The word 'thinker' describes a person who thinks carefully.</a:t>
+              <a:t>3.  The word 'rethink' contains the root 'think' and the prefix 're-', meaning again.</a:t>
             </a:r>
             <a:endParaRPr lang="en-US" sz="1300" dirty="0"/>
           </a:p>
@@ -36823,7 +37517,7 @@
                 <a:ea typeface="Calibri" pitchFamily="34" charset="-122"/>
                 <a:cs typeface="Calibri" pitchFamily="34" charset="-120"/>
               </a:rPr>
-              <a:t>4.  Adding the prefix 'un' to 'thinkable' makes it mean the opposite.</a:t>
+              <a:t>4.  The root 'think' comes from the Latin language.</a:t>
             </a:r>
             <a:endParaRPr lang="en-US" sz="1300" dirty="0"/>
           </a:p>
@@ -36846,11 +37540,11 @@
             </a:avLst>
           </a:prstGeom>
           <a:solidFill>
-            <a:srgbClr val="DCFCE7"/>
-          </a:solidFill>
-          <a:ln w="12700">
-            <a:solidFill>
-              <a:srgbClr val="16A34A"/>
+            <a:srgbClr val="FEE2E2"/>
+          </a:solidFill>
+          <a:ln w="12700">
+            <a:solidFill>
+              <a:srgbClr val="DC2626"/>
             </a:solidFill>
             <a:prstDash val="solid"/>
           </a:ln>
@@ -36883,13 +37577,13 @@
             <a:r>
               <a:rPr lang="en-US" sz="1100" b="1" dirty="0">
                 <a:solidFill>
-                  <a:srgbClr val="16A34A"/>
+                  <a:srgbClr val="DC2626"/>
                 </a:solidFill>
                 <a:latin typeface="Trebuchet MS" pitchFamily="34" charset="0"/>
                 <a:ea typeface="Trebuchet MS" pitchFamily="34" charset="-122"/>
                 <a:cs typeface="Trebuchet MS" pitchFamily="34" charset="-120"/>
               </a:rPr>
-              <a:t>TRUE</a:t>
+              <a:t>FALSE</a:t>
             </a:r>
             <a:endParaRPr lang="en-US" sz="1100" dirty="0"/>
           </a:p>
@@ -36962,7 +37656,7 @@
                 <a:ea typeface="Calibri" pitchFamily="34" charset="-122"/>
                 <a:cs typeface="Calibri" pitchFamily="34" charset="-120"/>
               </a:rPr>
-              <a:t>5.  The word 'overthink' means you are not thinking enough.</a:t>
+              <a:t>5.  'Overthink' means to think about something far too much.</a:t>
             </a:r>
             <a:endParaRPr lang="en-US" sz="1300" dirty="0"/>
           </a:p>
@@ -36985,11 +37679,11 @@
             </a:avLst>
           </a:prstGeom>
           <a:solidFill>
-            <a:srgbClr val="FEE2E2"/>
-          </a:solidFill>
-          <a:ln w="12700">
-            <a:solidFill>
-              <a:srgbClr val="DC2626"/>
+            <a:srgbClr val="DCFCE7"/>
+          </a:solidFill>
+          <a:ln w="12700">
+            <a:solidFill>
+              <a:srgbClr val="16A34A"/>
             </a:solidFill>
             <a:prstDash val="solid"/>
           </a:ln>
@@ -37022,13 +37716,13 @@
             <a:r>
               <a:rPr lang="en-US" sz="1100" b="1" dirty="0">
                 <a:solidFill>
-                  <a:srgbClr val="DC2626"/>
+                  <a:srgbClr val="16A34A"/>
                 </a:solidFill>
                 <a:latin typeface="Trebuchet MS" pitchFamily="34" charset="0"/>
                 <a:ea typeface="Trebuchet MS" pitchFamily="34" charset="-122"/>
                 <a:cs typeface="Trebuchet MS" pitchFamily="34" charset="-120"/>
               </a:rPr>
-              <a:t>FALSE</a:t>
+              <a:t>TRUE</a:t>
             </a:r>
             <a:endParaRPr lang="en-US" sz="1100" dirty="0"/>
           </a:p>
@@ -37931,7 +38625,7 @@
                 <a:ea typeface="Trebuchet MS" pitchFamily="34" charset="-122"/>
                 <a:cs typeface="Trebuchet MS" pitchFamily="34" charset="-120"/>
               </a:rPr>
-              <a:t>freethinking</a:t>
+              <a:t>outthink</a:t>
             </a:r>
             <a:endParaRPr lang="en-US" sz="1300" dirty="0"/>
           </a:p>
@@ -37997,7 +38691,7 @@
                 <a:ea typeface="Trebuchet MS" pitchFamily="34" charset="-122"/>
                 <a:cs typeface="Trebuchet MS" pitchFamily="34" charset="-120"/>
               </a:rPr>
-              <a:t>outthink</a:t>
+              <a:t>forethink</a:t>
             </a:r>
             <a:endParaRPr lang="en-US" sz="1300" dirty="0"/>
           </a:p>
@@ -39024,7 +39718,7 @@
                 <a:ea typeface="Trebuchet MS" pitchFamily="34" charset="-122"/>
                 <a:cs typeface="Trebuchet MS" pitchFamily="34" charset="-120"/>
               </a:rPr>
-              <a:t>-ers</a:t>
+              <a:t>-able</a:t>
             </a:r>
             <a:endParaRPr lang="en-US" sz="1300" dirty="0"/>
           </a:p>
@@ -39088,7 +39782,7 @@
                 <a:ea typeface="Trebuchet MS" pitchFamily="34" charset="-122"/>
                 <a:cs typeface="Trebuchet MS" pitchFamily="34" charset="-120"/>
               </a:rPr>
-              <a:t>free-</a:t>
+              <a:t>out-</a:t>
             </a:r>
             <a:endParaRPr lang="en-US" sz="1300" dirty="0"/>
           </a:p>
@@ -39177,7 +39871,7 @@
                 <a:ea typeface="Trebuchet MS" pitchFamily="34" charset="-122"/>
                 <a:cs typeface="Trebuchet MS" pitchFamily="34" charset="-120"/>
               </a:rPr>
-              <a:t>-able</a:t>
+              <a:t>-ers</a:t>
             </a:r>
             <a:endParaRPr lang="en-US" sz="1300" dirty="0"/>
           </a:p>
@@ -39241,7 +39935,7 @@
                 <a:ea typeface="Trebuchet MS" pitchFamily="34" charset="-122"/>
                 <a:cs typeface="Trebuchet MS" pitchFamily="34" charset="-120"/>
               </a:rPr>
-              <a:t>out-</a:t>
+              <a:t>fore-</a:t>
             </a:r>
             <a:endParaRPr lang="en-US" sz="1300" dirty="0"/>
           </a:p>
@@ -39330,7 +40024,7 @@
                 <a:ea typeface="Trebuchet MS" pitchFamily="34" charset="-122"/>
                 <a:cs typeface="Trebuchet MS" pitchFamily="34" charset="-120"/>
               </a:rPr>
-              <a:t>-ingly</a:t>
+              <a:t>-s</a:t>
             </a:r>
             <a:endParaRPr lang="en-US" sz="1300" dirty="0"/>
           </a:p>
@@ -40241,7 +40935,7 @@
                 <a:ea typeface="Calibri" pitchFamily="34" charset="-122"/>
                 <a:cs typeface="Calibri" pitchFamily="34" charset="-120"/>
               </a:rPr>
-              <a:t>Using your mind to form ideas or solve problems.</a:t>
+              <a:t>Using your mind to work something out or have ideas.</a:t>
             </a:r>
             <a:endParaRPr lang="en-US" sz="1200" dirty="0"/>
           </a:p>
@@ -40519,7 +41213,7 @@
                 <a:ea typeface="Calibri" pitchFamily="34" charset="-122"/>
                 <a:cs typeface="Calibri" pitchFamily="34" charset="-120"/>
               </a:rPr>
-              <a:t>Forming your own opinions rather than following what others believe.</a:t>
+              <a:t>To be cleverer than someone else by thinking better than them.</a:t>
             </a:r>
             <a:endParaRPr lang="en-US" sz="1200" dirty="0"/>
           </a:p>
@@ -40658,7 +41352,7 @@
                 <a:ea typeface="Calibri" pitchFamily="34" charset="-122"/>
                 <a:cs typeface="Calibri" pitchFamily="34" charset="-120"/>
               </a:rPr>
-              <a:t>So shocking or terrible that it is hard to even imagine.</a:t>
+              <a:t>Something so shocking or terrible that it is hard to even imagine.</a:t>
             </a:r>
             <a:endParaRPr lang="en-US" sz="1200" dirty="0"/>
           </a:p>
@@ -40870,7 +41564,7 @@
                 <a:ea typeface="Trebuchet MS" pitchFamily="34" charset="-122"/>
                 <a:cs typeface="Trebuchet MS" pitchFamily="34" charset="-120"/>
               </a:rPr>
-              <a:t>freethinking</a:t>
+              <a:t>outthink</a:t>
             </a:r>
             <a:endParaRPr lang="en-US" sz="1200" dirty="0"/>
           </a:p>
@@ -40936,7 +41630,7 @@
                 <a:ea typeface="Calibri" pitchFamily="34" charset="-122"/>
                 <a:cs typeface="Calibri" pitchFamily="34" charset="-120"/>
               </a:rPr>
-              <a:t>To be cleverer than someone else by thinking better than them.</a:t>
+              <a:t>To think about or plan something carefully before it happens.</a:t>
             </a:r>
             <a:endParaRPr lang="en-US" sz="1200" dirty="0"/>
           </a:p>
@@ -41009,7 +41703,7 @@
                 <a:ea typeface="Trebuchet MS" pitchFamily="34" charset="-122"/>
                 <a:cs typeface="Trebuchet MS" pitchFamily="34" charset="-120"/>
               </a:rPr>
-              <a:t>outthink</a:t>
+              <a:t>forethink</a:t>
             </a:r>
             <a:endParaRPr lang="en-US" sz="1200" dirty="0"/>
           </a:p>
@@ -41570,7 +42264,7 @@
                 <a:ea typeface="Calibri" pitchFamily="34" charset="-122"/>
                 <a:cs typeface="Calibri" pitchFamily="34" charset="-120"/>
               </a:rPr>
-              <a:t>The young scientist was known as a brilliant thinker who loved solving tricky problems.</a:t>
+              <a:t>The young thinker sat quietly under the tree, working through a tricky maths problem in her head.</a:t>
             </a:r>
             <a:endParaRPr lang="en-US" sz="1500" dirty="0"/>
           </a:p>
@@ -41734,7 +42428,7 @@
                 <a:ea typeface="Calibri" pitchFamily="34" charset="-122"/>
                 <a:cs typeface="Calibri" pitchFamily="34" charset="-120"/>
               </a:rPr>
-              <a:t>After making a mistake, Mia decided to rethink her plan before trying again.</a:t>
+              <a:t>Mr Nguyen asked us to rethink our answers after reading the passage a second time.</a:t>
             </a:r>
             <a:endParaRPr lang="en-US" sz="1500" dirty="0"/>
           </a:p>
@@ -41898,7 +42592,7 @@
                 <a:ea typeface="Calibri" pitchFamily="34" charset="-122"/>
                 <a:cs typeface="Calibri" pitchFamily="34" charset="-120"/>
               </a:rPr>
-              <a:t>It is unthinkable that anyone would leave an animal out in a storm without shelter.</a:t>
+              <a:t>It is unthinkable that anyone would leave an animal out in such dangerous heat.</a:t>
             </a:r>
             <a:endParaRPr lang="en-US" sz="1500" dirty="0"/>
           </a:p>
